--- a/主体的に学習に取り組む態度の評価方法.pptx
+++ b/主体的に学習に取り組む態度の評価方法.pptx
@@ -17,6 +17,15 @@
     <p:sldId id="265" r:id="rId16"/>
     <p:sldId id="266" r:id="rId17"/>
     <p:sldId id="267" r:id="rId18"/>
+    <p:sldId id="268" r:id="rId19"/>
+    <p:sldId id="269" r:id="rId20"/>
+    <p:sldId id="270" r:id="rId21"/>
+    <p:sldId id="271" r:id="rId22"/>
+    <p:sldId id="272" r:id="rId23"/>
+    <p:sldId id="273" r:id="rId24"/>
+    <p:sldId id="274" r:id="rId25"/>
+    <p:sldId id="275" r:id="rId26"/>
+    <p:sldId id="276" r:id="rId27"/>
   </p:sldIdLst>
   <p:sldSz cx="12191695" cy="6858000" type="screen4x3"/>
   <p:notesSz cx="6858000" cy="9144000"/>
@@ -6796,6 +6805,6117 @@
 </p:sld>
 </file>
 
+<file path=ppt/slides/slide13.xml><?xml version="1.0" encoding="utf-8"?>
+<p:sld xmlns:a="http://schemas.openxmlformats.org/drawingml/2006/main" xmlns:p="http://schemas.openxmlformats.org/presentationml/2006/main" xmlns:r="http://schemas.openxmlformats.org/officeDocument/2006/relationships">
+  <p:cSld>
+    <p:spTree>
+      <p:nvGrpSpPr>
+        <p:cNvPr id="1" name=""/>
+        <p:cNvGrpSpPr/>
+        <p:nvPr/>
+      </p:nvGrpSpPr>
+      <p:grpSpPr/>
+      <p:sp>
+        <p:nvSpPr>
+          <p:cNvPr id="2" name="Rectangle 1"/>
+          <p:cNvSpPr/>
+          <p:nvPr/>
+        </p:nvSpPr>
+        <p:spPr>
+          <a:xfrm>
+            <a:off x="0" y="0"/>
+            <a:ext cx="12191695" cy="6858000"/>
+          </a:xfrm>
+          <a:prstGeom prst="rect">
+            <a:avLst/>
+          </a:prstGeom>
+          <a:solidFill>
+            <a:srgbClr val="1F3A5F"/>
+          </a:solidFill>
+          <a:ln>
+            <a:noFill/>
+          </a:ln>
+          <a:effectLst/>
+        </p:spPr>
+        <p:style>
+          <a:lnRef idx="1">
+            <a:schemeClr val="accent1"/>
+          </a:lnRef>
+          <a:fillRef idx="3">
+            <a:schemeClr val="accent1"/>
+          </a:fillRef>
+          <a:effectRef idx="2">
+            <a:schemeClr val="accent1"/>
+          </a:effectRef>
+          <a:fontRef idx="minor">
+            <a:schemeClr val="lt1"/>
+          </a:fontRef>
+        </p:style>
+        <p:txBody>
+          <a:bodyPr rtlCol="0" anchor="ctr"/>
+          <a:lstStyle/>
+          <a:p>
+            <a:pPr algn="ctr"/>
+          </a:p>
+        </p:txBody>
+      </p:sp>
+      <p:sp>
+        <p:nvSpPr>
+          <p:cNvPr id="3" name="Rectangle 2"/>
+          <p:cNvSpPr/>
+          <p:nvPr/>
+        </p:nvSpPr>
+        <p:spPr>
+          <a:xfrm>
+            <a:off x="0" y="2331720"/>
+            <a:ext cx="12191695" cy="73152"/>
+          </a:xfrm>
+          <a:prstGeom prst="rect">
+            <a:avLst/>
+          </a:prstGeom>
+          <a:solidFill>
+            <a:srgbClr val="C45A11"/>
+          </a:solidFill>
+          <a:ln>
+            <a:noFill/>
+          </a:ln>
+          <a:effectLst/>
+        </p:spPr>
+        <p:style>
+          <a:lnRef idx="1">
+            <a:schemeClr val="accent1"/>
+          </a:lnRef>
+          <a:fillRef idx="3">
+            <a:schemeClr val="accent1"/>
+          </a:fillRef>
+          <a:effectRef idx="2">
+            <a:schemeClr val="accent1"/>
+          </a:effectRef>
+          <a:fontRef idx="minor">
+            <a:schemeClr val="lt1"/>
+          </a:fontRef>
+        </p:style>
+        <p:txBody>
+          <a:bodyPr rtlCol="0" anchor="ctr"/>
+          <a:lstStyle/>
+          <a:p>
+            <a:pPr algn="ctr"/>
+          </a:p>
+        </p:txBody>
+      </p:sp>
+      <p:sp>
+        <p:nvSpPr>
+          <p:cNvPr id="4" name="Rectangle 3"/>
+          <p:cNvSpPr/>
+          <p:nvPr/>
+        </p:nvSpPr>
+        <p:spPr>
+          <a:xfrm>
+            <a:off x="0" y="4526280"/>
+            <a:ext cx="12191695" cy="27432"/>
+          </a:xfrm>
+          <a:prstGeom prst="rect">
+            <a:avLst/>
+          </a:prstGeom>
+          <a:solidFill>
+            <a:srgbClr val="FFFFFF"/>
+          </a:solidFill>
+          <a:ln>
+            <a:noFill/>
+          </a:ln>
+          <a:effectLst/>
+        </p:spPr>
+        <p:style>
+          <a:lnRef idx="1">
+            <a:schemeClr val="accent1"/>
+          </a:lnRef>
+          <a:fillRef idx="3">
+            <a:schemeClr val="accent1"/>
+          </a:fillRef>
+          <a:effectRef idx="2">
+            <a:schemeClr val="accent1"/>
+          </a:effectRef>
+          <a:fontRef idx="minor">
+            <a:schemeClr val="lt1"/>
+          </a:fontRef>
+        </p:style>
+        <p:txBody>
+          <a:bodyPr rtlCol="0" anchor="ctr"/>
+          <a:lstStyle/>
+          <a:p>
+            <a:pPr algn="ctr"/>
+          </a:p>
+        </p:txBody>
+      </p:sp>
+      <p:sp>
+        <p:nvSpPr>
+          <p:cNvPr id="5" name="Rectangle 4"/>
+          <p:cNvSpPr/>
+          <p:nvPr/>
+        </p:nvSpPr>
+        <p:spPr>
+          <a:xfrm>
+            <a:off x="4956048" y="1234440"/>
+            <a:ext cx="2286000" cy="502920"/>
+          </a:xfrm>
+          <a:prstGeom prst="rect">
+            <a:avLst/>
+          </a:prstGeom>
+          <a:solidFill>
+            <a:srgbClr val="FFFFFF"/>
+          </a:solidFill>
+          <a:ln>
+            <a:noFill/>
+          </a:ln>
+          <a:effectLst/>
+        </p:spPr>
+        <p:style>
+          <a:lnRef idx="1">
+            <a:schemeClr val="accent1"/>
+          </a:lnRef>
+          <a:fillRef idx="3">
+            <a:schemeClr val="accent1"/>
+          </a:fillRef>
+          <a:effectRef idx="2">
+            <a:schemeClr val="accent1"/>
+          </a:effectRef>
+          <a:fontRef idx="minor">
+            <a:schemeClr val="lt1"/>
+          </a:fontRef>
+        </p:style>
+        <p:txBody>
+          <a:bodyPr rtlCol="0" anchor="ctr" wrap="square" tIns="36576" bIns="36576"/>
+          <a:lstStyle/>
+          <a:p>
+            <a:pPr algn="ctr">
+              <a:spcAft>
+                <a:spcPts val="200"/>
+              </a:spcAft>
+            </a:pPr>
+            <a:r>
+              <a:rPr sz="2000" b="1">
+                <a:solidFill>
+                  <a:srgbClr val="1F3A5F"/>
+                </a:solidFill>
+                <a:latin typeface="IPAGothic"/>
+                <a:eastAsia typeface="IPAGothic"/>
+              </a:rPr>
+              <a:t>補 論</a:t>
+            </a:r>
+          </a:p>
+        </p:txBody>
+      </p:sp>
+      <p:sp>
+        <p:nvSpPr>
+          <p:cNvPr id="6" name="TextBox 5"/>
+          <p:cNvSpPr txBox="1"/>
+          <p:nvPr/>
+        </p:nvSpPr>
+        <p:spPr>
+          <a:xfrm>
+            <a:off x="457200" y="2514600"/>
+            <a:ext cx="11274552" cy="1371600"/>
+          </a:xfrm>
+          <a:prstGeom prst="rect">
+            <a:avLst/>
+          </a:prstGeom>
+          <a:noFill/>
+          <a:ln>
+            <a:noFill/>
+          </a:ln>
+        </p:spPr>
+        <p:txBody>
+          <a:bodyPr wrap="square" lIns="73152" rIns="73152" tIns="36576" bIns="36576" anchor="ctr">
+            <a:spAutoFit/>
+          </a:bodyPr>
+          <a:lstStyle/>
+          <a:p>
+            <a:pPr algn="ctr">
+              <a:spcAft>
+                <a:spcPts val="200"/>
+              </a:spcAft>
+            </a:pPr>
+            <a:r>
+              <a:rPr sz="4000" b="1">
+                <a:solidFill>
+                  <a:srgbClr val="FFFFFF"/>
+                </a:solidFill>
+                <a:latin typeface="IPAGothic"/>
+                <a:eastAsia typeface="IPAGothic"/>
+              </a:rPr>
+              <a:t>「AAC」「CCA」評価をどう考えるか</a:t>
+            </a:r>
+          </a:p>
+        </p:txBody>
+      </p:sp>
+      <p:sp>
+        <p:nvSpPr>
+          <p:cNvPr id="7" name="TextBox 6"/>
+          <p:cNvSpPr txBox="1"/>
+          <p:nvPr/>
+        </p:nvSpPr>
+        <p:spPr>
+          <a:xfrm>
+            <a:off x="457200" y="3794760"/>
+            <a:ext cx="11274552" cy="640080"/>
+          </a:xfrm>
+          <a:prstGeom prst="rect">
+            <a:avLst/>
+          </a:prstGeom>
+          <a:noFill/>
+          <a:ln>
+            <a:noFill/>
+          </a:ln>
+        </p:spPr>
+        <p:txBody>
+          <a:bodyPr wrap="square" lIns="73152" rIns="73152" tIns="36576" bIns="36576" anchor="ctr">
+            <a:spAutoFit/>
+          </a:bodyPr>
+          <a:lstStyle/>
+          <a:p>
+            <a:pPr algn="ctr">
+              <a:spcAft>
+                <a:spcPts val="200"/>
+              </a:spcAft>
+            </a:pPr>
+            <a:r>
+              <a:rPr sz="1900" b="0">
+                <a:solidFill>
+                  <a:srgbClr val="D6E4F0"/>
+                </a:solidFill>
+                <a:latin typeface="IPAGothic"/>
+                <a:eastAsia typeface="IPAGothic"/>
+              </a:rPr>
+              <a:t>― 講義での質問に答える / 公的資料に基づく整理 ―</a:t>
+            </a:r>
+          </a:p>
+        </p:txBody>
+      </p:sp>
+      <p:sp>
+        <p:nvSpPr>
+          <p:cNvPr id="8" name="TextBox 7"/>
+          <p:cNvSpPr txBox="1"/>
+          <p:nvPr/>
+        </p:nvSpPr>
+        <p:spPr>
+          <a:xfrm>
+            <a:off x="457200" y="4800600"/>
+            <a:ext cx="11274552" cy="548640"/>
+          </a:xfrm>
+          <a:prstGeom prst="rect">
+            <a:avLst/>
+          </a:prstGeom>
+          <a:noFill/>
+          <a:ln>
+            <a:noFill/>
+          </a:ln>
+        </p:spPr>
+        <p:txBody>
+          <a:bodyPr wrap="square" lIns="73152" rIns="73152" tIns="36576" bIns="36576" anchor="ctr">
+            <a:spAutoFit/>
+          </a:bodyPr>
+          <a:lstStyle/>
+          <a:p>
+            <a:pPr algn="ctr">
+              <a:spcAft>
+                <a:spcPts val="200"/>
+              </a:spcAft>
+            </a:pPr>
+            <a:r>
+              <a:rPr sz="1500" b="0">
+                <a:solidFill>
+                  <a:srgbClr val="FFFFFF"/>
+                </a:solidFill>
+                <a:latin typeface="IPAGothic"/>
+                <a:eastAsia typeface="IPAGothic"/>
+              </a:rPr>
+              <a:t>観点別評価:  知識・技能  /  思考・判断・表現  /  主体的に学習に取り組む態度</a:t>
+            </a:r>
+          </a:p>
+        </p:txBody>
+      </p:sp>
+      <p:sp>
+        <p:nvSpPr>
+          <p:cNvPr id="9" name="Rectangle 8"/>
+          <p:cNvSpPr/>
+          <p:nvPr/>
+        </p:nvSpPr>
+        <p:spPr>
+          <a:xfrm>
+            <a:off x="1828800" y="5623560"/>
+            <a:ext cx="8531352" cy="640080"/>
+          </a:xfrm>
+          <a:prstGeom prst="rect">
+            <a:avLst/>
+          </a:prstGeom>
+          <a:solidFill>
+            <a:srgbClr val="FFF2CC"/>
+          </a:solidFill>
+          <a:ln>
+            <a:noFill/>
+          </a:ln>
+          <a:effectLst/>
+        </p:spPr>
+        <p:style>
+          <a:lnRef idx="1">
+            <a:schemeClr val="accent1"/>
+          </a:lnRef>
+          <a:fillRef idx="3">
+            <a:schemeClr val="accent1"/>
+          </a:fillRef>
+          <a:effectRef idx="2">
+            <a:schemeClr val="accent1"/>
+          </a:effectRef>
+          <a:fontRef idx="minor">
+            <a:schemeClr val="lt1"/>
+          </a:fontRef>
+        </p:style>
+        <p:txBody>
+          <a:bodyPr rtlCol="0" anchor="ctr" wrap="square" tIns="36576" bIns="36576"/>
+          <a:lstStyle/>
+          <a:p>
+            <a:pPr algn="ctr">
+              <a:spcAft>
+                <a:spcPts val="200"/>
+              </a:spcAft>
+            </a:pPr>
+            <a:r>
+              <a:rPr sz="1400" b="1">
+                <a:solidFill>
+                  <a:srgbClr val="1F3A5F"/>
+                </a:solidFill>
+                <a:latin typeface="IPAGothic"/>
+                <a:eastAsia typeface="IPAGothic"/>
+              </a:rPr>
+              <a:t>Q.「国・都・区は AAC・CCA はありえないと言うが、現場にはそう見える生徒がいる」</a:t>
+            </a:r>
+          </a:p>
+        </p:txBody>
+      </p:sp>
+    </p:spTree>
+  </p:cSld>
+  <p:clrMapOvr>
+    <a:masterClrMapping/>
+  </p:clrMapOvr>
+</p:sld>
+</file>
+
+<file path=ppt/slides/slide14.xml><?xml version="1.0" encoding="utf-8"?>
+<p:sld xmlns:a="http://schemas.openxmlformats.org/drawingml/2006/main" xmlns:p="http://schemas.openxmlformats.org/presentationml/2006/main" xmlns:r="http://schemas.openxmlformats.org/officeDocument/2006/relationships">
+  <p:cSld>
+    <p:spTree>
+      <p:nvGrpSpPr>
+        <p:cNvPr id="1" name=""/>
+        <p:cNvGrpSpPr/>
+        <p:nvPr/>
+      </p:nvGrpSpPr>
+      <p:grpSpPr/>
+      <p:sp>
+        <p:nvSpPr>
+          <p:cNvPr id="2" name="Rectangle 1"/>
+          <p:cNvSpPr/>
+          <p:nvPr/>
+        </p:nvSpPr>
+        <p:spPr>
+          <a:xfrm>
+            <a:off x="0" y="0"/>
+            <a:ext cx="12191695" cy="777240"/>
+          </a:xfrm>
+          <a:prstGeom prst="rect">
+            <a:avLst/>
+          </a:prstGeom>
+          <a:solidFill>
+            <a:srgbClr val="1F3A5F"/>
+          </a:solidFill>
+          <a:ln>
+            <a:noFill/>
+          </a:ln>
+          <a:effectLst/>
+        </p:spPr>
+        <p:style>
+          <a:lnRef idx="1">
+            <a:schemeClr val="accent1"/>
+          </a:lnRef>
+          <a:fillRef idx="3">
+            <a:schemeClr val="accent1"/>
+          </a:fillRef>
+          <a:effectRef idx="2">
+            <a:schemeClr val="accent1"/>
+          </a:effectRef>
+          <a:fontRef idx="minor">
+            <a:schemeClr val="lt1"/>
+          </a:fontRef>
+        </p:style>
+        <p:txBody>
+          <a:bodyPr rtlCol="0" anchor="ctr"/>
+          <a:lstStyle/>
+          <a:p>
+            <a:pPr algn="ctr"/>
+          </a:p>
+        </p:txBody>
+      </p:sp>
+      <p:sp>
+        <p:nvSpPr>
+          <p:cNvPr id="3" name="Rectangle 2"/>
+          <p:cNvSpPr/>
+          <p:nvPr/>
+        </p:nvSpPr>
+        <p:spPr>
+          <a:xfrm>
+            <a:off x="0" y="777240"/>
+            <a:ext cx="12191695" cy="54864"/>
+          </a:xfrm>
+          <a:prstGeom prst="rect">
+            <a:avLst/>
+          </a:prstGeom>
+          <a:solidFill>
+            <a:srgbClr val="C45A11"/>
+          </a:solidFill>
+          <a:ln>
+            <a:noFill/>
+          </a:ln>
+          <a:effectLst/>
+        </p:spPr>
+        <p:style>
+          <a:lnRef idx="1">
+            <a:schemeClr val="accent1"/>
+          </a:lnRef>
+          <a:fillRef idx="3">
+            <a:schemeClr val="accent1"/>
+          </a:fillRef>
+          <a:effectRef idx="2">
+            <a:schemeClr val="accent1"/>
+          </a:effectRef>
+          <a:fontRef idx="minor">
+            <a:schemeClr val="lt1"/>
+          </a:fontRef>
+        </p:style>
+        <p:txBody>
+          <a:bodyPr rtlCol="0" anchor="ctr"/>
+          <a:lstStyle/>
+          <a:p>
+            <a:pPr algn="ctr"/>
+          </a:p>
+        </p:txBody>
+      </p:sp>
+      <p:sp>
+        <p:nvSpPr>
+          <p:cNvPr id="4" name="TextBox 3"/>
+          <p:cNvSpPr txBox="1"/>
+          <p:nvPr/>
+        </p:nvSpPr>
+        <p:spPr>
+          <a:xfrm>
+            <a:off x="365760" y="73152"/>
+            <a:ext cx="10424160" cy="658368"/>
+          </a:xfrm>
+          <a:prstGeom prst="rect">
+            <a:avLst/>
+          </a:prstGeom>
+          <a:noFill/>
+          <a:ln>
+            <a:noFill/>
+          </a:ln>
+        </p:spPr>
+        <p:txBody>
+          <a:bodyPr wrap="square" lIns="73152" rIns="73152" tIns="36576" bIns="36576" anchor="ctr">
+            <a:spAutoFit/>
+          </a:bodyPr>
+          <a:lstStyle/>
+          <a:p>
+            <a:pPr algn="l">
+              <a:spcAft>
+                <a:spcPts val="200"/>
+              </a:spcAft>
+            </a:pPr>
+            <a:r>
+              <a:rPr sz="2200" b="1">
+                <a:solidFill>
+                  <a:srgbClr val="FFFFFF"/>
+                </a:solidFill>
+                <a:latin typeface="IPAGothic"/>
+                <a:eastAsia typeface="IPAGothic"/>
+              </a:rPr>
+              <a:t>補論① 先生方の疑問 ― まず、そのまま受け止める</a:t>
+            </a:r>
+          </a:p>
+        </p:txBody>
+      </p:sp>
+      <p:sp>
+        <p:nvSpPr>
+          <p:cNvPr id="5" name="TextBox 4"/>
+          <p:cNvSpPr txBox="1"/>
+          <p:nvPr/>
+        </p:nvSpPr>
+        <p:spPr>
+          <a:xfrm>
+            <a:off x="10881360" y="73152"/>
+            <a:ext cx="1188720" cy="658368"/>
+          </a:xfrm>
+          <a:prstGeom prst="rect">
+            <a:avLst/>
+          </a:prstGeom>
+          <a:noFill/>
+          <a:ln>
+            <a:noFill/>
+          </a:ln>
+        </p:spPr>
+        <p:txBody>
+          <a:bodyPr wrap="square" lIns="73152" rIns="73152" tIns="36576" bIns="36576" anchor="ctr">
+            <a:spAutoFit/>
+          </a:bodyPr>
+          <a:lstStyle/>
+          <a:p>
+            <a:pPr algn="r">
+              <a:spcAft>
+                <a:spcPts val="200"/>
+              </a:spcAft>
+            </a:pPr>
+            <a:r>
+              <a:rPr sz="1200" b="0">
+                <a:solidFill>
+                  <a:srgbClr val="FFFFFF"/>
+                </a:solidFill>
+                <a:latin typeface="IPAGothic"/>
+                <a:eastAsia typeface="IPAGothic"/>
+              </a:rPr>
+              <a:t>補論 1 / 8</a:t>
+            </a:r>
+          </a:p>
+        </p:txBody>
+      </p:sp>
+      <p:sp>
+        <p:nvSpPr>
+          <p:cNvPr id="6" name="Rectangle 5"/>
+          <p:cNvSpPr/>
+          <p:nvPr/>
+        </p:nvSpPr>
+        <p:spPr>
+          <a:xfrm>
+            <a:off x="0" y="6583680"/>
+            <a:ext cx="12191695" cy="274320"/>
+          </a:xfrm>
+          <a:prstGeom prst="rect">
+            <a:avLst/>
+          </a:prstGeom>
+          <a:solidFill>
+            <a:srgbClr val="F2F2F2"/>
+          </a:solidFill>
+          <a:ln>
+            <a:noFill/>
+          </a:ln>
+          <a:effectLst/>
+        </p:spPr>
+        <p:style>
+          <a:lnRef idx="1">
+            <a:schemeClr val="accent1"/>
+          </a:lnRef>
+          <a:fillRef idx="3">
+            <a:schemeClr val="accent1"/>
+          </a:fillRef>
+          <a:effectRef idx="2">
+            <a:schemeClr val="accent1"/>
+          </a:effectRef>
+          <a:fontRef idx="minor">
+            <a:schemeClr val="lt1"/>
+          </a:fontRef>
+        </p:style>
+        <p:txBody>
+          <a:bodyPr rtlCol="0" anchor="ctr"/>
+          <a:lstStyle/>
+          <a:p>
+            <a:pPr algn="ctr"/>
+          </a:p>
+        </p:txBody>
+      </p:sp>
+      <p:sp>
+        <p:nvSpPr>
+          <p:cNvPr id="7" name="TextBox 6"/>
+          <p:cNvSpPr txBox="1"/>
+          <p:nvPr/>
+        </p:nvSpPr>
+        <p:spPr>
+          <a:xfrm>
+            <a:off x="365760" y="6583680"/>
+            <a:ext cx="11430000" cy="274320"/>
+          </a:xfrm>
+          <a:prstGeom prst="rect">
+            <a:avLst/>
+          </a:prstGeom>
+          <a:noFill/>
+          <a:ln>
+            <a:noFill/>
+          </a:ln>
+        </p:spPr>
+        <p:txBody>
+          <a:bodyPr wrap="square" lIns="73152" rIns="73152" tIns="36576" bIns="36576" anchor="ctr">
+            <a:spAutoFit/>
+          </a:bodyPr>
+          <a:lstStyle/>
+          <a:p>
+            <a:pPr algn="l">
+              <a:spcAft>
+                <a:spcPts val="200"/>
+              </a:spcAft>
+            </a:pPr>
+            <a:r>
+              <a:rPr sz="1000" b="0">
+                <a:solidFill>
+                  <a:srgbClr val="595959"/>
+                </a:solidFill>
+                <a:latin typeface="IPAGothic"/>
+                <a:eastAsia typeface="IPAGothic"/>
+              </a:rPr>
+              <a:t>補論 ― 「AAC」「CCA」評価をどう考えるか</a:t>
+            </a:r>
+          </a:p>
+        </p:txBody>
+      </p:sp>
+      <p:sp>
+        <p:nvSpPr>
+          <p:cNvPr id="8" name="Rectangle 7"/>
+          <p:cNvSpPr/>
+          <p:nvPr/>
+        </p:nvSpPr>
+        <p:spPr>
+          <a:xfrm>
+            <a:off x="457200" y="960120"/>
+            <a:ext cx="11274552" cy="566928"/>
+          </a:xfrm>
+          <a:prstGeom prst="rect">
+            <a:avLst/>
+          </a:prstGeom>
+          <a:solidFill>
+            <a:srgbClr val="2E5C8A"/>
+          </a:solidFill>
+          <a:ln>
+            <a:noFill/>
+          </a:ln>
+          <a:effectLst/>
+        </p:spPr>
+        <p:style>
+          <a:lnRef idx="1">
+            <a:schemeClr val="accent1"/>
+          </a:lnRef>
+          <a:fillRef idx="3">
+            <a:schemeClr val="accent1"/>
+          </a:fillRef>
+          <a:effectRef idx="2">
+            <a:schemeClr val="accent1"/>
+          </a:effectRef>
+          <a:fontRef idx="minor">
+            <a:schemeClr val="lt1"/>
+          </a:fontRef>
+        </p:style>
+        <p:txBody>
+          <a:bodyPr rtlCol="0" anchor="ctr" wrap="square" tIns="36576" bIns="36576"/>
+          <a:lstStyle/>
+          <a:p>
+            <a:pPr algn="ctr">
+              <a:spcAft>
+                <a:spcPts val="200"/>
+              </a:spcAft>
+            </a:pPr>
+            <a:r>
+              <a:rPr sz="1500" b="1">
+                <a:solidFill>
+                  <a:srgbClr val="FFFFFF"/>
+                </a:solidFill>
+                <a:latin typeface="IPAGothic"/>
+                <a:eastAsia typeface="IPAGothic"/>
+              </a:rPr>
+              <a:t>否定から入らない。現場の観察を正しく言語化することから始める</a:t>
+            </a:r>
+          </a:p>
+        </p:txBody>
+      </p:sp>
+      <p:sp>
+        <p:nvSpPr>
+          <p:cNvPr id="9" name="Rectangle 8"/>
+          <p:cNvSpPr/>
+          <p:nvPr/>
+        </p:nvSpPr>
+        <p:spPr>
+          <a:xfrm>
+            <a:off x="640080" y="1783080"/>
+            <a:ext cx="10908792" cy="1234440"/>
+          </a:xfrm>
+          <a:prstGeom prst="rect">
+            <a:avLst/>
+          </a:prstGeom>
+          <a:solidFill>
+            <a:srgbClr val="F2F2F2"/>
+          </a:solidFill>
+          <a:ln w="12700">
+            <a:solidFill>
+              <a:srgbClr val="595959"/>
+            </a:solidFill>
+          </a:ln>
+          <a:effectLst/>
+        </p:spPr>
+        <p:style>
+          <a:lnRef idx="1">
+            <a:schemeClr val="accent1"/>
+          </a:lnRef>
+          <a:fillRef idx="3">
+            <a:schemeClr val="accent1"/>
+          </a:fillRef>
+          <a:effectRef idx="2">
+            <a:schemeClr val="accent1"/>
+          </a:effectRef>
+          <a:fontRef idx="minor">
+            <a:schemeClr val="lt1"/>
+          </a:fontRef>
+        </p:style>
+        <p:txBody>
+          <a:bodyPr rtlCol="0" anchor="ctr" wrap="square" tIns="36576" bIns="36576"/>
+          <a:lstStyle/>
+          <a:p>
+            <a:pPr algn="ctr">
+              <a:spcAft>
+                <a:spcPts val="200"/>
+              </a:spcAft>
+            </a:pPr>
+            <a:r>
+              <a:rPr sz="1600" b="0">
+                <a:solidFill>
+                  <a:srgbClr val="222222"/>
+                </a:solidFill>
+                <a:latin typeface="IPAGothic"/>
+                <a:eastAsia typeface="IPAGothic"/>
+              </a:rPr>
+              <a:t>「国・東京都・練馬区は『AAC』『CCA』はありえないと言う。</a:t>
+            </a:r>
+          </a:p>
+          <a:p>
+            <a:pPr algn="ctr">
+              <a:spcAft>
+                <a:spcPts val="200"/>
+              </a:spcAft>
+            </a:pPr>
+            <a:r>
+              <a:rPr sz="1600" b="0">
+                <a:solidFill>
+                  <a:srgbClr val="222222"/>
+                </a:solidFill>
+                <a:latin typeface="IPAGothic"/>
+                <a:eastAsia typeface="IPAGothic"/>
+              </a:rPr>
+              <a:t>  でも実際の現場では、生徒の姿から そういう評価になることがある。」</a:t>
+            </a:r>
+          </a:p>
+        </p:txBody>
+      </p:sp>
+      <p:sp>
+        <p:nvSpPr>
+          <p:cNvPr id="10" name="TextBox 9"/>
+          <p:cNvSpPr txBox="1"/>
+          <p:nvPr/>
+        </p:nvSpPr>
+        <p:spPr>
+          <a:xfrm>
+            <a:off x="640080" y="3035808"/>
+            <a:ext cx="10908792" cy="274320"/>
+          </a:xfrm>
+          <a:prstGeom prst="rect">
+            <a:avLst/>
+          </a:prstGeom>
+          <a:noFill/>
+          <a:ln>
+            <a:noFill/>
+          </a:ln>
+        </p:spPr>
+        <p:txBody>
+          <a:bodyPr wrap="square" lIns="73152" rIns="73152" tIns="36576" bIns="36576" anchor="t">
+            <a:spAutoFit/>
+          </a:bodyPr>
+          <a:lstStyle/>
+          <a:p>
+            <a:pPr algn="r">
+              <a:spcAft>
+                <a:spcPts val="200"/>
+              </a:spcAft>
+            </a:pPr>
+            <a:r>
+              <a:rPr sz="1200" b="0">
+                <a:solidFill>
+                  <a:srgbClr val="595959"/>
+                </a:solidFill>
+                <a:latin typeface="IPAGothic"/>
+                <a:eastAsia typeface="IPAGothic"/>
+              </a:rPr>
+              <a:t>― 講義で先生方から出た疑問</a:t>
+            </a:r>
+          </a:p>
+        </p:txBody>
+      </p:sp>
+      <p:sp>
+        <p:nvSpPr>
+          <p:cNvPr id="11" name="Rectangle 10"/>
+          <p:cNvSpPr/>
+          <p:nvPr/>
+        </p:nvSpPr>
+        <p:spPr>
+          <a:xfrm>
+            <a:off x="1828800" y="3520440"/>
+            <a:ext cx="8531352" cy="777240"/>
+          </a:xfrm>
+          <a:prstGeom prst="rect">
+            <a:avLst/>
+          </a:prstGeom>
+          <a:solidFill>
+            <a:srgbClr val="4E7A36"/>
+          </a:solidFill>
+          <a:ln>
+            <a:noFill/>
+          </a:ln>
+          <a:effectLst/>
+        </p:spPr>
+        <p:style>
+          <a:lnRef idx="1">
+            <a:schemeClr val="accent1"/>
+          </a:lnRef>
+          <a:fillRef idx="3">
+            <a:schemeClr val="accent1"/>
+          </a:fillRef>
+          <a:effectRef idx="2">
+            <a:schemeClr val="accent1"/>
+          </a:effectRef>
+          <a:fontRef idx="minor">
+            <a:schemeClr val="lt1"/>
+          </a:fontRef>
+        </p:style>
+        <p:txBody>
+          <a:bodyPr rtlCol="0" anchor="ctr" wrap="square" tIns="36576" bIns="36576"/>
+          <a:lstStyle/>
+          <a:p>
+            <a:pPr algn="ctr">
+              <a:spcAft>
+                <a:spcPts val="200"/>
+              </a:spcAft>
+            </a:pPr>
+            <a:r>
+              <a:rPr sz="3000" b="1">
+                <a:solidFill>
+                  <a:srgbClr val="FFFFFF"/>
+                </a:solidFill>
+                <a:latin typeface="IPAGothic"/>
+                <a:eastAsia typeface="IPAGothic"/>
+              </a:rPr>
+              <a:t>その観察は、正しい。</a:t>
+            </a:r>
+          </a:p>
+        </p:txBody>
+      </p:sp>
+      <p:sp>
+        <p:nvSpPr>
+          <p:cNvPr id="12" name="TextBox 11"/>
+          <p:cNvSpPr txBox="1"/>
+          <p:nvPr/>
+        </p:nvSpPr>
+        <p:spPr>
+          <a:xfrm>
+            <a:off x="914400" y="4434840"/>
+            <a:ext cx="10360152" cy="685800"/>
+          </a:xfrm>
+          <a:prstGeom prst="rect">
+            <a:avLst/>
+          </a:prstGeom>
+          <a:noFill/>
+          <a:ln>
+            <a:noFill/>
+          </a:ln>
+        </p:spPr>
+        <p:txBody>
+          <a:bodyPr wrap="square" lIns="73152" rIns="73152" tIns="36576" bIns="36576" anchor="ctr">
+            <a:spAutoFit/>
+          </a:bodyPr>
+          <a:lstStyle/>
+          <a:p>
+            <a:pPr algn="ctr">
+              <a:spcAft>
+                <a:spcPts val="200"/>
+              </a:spcAft>
+            </a:pPr>
+            <a:r>
+              <a:rPr sz="1400" b="1">
+                <a:solidFill>
+                  <a:srgbClr val="1F3A5F"/>
+                </a:solidFill>
+                <a:latin typeface="IPAGothic"/>
+                <a:eastAsia typeface="IPAGothic"/>
+              </a:rPr>
+              <a:t>公的資料も「そういう生徒はいない」とは一言も言っていない。</a:t>
+            </a:r>
+          </a:p>
+          <a:p>
+            <a:pPr algn="ctr">
+              <a:spcAft>
+                <a:spcPts val="200"/>
+              </a:spcAft>
+            </a:pPr>
+            <a:r>
+              <a:rPr sz="1400" b="1">
+                <a:solidFill>
+                  <a:srgbClr val="1F3A5F"/>
+                </a:solidFill>
+                <a:latin typeface="IPAGothic"/>
+                <a:eastAsia typeface="IPAGothic"/>
+              </a:rPr>
+              <a:t>問題にされているのは“その瞬間の見え方”ではなく、“単元末の総括としての固定”である。</a:t>
+            </a:r>
+          </a:p>
+        </p:txBody>
+      </p:sp>
+      <p:sp>
+        <p:nvSpPr>
+          <p:cNvPr id="13" name="Rectangle 12"/>
+          <p:cNvSpPr/>
+          <p:nvPr/>
+        </p:nvSpPr>
+        <p:spPr>
+          <a:xfrm>
+            <a:off x="640080" y="5349240"/>
+            <a:ext cx="10908792" cy="960120"/>
+          </a:xfrm>
+          <a:prstGeom prst="rect">
+            <a:avLst/>
+          </a:prstGeom>
+          <a:solidFill>
+            <a:srgbClr val="FFF2CC"/>
+          </a:solidFill>
+          <a:ln w="12700">
+            <a:solidFill>
+              <a:srgbClr val="C45A11"/>
+            </a:solidFill>
+          </a:ln>
+          <a:effectLst/>
+        </p:spPr>
+        <p:style>
+          <a:lnRef idx="1">
+            <a:schemeClr val="accent1"/>
+          </a:lnRef>
+          <a:fillRef idx="3">
+            <a:schemeClr val="accent1"/>
+          </a:fillRef>
+          <a:effectRef idx="2">
+            <a:schemeClr val="accent1"/>
+          </a:effectRef>
+          <a:fontRef idx="minor">
+            <a:schemeClr val="lt1"/>
+          </a:fontRef>
+        </p:style>
+        <p:txBody>
+          <a:bodyPr rtlCol="0" anchor="ctr" wrap="square" tIns="36576" bIns="36576"/>
+          <a:lstStyle/>
+          <a:p>
+            <a:pPr algn="ctr">
+              <a:spcAft>
+                <a:spcPts val="200"/>
+              </a:spcAft>
+            </a:pPr>
+            <a:r>
+              <a:rPr sz="1300" b="1">
+                <a:solidFill>
+                  <a:srgbClr val="222222"/>
+                </a:solidFill>
+                <a:latin typeface="IPAGothic"/>
+                <a:eastAsia typeface="IPAGothic"/>
+              </a:rPr>
+              <a:t>本資料の流れ</a:t>
+            </a:r>
+          </a:p>
+          <a:p>
+            <a:pPr algn="ctr">
+              <a:spcAft>
+                <a:spcPts val="200"/>
+              </a:spcAft>
+            </a:pPr>
+            <a:r>
+              <a:rPr sz="1300" b="1">
+                <a:solidFill>
+                  <a:srgbClr val="222222"/>
+                </a:solidFill>
+                <a:latin typeface="IPAGothic"/>
+                <a:eastAsia typeface="IPAGothic"/>
+              </a:rPr>
+              <a:t>②「ありえない」の本当の意味  →  ③④ なぜ整合しないか  →  ⑤ でも実在する(切り分け)  →  ⑥ どう指導するか  →  ⑦ 国の最新方針</a:t>
+            </a:r>
+          </a:p>
+        </p:txBody>
+      </p:sp>
+    </p:spTree>
+  </p:cSld>
+  <p:clrMapOvr>
+    <a:masterClrMapping/>
+  </p:clrMapOvr>
+</p:sld>
+</file>
+
+<file path=ppt/slides/slide15.xml><?xml version="1.0" encoding="utf-8"?>
+<p:sld xmlns:a="http://schemas.openxmlformats.org/drawingml/2006/main" xmlns:p="http://schemas.openxmlformats.org/presentationml/2006/main" xmlns:r="http://schemas.openxmlformats.org/officeDocument/2006/relationships">
+  <p:cSld>
+    <p:spTree>
+      <p:nvGrpSpPr>
+        <p:cNvPr id="1" name=""/>
+        <p:cNvGrpSpPr/>
+        <p:nvPr/>
+      </p:nvGrpSpPr>
+      <p:grpSpPr/>
+      <p:sp>
+        <p:nvSpPr>
+          <p:cNvPr id="2" name="Rectangle 1"/>
+          <p:cNvSpPr/>
+          <p:nvPr/>
+        </p:nvSpPr>
+        <p:spPr>
+          <a:xfrm>
+            <a:off x="0" y="0"/>
+            <a:ext cx="12191695" cy="777240"/>
+          </a:xfrm>
+          <a:prstGeom prst="rect">
+            <a:avLst/>
+          </a:prstGeom>
+          <a:solidFill>
+            <a:srgbClr val="1F3A5F"/>
+          </a:solidFill>
+          <a:ln>
+            <a:noFill/>
+          </a:ln>
+          <a:effectLst/>
+        </p:spPr>
+        <p:style>
+          <a:lnRef idx="1">
+            <a:schemeClr val="accent1"/>
+          </a:lnRef>
+          <a:fillRef idx="3">
+            <a:schemeClr val="accent1"/>
+          </a:fillRef>
+          <a:effectRef idx="2">
+            <a:schemeClr val="accent1"/>
+          </a:effectRef>
+          <a:fontRef idx="minor">
+            <a:schemeClr val="lt1"/>
+          </a:fontRef>
+        </p:style>
+        <p:txBody>
+          <a:bodyPr rtlCol="0" anchor="ctr"/>
+          <a:lstStyle/>
+          <a:p>
+            <a:pPr algn="ctr"/>
+          </a:p>
+        </p:txBody>
+      </p:sp>
+      <p:sp>
+        <p:nvSpPr>
+          <p:cNvPr id="3" name="Rectangle 2"/>
+          <p:cNvSpPr/>
+          <p:nvPr/>
+        </p:nvSpPr>
+        <p:spPr>
+          <a:xfrm>
+            <a:off x="0" y="777240"/>
+            <a:ext cx="12191695" cy="54864"/>
+          </a:xfrm>
+          <a:prstGeom prst="rect">
+            <a:avLst/>
+          </a:prstGeom>
+          <a:solidFill>
+            <a:srgbClr val="C45A11"/>
+          </a:solidFill>
+          <a:ln>
+            <a:noFill/>
+          </a:ln>
+          <a:effectLst/>
+        </p:spPr>
+        <p:style>
+          <a:lnRef idx="1">
+            <a:schemeClr val="accent1"/>
+          </a:lnRef>
+          <a:fillRef idx="3">
+            <a:schemeClr val="accent1"/>
+          </a:fillRef>
+          <a:effectRef idx="2">
+            <a:schemeClr val="accent1"/>
+          </a:effectRef>
+          <a:fontRef idx="minor">
+            <a:schemeClr val="lt1"/>
+          </a:fontRef>
+        </p:style>
+        <p:txBody>
+          <a:bodyPr rtlCol="0" anchor="ctr"/>
+          <a:lstStyle/>
+          <a:p>
+            <a:pPr algn="ctr"/>
+          </a:p>
+        </p:txBody>
+      </p:sp>
+      <p:sp>
+        <p:nvSpPr>
+          <p:cNvPr id="4" name="TextBox 3"/>
+          <p:cNvSpPr txBox="1"/>
+          <p:nvPr/>
+        </p:nvSpPr>
+        <p:spPr>
+          <a:xfrm>
+            <a:off x="365760" y="73152"/>
+            <a:ext cx="10424160" cy="658368"/>
+          </a:xfrm>
+          <a:prstGeom prst="rect">
+            <a:avLst/>
+          </a:prstGeom>
+          <a:noFill/>
+          <a:ln>
+            <a:noFill/>
+          </a:ln>
+        </p:spPr>
+        <p:txBody>
+          <a:bodyPr wrap="square" lIns="73152" rIns="73152" tIns="36576" bIns="36576" anchor="ctr">
+            <a:spAutoFit/>
+          </a:bodyPr>
+          <a:lstStyle/>
+          <a:p>
+            <a:pPr algn="l">
+              <a:spcAft>
+                <a:spcPts val="200"/>
+              </a:spcAft>
+            </a:pPr>
+            <a:r>
+              <a:rPr sz="2200" b="1">
+                <a:solidFill>
+                  <a:srgbClr val="FFFFFF"/>
+                </a:solidFill>
+                <a:latin typeface="IPAGothic"/>
+                <a:eastAsia typeface="IPAGothic"/>
+              </a:rPr>
+              <a:t>補論② 「ありえない」の本当の意味</a:t>
+            </a:r>
+          </a:p>
+        </p:txBody>
+      </p:sp>
+      <p:sp>
+        <p:nvSpPr>
+          <p:cNvPr id="5" name="TextBox 4"/>
+          <p:cNvSpPr txBox="1"/>
+          <p:nvPr/>
+        </p:nvSpPr>
+        <p:spPr>
+          <a:xfrm>
+            <a:off x="10881360" y="73152"/>
+            <a:ext cx="1188720" cy="658368"/>
+          </a:xfrm>
+          <a:prstGeom prst="rect">
+            <a:avLst/>
+          </a:prstGeom>
+          <a:noFill/>
+          <a:ln>
+            <a:noFill/>
+          </a:ln>
+        </p:spPr>
+        <p:txBody>
+          <a:bodyPr wrap="square" lIns="73152" rIns="73152" tIns="36576" bIns="36576" anchor="ctr">
+            <a:spAutoFit/>
+          </a:bodyPr>
+          <a:lstStyle/>
+          <a:p>
+            <a:pPr algn="r">
+              <a:spcAft>
+                <a:spcPts val="200"/>
+              </a:spcAft>
+            </a:pPr>
+            <a:r>
+              <a:rPr sz="1200" b="0">
+                <a:solidFill>
+                  <a:srgbClr val="FFFFFF"/>
+                </a:solidFill>
+                <a:latin typeface="IPAGothic"/>
+                <a:eastAsia typeface="IPAGothic"/>
+              </a:rPr>
+              <a:t>補論 2 / 8</a:t>
+            </a:r>
+          </a:p>
+        </p:txBody>
+      </p:sp>
+      <p:sp>
+        <p:nvSpPr>
+          <p:cNvPr id="6" name="Rectangle 5"/>
+          <p:cNvSpPr/>
+          <p:nvPr/>
+        </p:nvSpPr>
+        <p:spPr>
+          <a:xfrm>
+            <a:off x="0" y="6583680"/>
+            <a:ext cx="12191695" cy="274320"/>
+          </a:xfrm>
+          <a:prstGeom prst="rect">
+            <a:avLst/>
+          </a:prstGeom>
+          <a:solidFill>
+            <a:srgbClr val="F2F2F2"/>
+          </a:solidFill>
+          <a:ln>
+            <a:noFill/>
+          </a:ln>
+          <a:effectLst/>
+        </p:spPr>
+        <p:style>
+          <a:lnRef idx="1">
+            <a:schemeClr val="accent1"/>
+          </a:lnRef>
+          <a:fillRef idx="3">
+            <a:schemeClr val="accent1"/>
+          </a:fillRef>
+          <a:effectRef idx="2">
+            <a:schemeClr val="accent1"/>
+          </a:effectRef>
+          <a:fontRef idx="minor">
+            <a:schemeClr val="lt1"/>
+          </a:fontRef>
+        </p:style>
+        <p:txBody>
+          <a:bodyPr rtlCol="0" anchor="ctr"/>
+          <a:lstStyle/>
+          <a:p>
+            <a:pPr algn="ctr"/>
+          </a:p>
+        </p:txBody>
+      </p:sp>
+      <p:sp>
+        <p:nvSpPr>
+          <p:cNvPr id="7" name="TextBox 6"/>
+          <p:cNvSpPr txBox="1"/>
+          <p:nvPr/>
+        </p:nvSpPr>
+        <p:spPr>
+          <a:xfrm>
+            <a:off x="365760" y="6583680"/>
+            <a:ext cx="11430000" cy="274320"/>
+          </a:xfrm>
+          <a:prstGeom prst="rect">
+            <a:avLst/>
+          </a:prstGeom>
+          <a:noFill/>
+          <a:ln>
+            <a:noFill/>
+          </a:ln>
+        </p:spPr>
+        <p:txBody>
+          <a:bodyPr wrap="square" lIns="73152" rIns="73152" tIns="36576" bIns="36576" anchor="ctr">
+            <a:spAutoFit/>
+          </a:bodyPr>
+          <a:lstStyle/>
+          <a:p>
+            <a:pPr algn="l">
+              <a:spcAft>
+                <a:spcPts val="200"/>
+              </a:spcAft>
+            </a:pPr>
+            <a:r>
+              <a:rPr sz="1000" b="0">
+                <a:solidFill>
+                  <a:srgbClr val="595959"/>
+                </a:solidFill>
+                <a:latin typeface="IPAGothic"/>
+                <a:eastAsia typeface="IPAGothic"/>
+              </a:rPr>
+              <a:t>補論 ― 「AAC」「CCA」評価をどう考えるか</a:t>
+            </a:r>
+          </a:p>
+        </p:txBody>
+      </p:sp>
+      <p:sp>
+        <p:nvSpPr>
+          <p:cNvPr id="8" name="Rectangle 7"/>
+          <p:cNvSpPr/>
+          <p:nvPr/>
+        </p:nvSpPr>
+        <p:spPr>
+          <a:xfrm>
+            <a:off x="457200" y="960120"/>
+            <a:ext cx="11274552" cy="566928"/>
+          </a:xfrm>
+          <a:prstGeom prst="rect">
+            <a:avLst/>
+          </a:prstGeom>
+          <a:solidFill>
+            <a:srgbClr val="2E5C8A"/>
+          </a:solidFill>
+          <a:ln>
+            <a:noFill/>
+          </a:ln>
+          <a:effectLst/>
+        </p:spPr>
+        <p:style>
+          <a:lnRef idx="1">
+            <a:schemeClr val="accent1"/>
+          </a:lnRef>
+          <a:fillRef idx="3">
+            <a:schemeClr val="accent1"/>
+          </a:fillRef>
+          <a:effectRef idx="2">
+            <a:schemeClr val="accent1"/>
+          </a:effectRef>
+          <a:fontRef idx="minor">
+            <a:schemeClr val="lt1"/>
+          </a:fontRef>
+        </p:style>
+        <p:txBody>
+          <a:bodyPr rtlCol="0" anchor="ctr" wrap="square" tIns="36576" bIns="36576"/>
+          <a:lstStyle/>
+          <a:p>
+            <a:pPr algn="ctr">
+              <a:spcAft>
+                <a:spcPts val="200"/>
+              </a:spcAft>
+            </a:pPr>
+            <a:r>
+              <a:rPr sz="1500" b="1">
+                <a:solidFill>
+                  <a:srgbClr val="FFFFFF"/>
+                </a:solidFill>
+                <a:latin typeface="IPAGothic"/>
+                <a:eastAsia typeface="IPAGothic"/>
+              </a:rPr>
+              <a:t>「ありえない」= 禁止ではなく、点検を促す“診断アラーム”</a:t>
+            </a:r>
+          </a:p>
+        </p:txBody>
+      </p:sp>
+      <p:sp>
+        <p:nvSpPr>
+          <p:cNvPr id="9" name="Rectangle 8"/>
+          <p:cNvSpPr/>
+          <p:nvPr/>
+        </p:nvSpPr>
+        <p:spPr>
+          <a:xfrm>
+            <a:off x="457200" y="1783080"/>
+            <a:ext cx="5486400" cy="457200"/>
+          </a:xfrm>
+          <a:prstGeom prst="rect">
+            <a:avLst/>
+          </a:prstGeom>
+          <a:solidFill>
+            <a:srgbClr val="C45A11"/>
+          </a:solidFill>
+          <a:ln>
+            <a:noFill/>
+          </a:ln>
+          <a:effectLst/>
+        </p:spPr>
+        <p:style>
+          <a:lnRef idx="1">
+            <a:schemeClr val="accent1"/>
+          </a:lnRef>
+          <a:fillRef idx="3">
+            <a:schemeClr val="accent1"/>
+          </a:fillRef>
+          <a:effectRef idx="2">
+            <a:schemeClr val="accent1"/>
+          </a:effectRef>
+          <a:fontRef idx="minor">
+            <a:schemeClr val="lt1"/>
+          </a:fontRef>
+        </p:style>
+        <p:txBody>
+          <a:bodyPr rtlCol="0" anchor="ctr" wrap="square" tIns="36576" bIns="36576"/>
+          <a:lstStyle/>
+          <a:p>
+            <a:pPr algn="ctr">
+              <a:spcAft>
+                <a:spcPts val="200"/>
+              </a:spcAft>
+            </a:pPr>
+            <a:r>
+              <a:rPr sz="1500" b="1">
+                <a:solidFill>
+                  <a:srgbClr val="FFFFFF"/>
+                </a:solidFill>
+                <a:latin typeface="IPAGothic"/>
+                <a:eastAsia typeface="IPAGothic"/>
+              </a:rPr>
+              <a:t>✕ よくある誤解</a:t>
+            </a:r>
+          </a:p>
+        </p:txBody>
+      </p:sp>
+      <p:sp>
+        <p:nvSpPr>
+          <p:cNvPr id="10" name="Rectangle 9"/>
+          <p:cNvSpPr/>
+          <p:nvPr/>
+        </p:nvSpPr>
+        <p:spPr>
+          <a:xfrm>
+            <a:off x="457200" y="2240280"/>
+            <a:ext cx="5486400" cy="1783080"/>
+          </a:xfrm>
+          <a:prstGeom prst="rect">
+            <a:avLst/>
+          </a:prstGeom>
+          <a:solidFill>
+            <a:srgbClr val="FBE5D6"/>
+          </a:solidFill>
+          <a:ln w="12700">
+            <a:solidFill>
+              <a:srgbClr val="C45A11"/>
+            </a:solidFill>
+          </a:ln>
+          <a:effectLst/>
+        </p:spPr>
+        <p:style>
+          <a:lnRef idx="1">
+            <a:schemeClr val="accent1"/>
+          </a:lnRef>
+          <a:fillRef idx="3">
+            <a:schemeClr val="accent1"/>
+          </a:fillRef>
+          <a:effectRef idx="2">
+            <a:schemeClr val="accent1"/>
+          </a:effectRef>
+          <a:fontRef idx="minor">
+            <a:schemeClr val="lt1"/>
+          </a:fontRef>
+        </p:style>
+        <p:txBody>
+          <a:bodyPr rtlCol="0" anchor="ctr" wrap="square" tIns="36576" bIns="36576"/>
+          <a:lstStyle/>
+          <a:p>
+            <a:pPr algn="ctr">
+              <a:spcAft>
+                <a:spcPts val="200"/>
+              </a:spcAft>
+            </a:pPr>
+            <a:r>
+              <a:rPr sz="1500" b="0">
+                <a:solidFill>
+                  <a:srgbClr val="222222"/>
+                </a:solidFill>
+                <a:latin typeface="IPAGothic"/>
+                <a:eastAsia typeface="IPAGothic"/>
+              </a:rPr>
+              <a:t>「AAC・CCAは付けてはいけない」</a:t>
+            </a:r>
+          </a:p>
+          <a:p>
+            <a:pPr algn="ctr">
+              <a:spcAft>
+                <a:spcPts val="200"/>
+              </a:spcAft>
+            </a:pPr>
+            <a:r>
+              <a:rPr sz="1500" b="0">
+                <a:solidFill>
+                  <a:srgbClr val="222222"/>
+                </a:solidFill>
+                <a:latin typeface="IPAGothic"/>
+                <a:eastAsia typeface="IPAGothic"/>
+              </a:rPr>
+              <a:t/>
+            </a:r>
+          </a:p>
+          <a:p>
+            <a:pPr algn="ctr">
+              <a:spcAft>
+                <a:spcPts val="200"/>
+              </a:spcAft>
+            </a:pPr>
+            <a:r>
+              <a:rPr sz="1500" b="0">
+                <a:solidFill>
+                  <a:srgbClr val="222222"/>
+                </a:solidFill>
+                <a:latin typeface="IPAGothic"/>
+                <a:eastAsia typeface="IPAGothic"/>
+              </a:rPr>
+              <a:t>→ だから 帳尻を合わせて</a:t>
+            </a:r>
+          </a:p>
+          <a:p>
+            <a:pPr algn="ctr">
+              <a:spcAft>
+                <a:spcPts val="200"/>
+              </a:spcAft>
+            </a:pPr>
+            <a:r>
+              <a:rPr sz="1500" b="0">
+                <a:solidFill>
+                  <a:srgbClr val="222222"/>
+                </a:solidFill>
+                <a:latin typeface="IPAGothic"/>
+                <a:eastAsia typeface="IPAGothic"/>
+              </a:rPr>
+              <a:t>   評定をいじる…?</a:t>
+            </a:r>
+          </a:p>
+        </p:txBody>
+      </p:sp>
+      <p:sp>
+        <p:nvSpPr>
+          <p:cNvPr id="11" name="Rectangle 10"/>
+          <p:cNvSpPr/>
+          <p:nvPr/>
+        </p:nvSpPr>
+        <p:spPr>
+          <a:xfrm>
+            <a:off x="6245352" y="1783080"/>
+            <a:ext cx="5486400" cy="457200"/>
+          </a:xfrm>
+          <a:prstGeom prst="rect">
+            <a:avLst/>
+          </a:prstGeom>
+          <a:solidFill>
+            <a:srgbClr val="4E7A36"/>
+          </a:solidFill>
+          <a:ln>
+            <a:noFill/>
+          </a:ln>
+          <a:effectLst/>
+        </p:spPr>
+        <p:style>
+          <a:lnRef idx="1">
+            <a:schemeClr val="accent1"/>
+          </a:lnRef>
+          <a:fillRef idx="3">
+            <a:schemeClr val="accent1"/>
+          </a:fillRef>
+          <a:effectRef idx="2">
+            <a:schemeClr val="accent1"/>
+          </a:effectRef>
+          <a:fontRef idx="minor">
+            <a:schemeClr val="lt1"/>
+          </a:fontRef>
+        </p:style>
+        <p:txBody>
+          <a:bodyPr rtlCol="0" anchor="ctr" wrap="square" tIns="36576" bIns="36576"/>
+          <a:lstStyle/>
+          <a:p>
+            <a:pPr algn="ctr">
+              <a:spcAft>
+                <a:spcPts val="200"/>
+              </a:spcAft>
+            </a:pPr>
+            <a:r>
+              <a:rPr sz="1500" b="1">
+                <a:solidFill>
+                  <a:srgbClr val="FFFFFF"/>
+                </a:solidFill>
+                <a:latin typeface="IPAGothic"/>
+                <a:eastAsia typeface="IPAGothic"/>
+              </a:rPr>
+              <a:t>○ 公的資料の本意</a:t>
+            </a:r>
+          </a:p>
+        </p:txBody>
+      </p:sp>
+      <p:sp>
+        <p:nvSpPr>
+          <p:cNvPr id="12" name="Rectangle 11"/>
+          <p:cNvSpPr/>
+          <p:nvPr/>
+        </p:nvSpPr>
+        <p:spPr>
+          <a:xfrm>
+            <a:off x="6245352" y="2240280"/>
+            <a:ext cx="5486400" cy="1783080"/>
+          </a:xfrm>
+          <a:prstGeom prst="rect">
+            <a:avLst/>
+          </a:prstGeom>
+          <a:solidFill>
+            <a:srgbClr val="E2EFDA"/>
+          </a:solidFill>
+          <a:ln w="12700">
+            <a:solidFill>
+              <a:srgbClr val="4E7A36"/>
+            </a:solidFill>
+          </a:ln>
+          <a:effectLst/>
+        </p:spPr>
+        <p:style>
+          <a:lnRef idx="1">
+            <a:schemeClr val="accent1"/>
+          </a:lnRef>
+          <a:fillRef idx="3">
+            <a:schemeClr val="accent1"/>
+          </a:fillRef>
+          <a:effectRef idx="2">
+            <a:schemeClr val="accent1"/>
+          </a:effectRef>
+          <a:fontRef idx="minor">
+            <a:schemeClr val="lt1"/>
+          </a:fontRef>
+        </p:style>
+        <p:txBody>
+          <a:bodyPr rtlCol="0" anchor="ctr" wrap="square" tIns="36576" bIns="36576"/>
+          <a:lstStyle/>
+          <a:p>
+            <a:pPr algn="ctr">
+              <a:spcAft>
+                <a:spcPts val="200"/>
+              </a:spcAft>
+            </a:pPr>
+            <a:r>
+              <a:rPr sz="1500" b="0">
+                <a:solidFill>
+                  <a:srgbClr val="222222"/>
+                </a:solidFill>
+                <a:latin typeface="IPAGothic"/>
+                <a:eastAsia typeface="IPAGothic"/>
+              </a:rPr>
+              <a:t>総括で出たら、評価方法か指導が</a:t>
+            </a:r>
+          </a:p>
+          <a:p>
+            <a:pPr algn="ctr">
+              <a:spcAft>
+                <a:spcPts val="200"/>
+              </a:spcAft>
+            </a:pPr>
+            <a:r>
+              <a:rPr sz="1500" b="0">
+                <a:solidFill>
+                  <a:srgbClr val="222222"/>
+                </a:solidFill>
+                <a:latin typeface="IPAGothic"/>
+                <a:eastAsia typeface="IPAGothic"/>
+              </a:rPr>
+              <a:t>機能していない “赤信号”。</a:t>
+            </a:r>
+          </a:p>
+          <a:p>
+            <a:pPr algn="ctr">
+              <a:spcAft>
+                <a:spcPts val="200"/>
+              </a:spcAft>
+            </a:pPr>
+            <a:r>
+              <a:rPr sz="1500" b="0">
+                <a:solidFill>
+                  <a:srgbClr val="222222"/>
+                </a:solidFill>
+                <a:latin typeface="IPAGothic"/>
+                <a:eastAsia typeface="IPAGothic"/>
+              </a:rPr>
+              <a:t/>
+            </a:r>
+          </a:p>
+          <a:p>
+            <a:pPr algn="ctr">
+              <a:spcAft>
+                <a:spcPts val="200"/>
+              </a:spcAft>
+            </a:pPr>
+            <a:r>
+              <a:rPr sz="1500" b="0">
+                <a:solidFill>
+                  <a:srgbClr val="222222"/>
+                </a:solidFill>
+                <a:latin typeface="IPAGothic"/>
+                <a:eastAsia typeface="IPAGothic"/>
+              </a:rPr>
+              <a:t>原因を検討し、学習・指導を改善せよ</a:t>
+            </a:r>
+          </a:p>
+        </p:txBody>
+      </p:sp>
+      <p:sp>
+        <p:nvSpPr>
+          <p:cNvPr id="13" name="Rectangle 12"/>
+          <p:cNvSpPr/>
+          <p:nvPr/>
+        </p:nvSpPr>
+        <p:spPr>
+          <a:xfrm>
+            <a:off x="457200" y="4251960"/>
+            <a:ext cx="11274552" cy="1143000"/>
+          </a:xfrm>
+          <a:prstGeom prst="rect">
+            <a:avLst/>
+          </a:prstGeom>
+          <a:solidFill>
+            <a:srgbClr val="D6E4F0"/>
+          </a:solidFill>
+          <a:ln w="12700">
+            <a:solidFill>
+              <a:srgbClr val="1F3A5F"/>
+            </a:solidFill>
+          </a:ln>
+          <a:effectLst/>
+        </p:spPr>
+        <p:style>
+          <a:lnRef idx="1">
+            <a:schemeClr val="accent1"/>
+          </a:lnRef>
+          <a:fillRef idx="3">
+            <a:schemeClr val="accent1"/>
+          </a:fillRef>
+          <a:effectRef idx="2">
+            <a:schemeClr val="accent1"/>
+          </a:effectRef>
+          <a:fontRef idx="minor">
+            <a:schemeClr val="lt1"/>
+          </a:fontRef>
+        </p:style>
+        <p:txBody>
+          <a:bodyPr rtlCol="0" anchor="ctr" wrap="square" tIns="36576" bIns="36576"/>
+          <a:lstStyle/>
+          <a:p>
+            <a:pPr algn="ctr">
+              <a:spcAft>
+                <a:spcPts val="200"/>
+              </a:spcAft>
+            </a:pPr>
+            <a:r>
+              <a:rPr sz="1500" b="1">
+                <a:solidFill>
+                  <a:srgbClr val="1F3A5F"/>
+                </a:solidFill>
+                <a:latin typeface="IPAGothic"/>
+                <a:eastAsia typeface="IPAGothic"/>
+              </a:rPr>
+              <a:t>「3つの観点の評価の結果は、ばらつき(『CCA』や『AAC』、『CAA』や『ACA』等)が</a:t>
+            </a:r>
+          </a:p>
+          <a:p>
+            <a:pPr algn="ctr">
+              <a:spcAft>
+                <a:spcPts val="200"/>
+              </a:spcAft>
+            </a:pPr>
+            <a:r>
+              <a:rPr sz="1500" b="1">
+                <a:solidFill>
+                  <a:srgbClr val="1F3A5F"/>
+                </a:solidFill>
+                <a:latin typeface="IPAGothic"/>
+                <a:eastAsia typeface="IPAGothic"/>
+              </a:rPr>
+              <a:t>  生じなくなるよう 指導や学習改善を図る 必要がある。」</a:t>
+            </a:r>
+          </a:p>
+        </p:txBody>
+      </p:sp>
+      <p:sp>
+        <p:nvSpPr>
+          <p:cNvPr id="14" name="TextBox 13"/>
+          <p:cNvSpPr txBox="1"/>
+          <p:nvPr/>
+        </p:nvSpPr>
+        <p:spPr>
+          <a:xfrm>
+            <a:off x="457200" y="5413248"/>
+            <a:ext cx="11274552" cy="274320"/>
+          </a:xfrm>
+          <a:prstGeom prst="rect">
+            <a:avLst/>
+          </a:prstGeom>
+          <a:noFill/>
+          <a:ln>
+            <a:noFill/>
+          </a:ln>
+        </p:spPr>
+        <p:txBody>
+          <a:bodyPr wrap="square" lIns="73152" rIns="73152" tIns="36576" bIns="36576" anchor="t">
+            <a:spAutoFit/>
+          </a:bodyPr>
+          <a:lstStyle/>
+          <a:p>
+            <a:pPr algn="r">
+              <a:spcAft>
+                <a:spcPts val="200"/>
+              </a:spcAft>
+            </a:pPr>
+            <a:r>
+              <a:rPr sz="1100" b="0">
+                <a:solidFill>
+                  <a:srgbClr val="595959"/>
+                </a:solidFill>
+                <a:latin typeface="IPAGothic"/>
+                <a:eastAsia typeface="IPAGothic"/>
+              </a:rPr>
+              <a:t>― 国立教育政策研究所『「指導と評価の一体化」のための学習評価に関する参考資料』第1編 総説</a:t>
+            </a:r>
+          </a:p>
+        </p:txBody>
+      </p:sp>
+      <p:sp>
+        <p:nvSpPr>
+          <p:cNvPr id="15" name="Rectangle 14"/>
+          <p:cNvSpPr/>
+          <p:nvPr/>
+        </p:nvSpPr>
+        <p:spPr>
+          <a:xfrm>
+            <a:off x="457200" y="5806440"/>
+            <a:ext cx="11274552" cy="548640"/>
+          </a:xfrm>
+          <a:prstGeom prst="rect">
+            <a:avLst/>
+          </a:prstGeom>
+          <a:solidFill>
+            <a:srgbClr val="C45A11"/>
+          </a:solidFill>
+          <a:ln>
+            <a:noFill/>
+          </a:ln>
+          <a:effectLst/>
+        </p:spPr>
+        <p:style>
+          <a:lnRef idx="1">
+            <a:schemeClr val="accent1"/>
+          </a:lnRef>
+          <a:fillRef idx="3">
+            <a:schemeClr val="accent1"/>
+          </a:fillRef>
+          <a:effectRef idx="2">
+            <a:schemeClr val="accent1"/>
+          </a:effectRef>
+          <a:fontRef idx="minor">
+            <a:schemeClr val="lt1"/>
+          </a:fontRef>
+        </p:style>
+        <p:txBody>
+          <a:bodyPr rtlCol="0" anchor="ctr" wrap="square" tIns="36576" bIns="36576"/>
+          <a:lstStyle/>
+          <a:p>
+            <a:pPr algn="ctr">
+              <a:spcAft>
+                <a:spcPts val="200"/>
+              </a:spcAft>
+            </a:pPr>
+            <a:r>
+              <a:rPr sz="1500" b="1">
+                <a:solidFill>
+                  <a:srgbClr val="FFFFFF"/>
+                </a:solidFill>
+                <a:latin typeface="IPAGothic"/>
+                <a:eastAsia typeface="IPAGothic"/>
+              </a:rPr>
+              <a:t>★ 求められているのは “帳尻合わせ” ではなく “立ち止まっての点検”</a:t>
+            </a:r>
+          </a:p>
+        </p:txBody>
+      </p:sp>
+    </p:spTree>
+  </p:cSld>
+  <p:clrMapOvr>
+    <a:masterClrMapping/>
+  </p:clrMapOvr>
+</p:sld>
+</file>
+
+<file path=ppt/slides/slide16.xml><?xml version="1.0" encoding="utf-8"?>
+<p:sld xmlns:a="http://schemas.openxmlformats.org/drawingml/2006/main" xmlns:p="http://schemas.openxmlformats.org/presentationml/2006/main" xmlns:r="http://schemas.openxmlformats.org/officeDocument/2006/relationships">
+  <p:cSld>
+    <p:spTree>
+      <p:nvGrpSpPr>
+        <p:cNvPr id="1" name=""/>
+        <p:cNvGrpSpPr/>
+        <p:nvPr/>
+      </p:nvGrpSpPr>
+      <p:grpSpPr/>
+      <p:sp>
+        <p:nvSpPr>
+          <p:cNvPr id="2" name="Rectangle 1"/>
+          <p:cNvSpPr/>
+          <p:nvPr/>
+        </p:nvSpPr>
+        <p:spPr>
+          <a:xfrm>
+            <a:off x="0" y="0"/>
+            <a:ext cx="12191695" cy="777240"/>
+          </a:xfrm>
+          <a:prstGeom prst="rect">
+            <a:avLst/>
+          </a:prstGeom>
+          <a:solidFill>
+            <a:srgbClr val="1F3A5F"/>
+          </a:solidFill>
+          <a:ln>
+            <a:noFill/>
+          </a:ln>
+          <a:effectLst/>
+        </p:spPr>
+        <p:style>
+          <a:lnRef idx="1">
+            <a:schemeClr val="accent1"/>
+          </a:lnRef>
+          <a:fillRef idx="3">
+            <a:schemeClr val="accent1"/>
+          </a:fillRef>
+          <a:effectRef idx="2">
+            <a:schemeClr val="accent1"/>
+          </a:effectRef>
+          <a:fontRef idx="minor">
+            <a:schemeClr val="lt1"/>
+          </a:fontRef>
+        </p:style>
+        <p:txBody>
+          <a:bodyPr rtlCol="0" anchor="ctr"/>
+          <a:lstStyle/>
+          <a:p>
+            <a:pPr algn="ctr"/>
+          </a:p>
+        </p:txBody>
+      </p:sp>
+      <p:sp>
+        <p:nvSpPr>
+          <p:cNvPr id="3" name="Rectangle 2"/>
+          <p:cNvSpPr/>
+          <p:nvPr/>
+        </p:nvSpPr>
+        <p:spPr>
+          <a:xfrm>
+            <a:off x="0" y="777240"/>
+            <a:ext cx="12191695" cy="54864"/>
+          </a:xfrm>
+          <a:prstGeom prst="rect">
+            <a:avLst/>
+          </a:prstGeom>
+          <a:solidFill>
+            <a:srgbClr val="C45A11"/>
+          </a:solidFill>
+          <a:ln>
+            <a:noFill/>
+          </a:ln>
+          <a:effectLst/>
+        </p:spPr>
+        <p:style>
+          <a:lnRef idx="1">
+            <a:schemeClr val="accent1"/>
+          </a:lnRef>
+          <a:fillRef idx="3">
+            <a:schemeClr val="accent1"/>
+          </a:fillRef>
+          <a:effectRef idx="2">
+            <a:schemeClr val="accent1"/>
+          </a:effectRef>
+          <a:fontRef idx="minor">
+            <a:schemeClr val="lt1"/>
+          </a:fontRef>
+        </p:style>
+        <p:txBody>
+          <a:bodyPr rtlCol="0" anchor="ctr"/>
+          <a:lstStyle/>
+          <a:p>
+            <a:pPr algn="ctr"/>
+          </a:p>
+        </p:txBody>
+      </p:sp>
+      <p:sp>
+        <p:nvSpPr>
+          <p:cNvPr id="4" name="TextBox 3"/>
+          <p:cNvSpPr txBox="1"/>
+          <p:nvPr/>
+        </p:nvSpPr>
+        <p:spPr>
+          <a:xfrm>
+            <a:off x="365760" y="73152"/>
+            <a:ext cx="10424160" cy="658368"/>
+          </a:xfrm>
+          <a:prstGeom prst="rect">
+            <a:avLst/>
+          </a:prstGeom>
+          <a:noFill/>
+          <a:ln>
+            <a:noFill/>
+          </a:ln>
+        </p:spPr>
+        <p:txBody>
+          <a:bodyPr wrap="square" lIns="73152" rIns="73152" tIns="36576" bIns="36576" anchor="ctr">
+            <a:spAutoFit/>
+          </a:bodyPr>
+          <a:lstStyle/>
+          <a:p>
+            <a:pPr algn="l">
+              <a:spcAft>
+                <a:spcPts val="200"/>
+              </a:spcAft>
+            </a:pPr>
+            <a:r>
+              <a:rPr sz="2200" b="1">
+                <a:solidFill>
+                  <a:srgbClr val="FFFFFF"/>
+                </a:solidFill>
+                <a:latin typeface="IPAGothic"/>
+                <a:eastAsia typeface="IPAGothic"/>
+              </a:rPr>
+              <a:t>補論③ なぜ整合しないのか</a:t>
+            </a:r>
+          </a:p>
+        </p:txBody>
+      </p:sp>
+      <p:sp>
+        <p:nvSpPr>
+          <p:cNvPr id="5" name="TextBox 4"/>
+          <p:cNvSpPr txBox="1"/>
+          <p:nvPr/>
+        </p:nvSpPr>
+        <p:spPr>
+          <a:xfrm>
+            <a:off x="10881360" y="73152"/>
+            <a:ext cx="1188720" cy="658368"/>
+          </a:xfrm>
+          <a:prstGeom prst="rect">
+            <a:avLst/>
+          </a:prstGeom>
+          <a:noFill/>
+          <a:ln>
+            <a:noFill/>
+          </a:ln>
+        </p:spPr>
+        <p:txBody>
+          <a:bodyPr wrap="square" lIns="73152" rIns="73152" tIns="36576" bIns="36576" anchor="ctr">
+            <a:spAutoFit/>
+          </a:bodyPr>
+          <a:lstStyle/>
+          <a:p>
+            <a:pPr algn="r">
+              <a:spcAft>
+                <a:spcPts val="200"/>
+              </a:spcAft>
+            </a:pPr>
+            <a:r>
+              <a:rPr sz="1200" b="0">
+                <a:solidFill>
+                  <a:srgbClr val="FFFFFF"/>
+                </a:solidFill>
+                <a:latin typeface="IPAGothic"/>
+                <a:eastAsia typeface="IPAGothic"/>
+              </a:rPr>
+              <a:t>補論 3 / 8</a:t>
+            </a:r>
+          </a:p>
+        </p:txBody>
+      </p:sp>
+      <p:sp>
+        <p:nvSpPr>
+          <p:cNvPr id="6" name="Rectangle 5"/>
+          <p:cNvSpPr/>
+          <p:nvPr/>
+        </p:nvSpPr>
+        <p:spPr>
+          <a:xfrm>
+            <a:off x="0" y="6583680"/>
+            <a:ext cx="12191695" cy="274320"/>
+          </a:xfrm>
+          <a:prstGeom prst="rect">
+            <a:avLst/>
+          </a:prstGeom>
+          <a:solidFill>
+            <a:srgbClr val="F2F2F2"/>
+          </a:solidFill>
+          <a:ln>
+            <a:noFill/>
+          </a:ln>
+          <a:effectLst/>
+        </p:spPr>
+        <p:style>
+          <a:lnRef idx="1">
+            <a:schemeClr val="accent1"/>
+          </a:lnRef>
+          <a:fillRef idx="3">
+            <a:schemeClr val="accent1"/>
+          </a:fillRef>
+          <a:effectRef idx="2">
+            <a:schemeClr val="accent1"/>
+          </a:effectRef>
+          <a:fontRef idx="minor">
+            <a:schemeClr val="lt1"/>
+          </a:fontRef>
+        </p:style>
+        <p:txBody>
+          <a:bodyPr rtlCol="0" anchor="ctr"/>
+          <a:lstStyle/>
+          <a:p>
+            <a:pPr algn="ctr"/>
+          </a:p>
+        </p:txBody>
+      </p:sp>
+      <p:sp>
+        <p:nvSpPr>
+          <p:cNvPr id="7" name="TextBox 6"/>
+          <p:cNvSpPr txBox="1"/>
+          <p:nvPr/>
+        </p:nvSpPr>
+        <p:spPr>
+          <a:xfrm>
+            <a:off x="365760" y="6583680"/>
+            <a:ext cx="11430000" cy="274320"/>
+          </a:xfrm>
+          <a:prstGeom prst="rect">
+            <a:avLst/>
+          </a:prstGeom>
+          <a:noFill/>
+          <a:ln>
+            <a:noFill/>
+          </a:ln>
+        </p:spPr>
+        <p:txBody>
+          <a:bodyPr wrap="square" lIns="73152" rIns="73152" tIns="36576" bIns="36576" anchor="ctr">
+            <a:spAutoFit/>
+          </a:bodyPr>
+          <a:lstStyle/>
+          <a:p>
+            <a:pPr algn="l">
+              <a:spcAft>
+                <a:spcPts val="200"/>
+              </a:spcAft>
+            </a:pPr>
+            <a:r>
+              <a:rPr sz="1000" b="0">
+                <a:solidFill>
+                  <a:srgbClr val="595959"/>
+                </a:solidFill>
+                <a:latin typeface="IPAGothic"/>
+                <a:eastAsia typeface="IPAGothic"/>
+              </a:rPr>
+              <a:t>補論 ― 「AAC」「CCA」評価をどう考えるか</a:t>
+            </a:r>
+          </a:p>
+        </p:txBody>
+      </p:sp>
+      <p:sp>
+        <p:nvSpPr>
+          <p:cNvPr id="8" name="Rectangle 7"/>
+          <p:cNvSpPr/>
+          <p:nvPr/>
+        </p:nvSpPr>
+        <p:spPr>
+          <a:xfrm>
+            <a:off x="457200" y="960120"/>
+            <a:ext cx="11274552" cy="566928"/>
+          </a:xfrm>
+          <a:prstGeom prst="rect">
+            <a:avLst/>
+          </a:prstGeom>
+          <a:solidFill>
+            <a:srgbClr val="2E5C8A"/>
+          </a:solidFill>
+          <a:ln>
+            <a:noFill/>
+          </a:ln>
+          <a:effectLst/>
+        </p:spPr>
+        <p:style>
+          <a:lnRef idx="1">
+            <a:schemeClr val="accent1"/>
+          </a:lnRef>
+          <a:fillRef idx="3">
+            <a:schemeClr val="accent1"/>
+          </a:fillRef>
+          <a:effectRef idx="2">
+            <a:schemeClr val="accent1"/>
+          </a:effectRef>
+          <a:fontRef idx="minor">
+            <a:schemeClr val="lt1"/>
+          </a:fontRef>
+        </p:style>
+        <p:txBody>
+          <a:bodyPr rtlCol="0" anchor="ctr" wrap="square" tIns="36576" bIns="36576"/>
+          <a:lstStyle/>
+          <a:p>
+            <a:pPr algn="ctr">
+              <a:spcAft>
+                <a:spcPts val="200"/>
+              </a:spcAft>
+            </a:pPr>
+            <a:r>
+              <a:rPr sz="1500" b="1">
+                <a:solidFill>
+                  <a:srgbClr val="FFFFFF"/>
+                </a:solidFill>
+                <a:latin typeface="IPAGothic"/>
+                <a:eastAsia typeface="IPAGothic"/>
+              </a:rPr>
+              <a:t>態度は“別の物差し(性格・努力量)”ではない ― 同じ学びの「意思的側面」</a:t>
+            </a:r>
+          </a:p>
+        </p:txBody>
+      </p:sp>
+      <p:sp>
+        <p:nvSpPr>
+          <p:cNvPr id="9" name="Rectangle 8"/>
+          <p:cNvSpPr/>
+          <p:nvPr/>
+        </p:nvSpPr>
+        <p:spPr>
+          <a:xfrm>
+            <a:off x="457200" y="1783080"/>
+            <a:ext cx="11274552" cy="914400"/>
+          </a:xfrm>
+          <a:prstGeom prst="rect">
+            <a:avLst/>
+          </a:prstGeom>
+          <a:solidFill>
+            <a:srgbClr val="FFF2CC"/>
+          </a:solidFill>
+          <a:ln w="12700">
+            <a:solidFill>
+              <a:srgbClr val="1F3A5F"/>
+            </a:solidFill>
+          </a:ln>
+          <a:effectLst/>
+        </p:spPr>
+        <p:style>
+          <a:lnRef idx="1">
+            <a:schemeClr val="accent1"/>
+          </a:lnRef>
+          <a:fillRef idx="3">
+            <a:schemeClr val="accent1"/>
+          </a:fillRef>
+          <a:effectRef idx="2">
+            <a:schemeClr val="accent1"/>
+          </a:effectRef>
+          <a:fontRef idx="minor">
+            <a:schemeClr val="lt1"/>
+          </a:fontRef>
+        </p:style>
+        <p:txBody>
+          <a:bodyPr rtlCol="0" anchor="ctr" wrap="square" tIns="36576" bIns="36576"/>
+          <a:lstStyle/>
+          <a:p>
+            <a:pPr algn="ctr">
+              <a:spcAft>
+                <a:spcPts val="200"/>
+              </a:spcAft>
+            </a:pPr>
+            <a:r>
+              <a:rPr sz="1400" b="1">
+                <a:solidFill>
+                  <a:srgbClr val="1F3A5F"/>
+                </a:solidFill>
+                <a:latin typeface="IPAGothic"/>
+                <a:eastAsia typeface="IPAGothic"/>
+              </a:rPr>
+              <a:t>「主体的に学習に取り組む態度」=  ① 粘り強い取組を行おうとする側面   ×   ② 自らの学習を調整しようとする側面</a:t>
+            </a:r>
+          </a:p>
+          <a:p>
+            <a:pPr algn="ctr">
+              <a:spcAft>
+                <a:spcPts val="200"/>
+              </a:spcAft>
+            </a:pPr>
+            <a:r>
+              <a:rPr sz="1400" b="1">
+                <a:solidFill>
+                  <a:srgbClr val="1F3A5F"/>
+                </a:solidFill>
+                <a:latin typeface="IPAGothic"/>
+                <a:eastAsia typeface="IPAGothic"/>
+              </a:rPr>
+              <a:t>知識・思考を獲得・発揮することに向けた“意思的な側面”を見る(中央教育審議会 H31.1.21 報告)</a:t>
+            </a:r>
+          </a:p>
+        </p:txBody>
+      </p:sp>
+      <p:sp>
+        <p:nvSpPr>
+          <p:cNvPr id="10" name="Rectangle 9"/>
+          <p:cNvSpPr/>
+          <p:nvPr/>
+        </p:nvSpPr>
+        <p:spPr>
+          <a:xfrm>
+            <a:off x="640080" y="3063240"/>
+            <a:ext cx="4206240" cy="1737360"/>
+          </a:xfrm>
+          <a:prstGeom prst="rect">
+            <a:avLst/>
+          </a:prstGeom>
+          <a:solidFill>
+            <a:srgbClr val="4E7A36"/>
+          </a:solidFill>
+          <a:ln>
+            <a:noFill/>
+          </a:ln>
+          <a:effectLst/>
+        </p:spPr>
+        <p:style>
+          <a:lnRef idx="1">
+            <a:schemeClr val="accent1"/>
+          </a:lnRef>
+          <a:fillRef idx="3">
+            <a:schemeClr val="accent1"/>
+          </a:fillRef>
+          <a:effectRef idx="2">
+            <a:schemeClr val="accent1"/>
+          </a:effectRef>
+          <a:fontRef idx="minor">
+            <a:schemeClr val="lt1"/>
+          </a:fontRef>
+        </p:style>
+        <p:txBody>
+          <a:bodyPr rtlCol="0" anchor="ctr" wrap="square" tIns="36576" bIns="36576"/>
+          <a:lstStyle/>
+          <a:p>
+            <a:pPr algn="ctr">
+              <a:spcAft>
+                <a:spcPts val="200"/>
+              </a:spcAft>
+            </a:pPr>
+            <a:r>
+              <a:rPr sz="1500" b="1">
+                <a:solidFill>
+                  <a:srgbClr val="FFFFFF"/>
+                </a:solidFill>
+                <a:latin typeface="IPAGothic"/>
+                <a:eastAsia typeface="IPAGothic"/>
+              </a:rPr>
+              <a:t>【エンジン】</a:t>
+            </a:r>
+          </a:p>
+          <a:p>
+            <a:pPr algn="ctr">
+              <a:spcAft>
+                <a:spcPts val="200"/>
+              </a:spcAft>
+            </a:pPr>
+            <a:r>
+              <a:rPr sz="1500" b="1">
+                <a:solidFill>
+                  <a:srgbClr val="FFFFFF"/>
+                </a:solidFill>
+                <a:latin typeface="IPAGothic"/>
+                <a:eastAsia typeface="IPAGothic"/>
+              </a:rPr>
+              <a:t>主体的に学習に取り組む態度</a:t>
+            </a:r>
+          </a:p>
+          <a:p>
+            <a:pPr algn="ctr">
+              <a:spcAft>
+                <a:spcPts val="200"/>
+              </a:spcAft>
+            </a:pPr>
+            <a:r>
+              <a:rPr sz="1500" b="1">
+                <a:solidFill>
+                  <a:srgbClr val="FFFFFF"/>
+                </a:solidFill>
+                <a:latin typeface="IPAGothic"/>
+                <a:eastAsia typeface="IPAGothic"/>
+              </a:rPr>
+              <a:t/>
+            </a:r>
+          </a:p>
+          <a:p>
+            <a:pPr algn="ctr">
+              <a:spcAft>
+                <a:spcPts val="200"/>
+              </a:spcAft>
+            </a:pPr>
+            <a:r>
+              <a:rPr sz="1500" b="1">
+                <a:solidFill>
+                  <a:srgbClr val="FFFFFF"/>
+                </a:solidFill>
+                <a:latin typeface="IPAGothic"/>
+                <a:eastAsia typeface="IPAGothic"/>
+              </a:rPr>
+              <a:t>粘り強さ・自己調整</a:t>
+            </a:r>
+          </a:p>
+        </p:txBody>
+      </p:sp>
+      <p:sp>
+        <p:nvSpPr>
+          <p:cNvPr id="11" name="Right Arrow 10"/>
+          <p:cNvSpPr/>
+          <p:nvPr/>
+        </p:nvSpPr>
+        <p:spPr>
+          <a:xfrm>
+            <a:off x="4983480" y="3611880"/>
+            <a:ext cx="2194560" cy="640080"/>
+          </a:xfrm>
+          <a:prstGeom prst="rightArrow">
+            <a:avLst/>
+          </a:prstGeom>
+          <a:solidFill>
+            <a:srgbClr val="C45A11"/>
+          </a:solidFill>
+          <a:ln>
+            <a:noFill/>
+          </a:ln>
+          <a:effectLst/>
+        </p:spPr>
+        <p:style>
+          <a:lnRef idx="1">
+            <a:schemeClr val="accent1"/>
+          </a:lnRef>
+          <a:fillRef idx="3">
+            <a:schemeClr val="accent1"/>
+          </a:fillRef>
+          <a:effectRef idx="2">
+            <a:schemeClr val="accent1"/>
+          </a:effectRef>
+          <a:fontRef idx="minor">
+            <a:schemeClr val="lt1"/>
+          </a:fontRef>
+        </p:style>
+        <p:txBody>
+          <a:bodyPr rtlCol="0" anchor="ctr"/>
+          <a:lstStyle/>
+          <a:p>
+            <a:pPr algn="ctr"/>
+          </a:p>
+        </p:txBody>
+      </p:sp>
+      <p:sp>
+        <p:nvSpPr>
+          <p:cNvPr id="12" name="TextBox 11"/>
+          <p:cNvSpPr txBox="1"/>
+          <p:nvPr/>
+        </p:nvSpPr>
+        <p:spPr>
+          <a:xfrm>
+            <a:off x="4983480" y="3154680"/>
+            <a:ext cx="2194560" cy="411480"/>
+          </a:xfrm>
+          <a:prstGeom prst="rect">
+            <a:avLst/>
+          </a:prstGeom>
+          <a:noFill/>
+          <a:ln>
+            <a:noFill/>
+          </a:ln>
+        </p:spPr>
+        <p:txBody>
+          <a:bodyPr wrap="square" lIns="73152" rIns="73152" tIns="36576" bIns="36576" anchor="ctr">
+            <a:spAutoFit/>
+          </a:bodyPr>
+          <a:lstStyle/>
+          <a:p>
+            <a:pPr algn="ctr">
+              <a:spcAft>
+                <a:spcPts val="200"/>
+              </a:spcAft>
+            </a:pPr>
+            <a:r>
+              <a:rPr sz="1300" b="1">
+                <a:solidFill>
+                  <a:srgbClr val="C45A11"/>
+                </a:solidFill>
+                <a:latin typeface="IPAGothic"/>
+                <a:eastAsia typeface="IPAGothic"/>
+              </a:rPr>
+              <a:t>生み出す</a:t>
+            </a:r>
+          </a:p>
+        </p:txBody>
+      </p:sp>
+      <p:sp>
+        <p:nvSpPr>
+          <p:cNvPr id="13" name="Rectangle 12"/>
+          <p:cNvSpPr/>
+          <p:nvPr/>
+        </p:nvSpPr>
+        <p:spPr>
+          <a:xfrm>
+            <a:off x="7342631" y="3063240"/>
+            <a:ext cx="4206240" cy="1737360"/>
+          </a:xfrm>
+          <a:prstGeom prst="rect">
+            <a:avLst/>
+          </a:prstGeom>
+          <a:solidFill>
+            <a:srgbClr val="1F3A5F"/>
+          </a:solidFill>
+          <a:ln>
+            <a:noFill/>
+          </a:ln>
+          <a:effectLst/>
+        </p:spPr>
+        <p:style>
+          <a:lnRef idx="1">
+            <a:schemeClr val="accent1"/>
+          </a:lnRef>
+          <a:fillRef idx="3">
+            <a:schemeClr val="accent1"/>
+          </a:fillRef>
+          <a:effectRef idx="2">
+            <a:schemeClr val="accent1"/>
+          </a:effectRef>
+          <a:fontRef idx="minor">
+            <a:schemeClr val="lt1"/>
+          </a:fontRef>
+        </p:style>
+        <p:txBody>
+          <a:bodyPr rtlCol="0" anchor="ctr" wrap="square" tIns="36576" bIns="36576"/>
+          <a:lstStyle/>
+          <a:p>
+            <a:pPr algn="ctr">
+              <a:spcAft>
+                <a:spcPts val="200"/>
+              </a:spcAft>
+            </a:pPr>
+            <a:r>
+              <a:rPr sz="1500" b="1">
+                <a:solidFill>
+                  <a:srgbClr val="FFFFFF"/>
+                </a:solidFill>
+                <a:latin typeface="IPAGothic"/>
+                <a:eastAsia typeface="IPAGothic"/>
+              </a:rPr>
+              <a:t>【出力】</a:t>
+            </a:r>
+          </a:p>
+          <a:p>
+            <a:pPr algn="ctr">
+              <a:spcAft>
+                <a:spcPts val="200"/>
+              </a:spcAft>
+            </a:pPr>
+            <a:r>
+              <a:rPr sz="1500" b="1">
+                <a:solidFill>
+                  <a:srgbClr val="FFFFFF"/>
+                </a:solidFill>
+                <a:latin typeface="IPAGothic"/>
+                <a:eastAsia typeface="IPAGothic"/>
+              </a:rPr>
+              <a:t>知識・技能</a:t>
+            </a:r>
+          </a:p>
+          <a:p>
+            <a:pPr algn="ctr">
+              <a:spcAft>
+                <a:spcPts val="200"/>
+              </a:spcAft>
+            </a:pPr>
+            <a:r>
+              <a:rPr sz="1500" b="1">
+                <a:solidFill>
+                  <a:srgbClr val="FFFFFF"/>
+                </a:solidFill>
+                <a:latin typeface="IPAGothic"/>
+                <a:eastAsia typeface="IPAGothic"/>
+              </a:rPr>
+              <a:t>思考・判断・表現</a:t>
+            </a:r>
+          </a:p>
+        </p:txBody>
+      </p:sp>
+      <p:sp>
+        <p:nvSpPr>
+          <p:cNvPr id="14" name="Rectangle 13"/>
+          <p:cNvSpPr/>
+          <p:nvPr/>
+        </p:nvSpPr>
+        <p:spPr>
+          <a:xfrm>
+            <a:off x="457200" y="5074920"/>
+            <a:ext cx="11274552" cy="1234440"/>
+          </a:xfrm>
+          <a:prstGeom prst="rect">
+            <a:avLst/>
+          </a:prstGeom>
+          <a:solidFill>
+            <a:srgbClr val="F2F2F2"/>
+          </a:solidFill>
+          <a:ln w="12700">
+            <a:solidFill>
+              <a:srgbClr val="1F3A5F"/>
+            </a:solidFill>
+          </a:ln>
+          <a:effectLst/>
+        </p:spPr>
+        <p:style>
+          <a:lnRef idx="1">
+            <a:schemeClr val="accent1"/>
+          </a:lnRef>
+          <a:fillRef idx="3">
+            <a:schemeClr val="accent1"/>
+          </a:fillRef>
+          <a:effectRef idx="2">
+            <a:schemeClr val="accent1"/>
+          </a:effectRef>
+          <a:fontRef idx="minor">
+            <a:schemeClr val="lt1"/>
+          </a:fontRef>
+        </p:style>
+        <p:txBody>
+          <a:bodyPr rtlCol="0" anchor="ctr" wrap="square" tIns="36576" bIns="36576"/>
+          <a:lstStyle/>
+          <a:p>
+            <a:pPr algn="ctr">
+              <a:spcAft>
+                <a:spcPts val="200"/>
+              </a:spcAft>
+            </a:pPr>
+            <a:r>
+              <a:rPr sz="1500" b="1">
+                <a:solidFill>
+                  <a:srgbClr val="222222"/>
+                </a:solidFill>
+                <a:latin typeface="IPAGothic"/>
+                <a:eastAsia typeface="IPAGothic"/>
+              </a:rPr>
+              <a:t>出力が A・A なのに、エンジンの計器だけ C を指す(=AAC) ―</a:t>
+            </a:r>
+          </a:p>
+          <a:p>
+            <a:pPr algn="ctr">
+              <a:spcAft>
+                <a:spcPts val="200"/>
+              </a:spcAft>
+            </a:pPr>
+            <a:r>
+              <a:rPr sz="1500" b="1">
+                <a:solidFill>
+                  <a:srgbClr val="222222"/>
+                </a:solidFill>
+                <a:latin typeface="IPAGothic"/>
+                <a:eastAsia typeface="IPAGothic"/>
+              </a:rPr>
+              <a:t>それは生徒の問題ではなく、“計器(評価方法)が壊れている”疑いが濃い。</a:t>
+            </a:r>
+          </a:p>
+          <a:p>
+            <a:pPr algn="ctr">
+              <a:spcAft>
+                <a:spcPts val="200"/>
+              </a:spcAft>
+            </a:pPr>
+            <a:r>
+              <a:rPr sz="1500" b="1">
+                <a:solidFill>
+                  <a:srgbClr val="222222"/>
+                </a:solidFill>
+                <a:latin typeface="IPAGothic"/>
+                <a:eastAsia typeface="IPAGothic"/>
+              </a:rPr>
+              <a:t>態度は出力と同じプロセスの一部だから、極端なズレは原理的に起こりにくい。</a:t>
+            </a:r>
+          </a:p>
+        </p:txBody>
+      </p:sp>
+    </p:spTree>
+  </p:cSld>
+  <p:clrMapOvr>
+    <a:masterClrMapping/>
+  </p:clrMapOvr>
+</p:sld>
+</file>
+
+<file path=ppt/slides/slide17.xml><?xml version="1.0" encoding="utf-8"?>
+<p:sld xmlns:a="http://schemas.openxmlformats.org/drawingml/2006/main" xmlns:p="http://schemas.openxmlformats.org/presentationml/2006/main" xmlns:r="http://schemas.openxmlformats.org/officeDocument/2006/relationships">
+  <p:cSld>
+    <p:spTree>
+      <p:nvGrpSpPr>
+        <p:cNvPr id="1" name=""/>
+        <p:cNvGrpSpPr/>
+        <p:nvPr/>
+      </p:nvGrpSpPr>
+      <p:grpSpPr/>
+      <p:sp>
+        <p:nvSpPr>
+          <p:cNvPr id="2" name="Rectangle 1"/>
+          <p:cNvSpPr/>
+          <p:nvPr/>
+        </p:nvSpPr>
+        <p:spPr>
+          <a:xfrm>
+            <a:off x="0" y="0"/>
+            <a:ext cx="12191695" cy="777240"/>
+          </a:xfrm>
+          <a:prstGeom prst="rect">
+            <a:avLst/>
+          </a:prstGeom>
+          <a:solidFill>
+            <a:srgbClr val="1F3A5F"/>
+          </a:solidFill>
+          <a:ln>
+            <a:noFill/>
+          </a:ln>
+          <a:effectLst/>
+        </p:spPr>
+        <p:style>
+          <a:lnRef idx="1">
+            <a:schemeClr val="accent1"/>
+          </a:lnRef>
+          <a:fillRef idx="3">
+            <a:schemeClr val="accent1"/>
+          </a:fillRef>
+          <a:effectRef idx="2">
+            <a:schemeClr val="accent1"/>
+          </a:effectRef>
+          <a:fontRef idx="minor">
+            <a:schemeClr val="lt1"/>
+          </a:fontRef>
+        </p:style>
+        <p:txBody>
+          <a:bodyPr rtlCol="0" anchor="ctr"/>
+          <a:lstStyle/>
+          <a:p>
+            <a:pPr algn="ctr"/>
+          </a:p>
+        </p:txBody>
+      </p:sp>
+      <p:sp>
+        <p:nvSpPr>
+          <p:cNvPr id="3" name="Rectangle 2"/>
+          <p:cNvSpPr/>
+          <p:nvPr/>
+        </p:nvSpPr>
+        <p:spPr>
+          <a:xfrm>
+            <a:off x="0" y="777240"/>
+            <a:ext cx="12191695" cy="54864"/>
+          </a:xfrm>
+          <a:prstGeom prst="rect">
+            <a:avLst/>
+          </a:prstGeom>
+          <a:solidFill>
+            <a:srgbClr val="C45A11"/>
+          </a:solidFill>
+          <a:ln>
+            <a:noFill/>
+          </a:ln>
+          <a:effectLst/>
+        </p:spPr>
+        <p:style>
+          <a:lnRef idx="1">
+            <a:schemeClr val="accent1"/>
+          </a:lnRef>
+          <a:fillRef idx="3">
+            <a:schemeClr val="accent1"/>
+          </a:fillRef>
+          <a:effectRef idx="2">
+            <a:schemeClr val="accent1"/>
+          </a:effectRef>
+          <a:fontRef idx="minor">
+            <a:schemeClr val="lt1"/>
+          </a:fontRef>
+        </p:style>
+        <p:txBody>
+          <a:bodyPr rtlCol="0" anchor="ctr"/>
+          <a:lstStyle/>
+          <a:p>
+            <a:pPr algn="ctr"/>
+          </a:p>
+        </p:txBody>
+      </p:sp>
+      <p:sp>
+        <p:nvSpPr>
+          <p:cNvPr id="4" name="TextBox 3"/>
+          <p:cNvSpPr txBox="1"/>
+          <p:nvPr/>
+        </p:nvSpPr>
+        <p:spPr>
+          <a:xfrm>
+            <a:off x="365760" y="73152"/>
+            <a:ext cx="10424160" cy="658368"/>
+          </a:xfrm>
+          <a:prstGeom prst="rect">
+            <a:avLst/>
+          </a:prstGeom>
+          <a:noFill/>
+          <a:ln>
+            <a:noFill/>
+          </a:ln>
+        </p:spPr>
+        <p:txBody>
+          <a:bodyPr wrap="square" lIns="73152" rIns="73152" tIns="36576" bIns="36576" anchor="ctr">
+            <a:spAutoFit/>
+          </a:bodyPr>
+          <a:lstStyle/>
+          <a:p>
+            <a:pPr algn="l">
+              <a:spcAft>
+                <a:spcPts val="200"/>
+              </a:spcAft>
+            </a:pPr>
+            <a:r>
+              <a:rPr sz="2200" b="1">
+                <a:solidFill>
+                  <a:srgbClr val="FFFFFF"/>
+                </a:solidFill>
+                <a:latin typeface="IPAGothic"/>
+                <a:eastAsia typeface="IPAGothic"/>
+              </a:rPr>
+              <a:t>補論④ 「AAC」「CCA」が示す“最有力の原因”</a:t>
+            </a:r>
+          </a:p>
+        </p:txBody>
+      </p:sp>
+      <p:sp>
+        <p:nvSpPr>
+          <p:cNvPr id="5" name="TextBox 4"/>
+          <p:cNvSpPr txBox="1"/>
+          <p:nvPr/>
+        </p:nvSpPr>
+        <p:spPr>
+          <a:xfrm>
+            <a:off x="10881360" y="73152"/>
+            <a:ext cx="1188720" cy="658368"/>
+          </a:xfrm>
+          <a:prstGeom prst="rect">
+            <a:avLst/>
+          </a:prstGeom>
+          <a:noFill/>
+          <a:ln>
+            <a:noFill/>
+          </a:ln>
+        </p:spPr>
+        <p:txBody>
+          <a:bodyPr wrap="square" lIns="73152" rIns="73152" tIns="36576" bIns="36576" anchor="ctr">
+            <a:spAutoFit/>
+          </a:bodyPr>
+          <a:lstStyle/>
+          <a:p>
+            <a:pPr algn="r">
+              <a:spcAft>
+                <a:spcPts val="200"/>
+              </a:spcAft>
+            </a:pPr>
+            <a:r>
+              <a:rPr sz="1200" b="0">
+                <a:solidFill>
+                  <a:srgbClr val="FFFFFF"/>
+                </a:solidFill>
+                <a:latin typeface="IPAGothic"/>
+                <a:eastAsia typeface="IPAGothic"/>
+              </a:rPr>
+              <a:t>補論 4 / 8</a:t>
+            </a:r>
+          </a:p>
+        </p:txBody>
+      </p:sp>
+      <p:sp>
+        <p:nvSpPr>
+          <p:cNvPr id="6" name="Rectangle 5"/>
+          <p:cNvSpPr/>
+          <p:nvPr/>
+        </p:nvSpPr>
+        <p:spPr>
+          <a:xfrm>
+            <a:off x="0" y="6583680"/>
+            <a:ext cx="12191695" cy="274320"/>
+          </a:xfrm>
+          <a:prstGeom prst="rect">
+            <a:avLst/>
+          </a:prstGeom>
+          <a:solidFill>
+            <a:srgbClr val="F2F2F2"/>
+          </a:solidFill>
+          <a:ln>
+            <a:noFill/>
+          </a:ln>
+          <a:effectLst/>
+        </p:spPr>
+        <p:style>
+          <a:lnRef idx="1">
+            <a:schemeClr val="accent1"/>
+          </a:lnRef>
+          <a:fillRef idx="3">
+            <a:schemeClr val="accent1"/>
+          </a:fillRef>
+          <a:effectRef idx="2">
+            <a:schemeClr val="accent1"/>
+          </a:effectRef>
+          <a:fontRef idx="minor">
+            <a:schemeClr val="lt1"/>
+          </a:fontRef>
+        </p:style>
+        <p:txBody>
+          <a:bodyPr rtlCol="0" anchor="ctr"/>
+          <a:lstStyle/>
+          <a:p>
+            <a:pPr algn="ctr"/>
+          </a:p>
+        </p:txBody>
+      </p:sp>
+      <p:sp>
+        <p:nvSpPr>
+          <p:cNvPr id="7" name="TextBox 6"/>
+          <p:cNvSpPr txBox="1"/>
+          <p:nvPr/>
+        </p:nvSpPr>
+        <p:spPr>
+          <a:xfrm>
+            <a:off x="365760" y="6583680"/>
+            <a:ext cx="11430000" cy="274320"/>
+          </a:xfrm>
+          <a:prstGeom prst="rect">
+            <a:avLst/>
+          </a:prstGeom>
+          <a:noFill/>
+          <a:ln>
+            <a:noFill/>
+          </a:ln>
+        </p:spPr>
+        <p:txBody>
+          <a:bodyPr wrap="square" lIns="73152" rIns="73152" tIns="36576" bIns="36576" anchor="ctr">
+            <a:spAutoFit/>
+          </a:bodyPr>
+          <a:lstStyle/>
+          <a:p>
+            <a:pPr algn="l">
+              <a:spcAft>
+                <a:spcPts val="200"/>
+              </a:spcAft>
+            </a:pPr>
+            <a:r>
+              <a:rPr sz="1000" b="0">
+                <a:solidFill>
+                  <a:srgbClr val="595959"/>
+                </a:solidFill>
+                <a:latin typeface="IPAGothic"/>
+                <a:eastAsia typeface="IPAGothic"/>
+              </a:rPr>
+              <a:t>補論 ― 「AAC」「CCA」評価をどう考えるか</a:t>
+            </a:r>
+          </a:p>
+        </p:txBody>
+      </p:sp>
+      <p:sp>
+        <p:nvSpPr>
+          <p:cNvPr id="8" name="Rectangle 7"/>
+          <p:cNvSpPr/>
+          <p:nvPr/>
+        </p:nvSpPr>
+        <p:spPr>
+          <a:xfrm>
+            <a:off x="457200" y="960120"/>
+            <a:ext cx="11274552" cy="566928"/>
+          </a:xfrm>
+          <a:prstGeom prst="rect">
+            <a:avLst/>
+          </a:prstGeom>
+          <a:solidFill>
+            <a:srgbClr val="2E5C8A"/>
+          </a:solidFill>
+          <a:ln>
+            <a:noFill/>
+          </a:ln>
+          <a:effectLst/>
+        </p:spPr>
+        <p:style>
+          <a:lnRef idx="1">
+            <a:schemeClr val="accent1"/>
+          </a:lnRef>
+          <a:fillRef idx="3">
+            <a:schemeClr val="accent1"/>
+          </a:fillRef>
+          <a:effectRef idx="2">
+            <a:schemeClr val="accent1"/>
+          </a:effectRef>
+          <a:fontRef idx="minor">
+            <a:schemeClr val="lt1"/>
+          </a:fontRef>
+        </p:style>
+        <p:txBody>
+          <a:bodyPr rtlCol="0" anchor="ctr" wrap="square" tIns="36576" bIns="36576"/>
+          <a:lstStyle/>
+          <a:p>
+            <a:pPr algn="ctr">
+              <a:spcAft>
+                <a:spcPts val="200"/>
+              </a:spcAft>
+            </a:pPr>
+            <a:r>
+              <a:rPr sz="1500" b="1">
+                <a:solidFill>
+                  <a:srgbClr val="FFFFFF"/>
+                </a:solidFill>
+                <a:latin typeface="IPAGothic"/>
+                <a:eastAsia typeface="IPAGothic"/>
+              </a:rPr>
+              <a:t>極端なズレは、たいてい“態度を学習と切り離して測っている”サイン</a:t>
+            </a:r>
+          </a:p>
+        </p:txBody>
+      </p:sp>
+      <p:sp>
+        <p:nvSpPr>
+          <p:cNvPr id="9" name="Rectangle 8"/>
+          <p:cNvSpPr/>
+          <p:nvPr/>
+        </p:nvSpPr>
+        <p:spPr>
+          <a:xfrm>
+            <a:off x="457200" y="1783080"/>
+            <a:ext cx="2468880" cy="457200"/>
+          </a:xfrm>
+          <a:prstGeom prst="rect">
+            <a:avLst/>
+          </a:prstGeom>
+          <a:solidFill>
+            <a:srgbClr val="1F3A5F"/>
+          </a:solidFill>
+          <a:ln>
+            <a:noFill/>
+          </a:ln>
+          <a:effectLst/>
+        </p:spPr>
+        <p:style>
+          <a:lnRef idx="1">
+            <a:schemeClr val="accent1"/>
+          </a:lnRef>
+          <a:fillRef idx="3">
+            <a:schemeClr val="accent1"/>
+          </a:fillRef>
+          <a:effectRef idx="2">
+            <a:schemeClr val="accent1"/>
+          </a:effectRef>
+          <a:fontRef idx="minor">
+            <a:schemeClr val="lt1"/>
+          </a:fontRef>
+        </p:style>
+        <p:txBody>
+          <a:bodyPr rtlCol="0" anchor="ctr" wrap="square" tIns="36576" bIns="36576"/>
+          <a:lstStyle/>
+          <a:p>
+            <a:pPr algn="ctr">
+              <a:spcAft>
+                <a:spcPts val="200"/>
+              </a:spcAft>
+            </a:pPr>
+            <a:r>
+              <a:rPr sz="1400" b="1">
+                <a:solidFill>
+                  <a:srgbClr val="FFFFFF"/>
+                </a:solidFill>
+                <a:latin typeface="IPAGothic"/>
+                <a:eastAsia typeface="IPAGothic"/>
+              </a:rPr>
+              <a:t>パターン</a:t>
+            </a:r>
+          </a:p>
+        </p:txBody>
+      </p:sp>
+      <p:sp>
+        <p:nvSpPr>
+          <p:cNvPr id="10" name="Rectangle 9"/>
+          <p:cNvSpPr/>
+          <p:nvPr/>
+        </p:nvSpPr>
+        <p:spPr>
+          <a:xfrm>
+            <a:off x="2926080" y="1783080"/>
+            <a:ext cx="8622792" cy="457200"/>
+          </a:xfrm>
+          <a:prstGeom prst="rect">
+            <a:avLst/>
+          </a:prstGeom>
+          <a:solidFill>
+            <a:srgbClr val="1F3A5F"/>
+          </a:solidFill>
+          <a:ln>
+            <a:noFill/>
+          </a:ln>
+          <a:effectLst/>
+        </p:spPr>
+        <p:style>
+          <a:lnRef idx="1">
+            <a:schemeClr val="accent1"/>
+          </a:lnRef>
+          <a:fillRef idx="3">
+            <a:schemeClr val="accent1"/>
+          </a:fillRef>
+          <a:effectRef idx="2">
+            <a:schemeClr val="accent1"/>
+          </a:effectRef>
+          <a:fontRef idx="minor">
+            <a:schemeClr val="lt1"/>
+          </a:fontRef>
+        </p:style>
+        <p:txBody>
+          <a:bodyPr rtlCol="0" anchor="ctr" wrap="square" tIns="36576" bIns="36576"/>
+          <a:lstStyle/>
+          <a:p>
+            <a:pPr algn="ctr">
+              <a:spcAft>
+                <a:spcPts val="200"/>
+              </a:spcAft>
+            </a:pPr>
+            <a:r>
+              <a:rPr sz="1400" b="1">
+                <a:solidFill>
+                  <a:srgbClr val="FFFFFF"/>
+                </a:solidFill>
+                <a:latin typeface="IPAGothic"/>
+                <a:eastAsia typeface="IPAGothic"/>
+              </a:rPr>
+              <a:t>食い違いが示す“最有力の原因”</a:t>
+            </a:r>
+          </a:p>
+        </p:txBody>
+      </p:sp>
+      <p:sp>
+        <p:nvSpPr>
+          <p:cNvPr id="11" name="Rectangle 10"/>
+          <p:cNvSpPr/>
+          <p:nvPr/>
+        </p:nvSpPr>
+        <p:spPr>
+          <a:xfrm>
+            <a:off x="457200" y="2240280"/>
+            <a:ext cx="2468880" cy="1508760"/>
+          </a:xfrm>
+          <a:prstGeom prst="rect">
+            <a:avLst/>
+          </a:prstGeom>
+          <a:solidFill>
+            <a:srgbClr val="D6E4F0"/>
+          </a:solidFill>
+          <a:ln w="6350">
+            <a:solidFill>
+              <a:srgbClr val="595959"/>
+            </a:solidFill>
+          </a:ln>
+          <a:effectLst/>
+        </p:spPr>
+        <p:style>
+          <a:lnRef idx="1">
+            <a:schemeClr val="accent1"/>
+          </a:lnRef>
+          <a:fillRef idx="3">
+            <a:schemeClr val="accent1"/>
+          </a:fillRef>
+          <a:effectRef idx="2">
+            <a:schemeClr val="accent1"/>
+          </a:effectRef>
+          <a:fontRef idx="minor">
+            <a:schemeClr val="lt1"/>
+          </a:fontRef>
+        </p:style>
+        <p:txBody>
+          <a:bodyPr rtlCol="0" anchor="ctr" wrap="square" tIns="36576" bIns="36576"/>
+          <a:lstStyle/>
+          <a:p>
+            <a:pPr algn="ctr">
+              <a:spcAft>
+                <a:spcPts val="200"/>
+              </a:spcAft>
+            </a:pPr>
+            <a:r>
+              <a:rPr sz="1500" b="1">
+                <a:solidFill>
+                  <a:srgbClr val="1F3A5F"/>
+                </a:solidFill>
+                <a:latin typeface="IPAGothic"/>
+                <a:eastAsia typeface="IPAGothic"/>
+              </a:rPr>
+              <a:t>AAC</a:t>
+            </a:r>
+          </a:p>
+          <a:p>
+            <a:pPr algn="ctr">
+              <a:spcAft>
+                <a:spcPts val="200"/>
+              </a:spcAft>
+            </a:pPr>
+            <a:r>
+              <a:rPr sz="1500" b="1">
+                <a:solidFill>
+                  <a:srgbClr val="1F3A5F"/>
+                </a:solidFill>
+                <a:latin typeface="IPAGothic"/>
+                <a:eastAsia typeface="IPAGothic"/>
+              </a:rPr>
+              <a:t>知A・思A・態C</a:t>
+            </a:r>
+          </a:p>
+        </p:txBody>
+      </p:sp>
+      <p:sp>
+        <p:nvSpPr>
+          <p:cNvPr id="12" name="Rectangle 11"/>
+          <p:cNvSpPr/>
+          <p:nvPr/>
+        </p:nvSpPr>
+        <p:spPr>
+          <a:xfrm>
+            <a:off x="2926080" y="2240280"/>
+            <a:ext cx="8622792" cy="1508760"/>
+          </a:xfrm>
+          <a:prstGeom prst="rect">
+            <a:avLst/>
+          </a:prstGeom>
+          <a:solidFill>
+            <a:srgbClr val="FFFFFF"/>
+          </a:solidFill>
+          <a:ln w="6350">
+            <a:solidFill>
+              <a:srgbClr val="595959"/>
+            </a:solidFill>
+          </a:ln>
+          <a:effectLst/>
+        </p:spPr>
+        <p:style>
+          <a:lnRef idx="1">
+            <a:schemeClr val="accent1"/>
+          </a:lnRef>
+          <a:fillRef idx="3">
+            <a:schemeClr val="accent1"/>
+          </a:fillRef>
+          <a:effectRef idx="2">
+            <a:schemeClr val="accent1"/>
+          </a:effectRef>
+          <a:fontRef idx="minor">
+            <a:schemeClr val="lt1"/>
+          </a:fontRef>
+        </p:style>
+        <p:txBody>
+          <a:bodyPr rtlCol="0" anchor="ctr" wrap="square" tIns="36576" bIns="36576"/>
+          <a:lstStyle/>
+          <a:p>
+            <a:pPr algn="l">
+              <a:spcAft>
+                <a:spcPts val="200"/>
+              </a:spcAft>
+            </a:pPr>
+            <a:r>
+              <a:rPr sz="1300" b="0">
+                <a:solidFill>
+                  <a:srgbClr val="222222"/>
+                </a:solidFill>
+                <a:latin typeface="IPAGothic"/>
+                <a:eastAsia typeface="IPAGothic"/>
+              </a:rPr>
+              <a:t>A・Aに到達した以上、相応の粘り強さ・自己調整はあったはず。</a:t>
+            </a:r>
+          </a:p>
+          <a:p>
+            <a:pPr algn="l">
+              <a:spcAft>
+                <a:spcPts val="200"/>
+              </a:spcAft>
+            </a:pPr>
+            <a:r>
+              <a:rPr sz="1300" b="0">
+                <a:solidFill>
+                  <a:srgbClr val="222222"/>
+                </a:solidFill>
+                <a:latin typeface="IPAGothic"/>
+                <a:eastAsia typeface="IPAGothic"/>
+              </a:rPr>
+              <a:t>態度だけCになるのは ―</a:t>
+            </a:r>
+          </a:p>
+          <a:p>
+            <a:pPr algn="l">
+              <a:spcAft>
+                <a:spcPts val="200"/>
+              </a:spcAft>
+            </a:pPr>
+            <a:r>
+              <a:rPr sz="1300" b="0">
+                <a:solidFill>
+                  <a:srgbClr val="222222"/>
+                </a:solidFill>
+                <a:latin typeface="IPAGothic"/>
+                <a:eastAsia typeface="IPAGothic"/>
+              </a:rPr>
+              <a:t>挙手・発言・提出・忘れ物・私語・“態度の良し悪し”など、学習と切り離した 形式・性格面で測っている サイン。</a:t>
+            </a:r>
+          </a:p>
+        </p:txBody>
+      </p:sp>
+      <p:sp>
+        <p:nvSpPr>
+          <p:cNvPr id="13" name="Rectangle 12"/>
+          <p:cNvSpPr/>
+          <p:nvPr/>
+        </p:nvSpPr>
+        <p:spPr>
+          <a:xfrm>
+            <a:off x="457200" y="3749039"/>
+            <a:ext cx="2468880" cy="1508760"/>
+          </a:xfrm>
+          <a:prstGeom prst="rect">
+            <a:avLst/>
+          </a:prstGeom>
+          <a:solidFill>
+            <a:srgbClr val="E2EFDA"/>
+          </a:solidFill>
+          <a:ln w="6350">
+            <a:solidFill>
+              <a:srgbClr val="595959"/>
+            </a:solidFill>
+          </a:ln>
+          <a:effectLst/>
+        </p:spPr>
+        <p:style>
+          <a:lnRef idx="1">
+            <a:schemeClr val="accent1"/>
+          </a:lnRef>
+          <a:fillRef idx="3">
+            <a:schemeClr val="accent1"/>
+          </a:fillRef>
+          <a:effectRef idx="2">
+            <a:schemeClr val="accent1"/>
+          </a:effectRef>
+          <a:fontRef idx="minor">
+            <a:schemeClr val="lt1"/>
+          </a:fontRef>
+        </p:style>
+        <p:txBody>
+          <a:bodyPr rtlCol="0" anchor="ctr" wrap="square" tIns="36576" bIns="36576"/>
+          <a:lstStyle/>
+          <a:p>
+            <a:pPr algn="ctr">
+              <a:spcAft>
+                <a:spcPts val="200"/>
+              </a:spcAft>
+            </a:pPr>
+            <a:r>
+              <a:rPr sz="1500" b="1">
+                <a:solidFill>
+                  <a:srgbClr val="4E7A36"/>
+                </a:solidFill>
+                <a:latin typeface="IPAGothic"/>
+                <a:eastAsia typeface="IPAGothic"/>
+              </a:rPr>
+              <a:t>CCA</a:t>
+            </a:r>
+          </a:p>
+          <a:p>
+            <a:pPr algn="ctr">
+              <a:spcAft>
+                <a:spcPts val="200"/>
+              </a:spcAft>
+            </a:pPr>
+            <a:r>
+              <a:rPr sz="1500" b="1">
+                <a:solidFill>
+                  <a:srgbClr val="4E7A36"/>
+                </a:solidFill>
+                <a:latin typeface="IPAGothic"/>
+                <a:eastAsia typeface="IPAGothic"/>
+              </a:rPr>
+              <a:t>知C・思C・態A</a:t>
+            </a:r>
+          </a:p>
+        </p:txBody>
+      </p:sp>
+      <p:sp>
+        <p:nvSpPr>
+          <p:cNvPr id="14" name="Rectangle 13"/>
+          <p:cNvSpPr/>
+          <p:nvPr/>
+        </p:nvSpPr>
+        <p:spPr>
+          <a:xfrm>
+            <a:off x="2926080" y="3749039"/>
+            <a:ext cx="8622792" cy="1508760"/>
+          </a:xfrm>
+          <a:prstGeom prst="rect">
+            <a:avLst/>
+          </a:prstGeom>
+          <a:solidFill>
+            <a:srgbClr val="FFFFFF"/>
+          </a:solidFill>
+          <a:ln w="6350">
+            <a:solidFill>
+              <a:srgbClr val="595959"/>
+            </a:solidFill>
+          </a:ln>
+          <a:effectLst/>
+        </p:spPr>
+        <p:style>
+          <a:lnRef idx="1">
+            <a:schemeClr val="accent1"/>
+          </a:lnRef>
+          <a:fillRef idx="3">
+            <a:schemeClr val="accent1"/>
+          </a:fillRef>
+          <a:effectRef idx="2">
+            <a:schemeClr val="accent1"/>
+          </a:effectRef>
+          <a:fontRef idx="minor">
+            <a:schemeClr val="lt1"/>
+          </a:fontRef>
+        </p:style>
+        <p:txBody>
+          <a:bodyPr rtlCol="0" anchor="ctr" wrap="square" tIns="36576" bIns="36576"/>
+          <a:lstStyle/>
+          <a:p>
+            <a:pPr algn="l">
+              <a:spcAft>
+                <a:spcPts val="200"/>
+              </a:spcAft>
+            </a:pPr>
+            <a:r>
+              <a:rPr sz="1300" b="0">
+                <a:solidFill>
+                  <a:srgbClr val="222222"/>
+                </a:solidFill>
+                <a:latin typeface="IPAGothic"/>
+                <a:eastAsia typeface="IPAGothic"/>
+              </a:rPr>
+              <a:t>自己調整(=分からないと気づき方法を変える)が働けば、知識か思考のどちらかは動くはず。</a:t>
+            </a:r>
+          </a:p>
+          <a:p>
+            <a:pPr algn="l">
+              <a:spcAft>
+                <a:spcPts val="200"/>
+              </a:spcAft>
+            </a:pPr>
+            <a:r>
+              <a:rPr sz="1300" b="0">
+                <a:solidFill>
+                  <a:srgbClr val="222222"/>
+                </a:solidFill>
+                <a:latin typeface="IPAGothic"/>
+                <a:eastAsia typeface="IPAGothic"/>
+              </a:rPr>
+              <a:t>両方Cのまま態度Aは ―</a:t>
+            </a:r>
+          </a:p>
+          <a:p>
+            <a:pPr algn="l">
+              <a:spcAft>
+                <a:spcPts val="200"/>
+              </a:spcAft>
+            </a:pPr>
+            <a:r>
+              <a:rPr sz="1300" b="0">
+                <a:solidFill>
+                  <a:srgbClr val="222222"/>
+                </a:solidFill>
+                <a:latin typeface="IPAGothic"/>
+                <a:eastAsia typeface="IPAGothic"/>
+              </a:rPr>
+              <a:t>“がんばっている”“真面目”という 努力・人柄を態度にしている(旧「関心・意欲・態度」の失敗形)。</a:t>
+            </a:r>
+          </a:p>
+        </p:txBody>
+      </p:sp>
+      <p:sp>
+        <p:nvSpPr>
+          <p:cNvPr id="15" name="Rectangle 14"/>
+          <p:cNvSpPr/>
+          <p:nvPr/>
+        </p:nvSpPr>
+        <p:spPr>
+          <a:xfrm>
+            <a:off x="457200" y="5440680"/>
+            <a:ext cx="11274552" cy="868680"/>
+          </a:xfrm>
+          <a:prstGeom prst="rect">
+            <a:avLst/>
+          </a:prstGeom>
+          <a:solidFill>
+            <a:srgbClr val="FFF2CC"/>
+          </a:solidFill>
+          <a:ln w="12700">
+            <a:solidFill>
+              <a:srgbClr val="C45A11"/>
+            </a:solidFill>
+          </a:ln>
+          <a:effectLst/>
+        </p:spPr>
+        <p:style>
+          <a:lnRef idx="1">
+            <a:schemeClr val="accent1"/>
+          </a:lnRef>
+          <a:fillRef idx="3">
+            <a:schemeClr val="accent1"/>
+          </a:fillRef>
+          <a:effectRef idx="2">
+            <a:schemeClr val="accent1"/>
+          </a:effectRef>
+          <a:fontRef idx="minor">
+            <a:schemeClr val="lt1"/>
+          </a:fontRef>
+        </p:style>
+        <p:txBody>
+          <a:bodyPr rtlCol="0" anchor="ctr" wrap="square" tIns="36576" bIns="36576"/>
+          <a:lstStyle/>
+          <a:p>
+            <a:pPr algn="l">
+              <a:spcAft>
+                <a:spcPts val="200"/>
+              </a:spcAft>
+            </a:pPr>
+            <a:r>
+              <a:rPr sz="1200" b="1">
+                <a:solidFill>
+                  <a:srgbClr val="1F3A5F"/>
+                </a:solidFill>
+                <a:latin typeface="IPAGothic"/>
+                <a:eastAsia typeface="IPAGothic"/>
+              </a:rPr>
+              <a:t>【根拠】中教審報告:挙手の回数等の形式的態度の評価は適当でなく、他の観点に関わる学習状況と照らし合わせる/</a:t>
+            </a:r>
+          </a:p>
+          <a:p>
+            <a:pPr algn="l">
+              <a:spcAft>
+                <a:spcPts val="200"/>
+              </a:spcAft>
+            </a:pPr>
+            <a:r>
+              <a:rPr sz="1200" b="1">
+                <a:solidFill>
+                  <a:srgbClr val="1F3A5F"/>
+                </a:solidFill>
+                <a:latin typeface="IPAGothic"/>
+                <a:eastAsia typeface="IPAGothic"/>
+              </a:rPr>
+              <a:t>奈良県教委:ノートの特定記述を 他の観点から切り離して 態度として評価することは適切でない</a:t>
+            </a:r>
+          </a:p>
+        </p:txBody>
+      </p:sp>
+    </p:spTree>
+  </p:cSld>
+  <p:clrMapOvr>
+    <a:masterClrMapping/>
+  </p:clrMapOvr>
+</p:sld>
+</file>
+
+<file path=ppt/slides/slide18.xml><?xml version="1.0" encoding="utf-8"?>
+<p:sld xmlns:a="http://schemas.openxmlformats.org/drawingml/2006/main" xmlns:p="http://schemas.openxmlformats.org/presentationml/2006/main" xmlns:r="http://schemas.openxmlformats.org/officeDocument/2006/relationships">
+  <p:cSld>
+    <p:spTree>
+      <p:nvGrpSpPr>
+        <p:cNvPr id="1" name=""/>
+        <p:cNvGrpSpPr/>
+        <p:nvPr/>
+      </p:nvGrpSpPr>
+      <p:grpSpPr/>
+      <p:sp>
+        <p:nvSpPr>
+          <p:cNvPr id="2" name="Rectangle 1"/>
+          <p:cNvSpPr/>
+          <p:nvPr/>
+        </p:nvSpPr>
+        <p:spPr>
+          <a:xfrm>
+            <a:off x="0" y="0"/>
+            <a:ext cx="12191695" cy="777240"/>
+          </a:xfrm>
+          <a:prstGeom prst="rect">
+            <a:avLst/>
+          </a:prstGeom>
+          <a:solidFill>
+            <a:srgbClr val="1F3A5F"/>
+          </a:solidFill>
+          <a:ln>
+            <a:noFill/>
+          </a:ln>
+          <a:effectLst/>
+        </p:spPr>
+        <p:style>
+          <a:lnRef idx="1">
+            <a:schemeClr val="accent1"/>
+          </a:lnRef>
+          <a:fillRef idx="3">
+            <a:schemeClr val="accent1"/>
+          </a:fillRef>
+          <a:effectRef idx="2">
+            <a:schemeClr val="accent1"/>
+          </a:effectRef>
+          <a:fontRef idx="minor">
+            <a:schemeClr val="lt1"/>
+          </a:fontRef>
+        </p:style>
+        <p:txBody>
+          <a:bodyPr rtlCol="0" anchor="ctr"/>
+          <a:lstStyle/>
+          <a:p>
+            <a:pPr algn="ctr"/>
+          </a:p>
+        </p:txBody>
+      </p:sp>
+      <p:sp>
+        <p:nvSpPr>
+          <p:cNvPr id="3" name="Rectangle 2"/>
+          <p:cNvSpPr/>
+          <p:nvPr/>
+        </p:nvSpPr>
+        <p:spPr>
+          <a:xfrm>
+            <a:off x="0" y="777240"/>
+            <a:ext cx="12191695" cy="54864"/>
+          </a:xfrm>
+          <a:prstGeom prst="rect">
+            <a:avLst/>
+          </a:prstGeom>
+          <a:solidFill>
+            <a:srgbClr val="C45A11"/>
+          </a:solidFill>
+          <a:ln>
+            <a:noFill/>
+          </a:ln>
+          <a:effectLst/>
+        </p:spPr>
+        <p:style>
+          <a:lnRef idx="1">
+            <a:schemeClr val="accent1"/>
+          </a:lnRef>
+          <a:fillRef idx="3">
+            <a:schemeClr val="accent1"/>
+          </a:fillRef>
+          <a:effectRef idx="2">
+            <a:schemeClr val="accent1"/>
+          </a:effectRef>
+          <a:fontRef idx="minor">
+            <a:schemeClr val="lt1"/>
+          </a:fontRef>
+        </p:style>
+        <p:txBody>
+          <a:bodyPr rtlCol="0" anchor="ctr"/>
+          <a:lstStyle/>
+          <a:p>
+            <a:pPr algn="ctr"/>
+          </a:p>
+        </p:txBody>
+      </p:sp>
+      <p:sp>
+        <p:nvSpPr>
+          <p:cNvPr id="4" name="TextBox 3"/>
+          <p:cNvSpPr txBox="1"/>
+          <p:nvPr/>
+        </p:nvSpPr>
+        <p:spPr>
+          <a:xfrm>
+            <a:off x="365760" y="73152"/>
+            <a:ext cx="10424160" cy="658368"/>
+          </a:xfrm>
+          <a:prstGeom prst="rect">
+            <a:avLst/>
+          </a:prstGeom>
+          <a:noFill/>
+          <a:ln>
+            <a:noFill/>
+          </a:ln>
+        </p:spPr>
+        <p:txBody>
+          <a:bodyPr wrap="square" lIns="73152" rIns="73152" tIns="36576" bIns="36576" anchor="ctr">
+            <a:spAutoFit/>
+          </a:bodyPr>
+          <a:lstStyle/>
+          <a:p>
+            <a:pPr algn="l">
+              <a:spcAft>
+                <a:spcPts val="200"/>
+              </a:spcAft>
+            </a:pPr>
+            <a:r>
+              <a:rPr sz="2200" b="1">
+                <a:solidFill>
+                  <a:srgbClr val="FFFFFF"/>
+                </a:solidFill>
+                <a:latin typeface="IPAGothic"/>
+                <a:eastAsia typeface="IPAGothic"/>
+              </a:rPr>
+              <a:t>補論⑤ でも“そういう子”は実在する ― 切り分けが鍵</a:t>
+            </a:r>
+          </a:p>
+        </p:txBody>
+      </p:sp>
+      <p:sp>
+        <p:nvSpPr>
+          <p:cNvPr id="5" name="TextBox 4"/>
+          <p:cNvSpPr txBox="1"/>
+          <p:nvPr/>
+        </p:nvSpPr>
+        <p:spPr>
+          <a:xfrm>
+            <a:off x="10881360" y="73152"/>
+            <a:ext cx="1188720" cy="658368"/>
+          </a:xfrm>
+          <a:prstGeom prst="rect">
+            <a:avLst/>
+          </a:prstGeom>
+          <a:noFill/>
+          <a:ln>
+            <a:noFill/>
+          </a:ln>
+        </p:spPr>
+        <p:txBody>
+          <a:bodyPr wrap="square" lIns="73152" rIns="73152" tIns="36576" bIns="36576" anchor="ctr">
+            <a:spAutoFit/>
+          </a:bodyPr>
+          <a:lstStyle/>
+          <a:p>
+            <a:pPr algn="r">
+              <a:spcAft>
+                <a:spcPts val="200"/>
+              </a:spcAft>
+            </a:pPr>
+            <a:r>
+              <a:rPr sz="1200" b="0">
+                <a:solidFill>
+                  <a:srgbClr val="FFFFFF"/>
+                </a:solidFill>
+                <a:latin typeface="IPAGothic"/>
+                <a:eastAsia typeface="IPAGothic"/>
+              </a:rPr>
+              <a:t>補論 5 / 8</a:t>
+            </a:r>
+          </a:p>
+        </p:txBody>
+      </p:sp>
+      <p:sp>
+        <p:nvSpPr>
+          <p:cNvPr id="6" name="Rectangle 5"/>
+          <p:cNvSpPr/>
+          <p:nvPr/>
+        </p:nvSpPr>
+        <p:spPr>
+          <a:xfrm>
+            <a:off x="0" y="6583680"/>
+            <a:ext cx="12191695" cy="274320"/>
+          </a:xfrm>
+          <a:prstGeom prst="rect">
+            <a:avLst/>
+          </a:prstGeom>
+          <a:solidFill>
+            <a:srgbClr val="F2F2F2"/>
+          </a:solidFill>
+          <a:ln>
+            <a:noFill/>
+          </a:ln>
+          <a:effectLst/>
+        </p:spPr>
+        <p:style>
+          <a:lnRef idx="1">
+            <a:schemeClr val="accent1"/>
+          </a:lnRef>
+          <a:fillRef idx="3">
+            <a:schemeClr val="accent1"/>
+          </a:fillRef>
+          <a:effectRef idx="2">
+            <a:schemeClr val="accent1"/>
+          </a:effectRef>
+          <a:fontRef idx="minor">
+            <a:schemeClr val="lt1"/>
+          </a:fontRef>
+        </p:style>
+        <p:txBody>
+          <a:bodyPr rtlCol="0" anchor="ctr"/>
+          <a:lstStyle/>
+          <a:p>
+            <a:pPr algn="ctr"/>
+          </a:p>
+        </p:txBody>
+      </p:sp>
+      <p:sp>
+        <p:nvSpPr>
+          <p:cNvPr id="7" name="TextBox 6"/>
+          <p:cNvSpPr txBox="1"/>
+          <p:nvPr/>
+        </p:nvSpPr>
+        <p:spPr>
+          <a:xfrm>
+            <a:off x="365760" y="6583680"/>
+            <a:ext cx="11430000" cy="274320"/>
+          </a:xfrm>
+          <a:prstGeom prst="rect">
+            <a:avLst/>
+          </a:prstGeom>
+          <a:noFill/>
+          <a:ln>
+            <a:noFill/>
+          </a:ln>
+        </p:spPr>
+        <p:txBody>
+          <a:bodyPr wrap="square" lIns="73152" rIns="73152" tIns="36576" bIns="36576" anchor="ctr">
+            <a:spAutoFit/>
+          </a:bodyPr>
+          <a:lstStyle/>
+          <a:p>
+            <a:pPr algn="l">
+              <a:spcAft>
+                <a:spcPts val="200"/>
+              </a:spcAft>
+            </a:pPr>
+            <a:r>
+              <a:rPr sz="1000" b="0">
+                <a:solidFill>
+                  <a:srgbClr val="595959"/>
+                </a:solidFill>
+                <a:latin typeface="IPAGothic"/>
+                <a:eastAsia typeface="IPAGothic"/>
+              </a:rPr>
+              <a:t>補論 ― 「AAC」「CCA」評価をどう考えるか</a:t>
+            </a:r>
+          </a:p>
+        </p:txBody>
+      </p:sp>
+      <p:sp>
+        <p:nvSpPr>
+          <p:cNvPr id="8" name="Rectangle 7"/>
+          <p:cNvSpPr/>
+          <p:nvPr/>
+        </p:nvSpPr>
+        <p:spPr>
+          <a:xfrm>
+            <a:off x="457200" y="960120"/>
+            <a:ext cx="11274552" cy="566928"/>
+          </a:xfrm>
+          <a:prstGeom prst="rect">
+            <a:avLst/>
+          </a:prstGeom>
+          <a:solidFill>
+            <a:srgbClr val="2E5C8A"/>
+          </a:solidFill>
+          <a:ln>
+            <a:noFill/>
+          </a:ln>
+          <a:effectLst/>
+        </p:spPr>
+        <p:style>
+          <a:lnRef idx="1">
+            <a:schemeClr val="accent1"/>
+          </a:lnRef>
+          <a:fillRef idx="3">
+            <a:schemeClr val="accent1"/>
+          </a:fillRef>
+          <a:effectRef idx="2">
+            <a:schemeClr val="accent1"/>
+          </a:effectRef>
+          <a:fontRef idx="minor">
+            <a:schemeClr val="lt1"/>
+          </a:fontRef>
+        </p:style>
+        <p:txBody>
+          <a:bodyPr rtlCol="0" anchor="ctr" wrap="square" tIns="36576" bIns="36576"/>
+          <a:lstStyle/>
+          <a:p>
+            <a:pPr algn="ctr">
+              <a:spcAft>
+                <a:spcPts val="200"/>
+              </a:spcAft>
+            </a:pPr>
+            <a:r>
+              <a:rPr sz="1500" b="1">
+                <a:solidFill>
+                  <a:srgbClr val="FFFFFF"/>
+                </a:solidFill>
+                <a:latin typeface="IPAGothic"/>
+                <a:eastAsia typeface="IPAGothic"/>
+              </a:rPr>
+              <a:t>公的資料も“途中のばらつき”は認めている。問題は総括での固定</a:t>
+            </a:r>
+          </a:p>
+        </p:txBody>
+      </p:sp>
+      <p:sp>
+        <p:nvSpPr>
+          <p:cNvPr id="9" name="Rectangle 8"/>
+          <p:cNvSpPr/>
+          <p:nvPr/>
+        </p:nvSpPr>
+        <p:spPr>
+          <a:xfrm>
+            <a:off x="457200" y="1783080"/>
+            <a:ext cx="5486400" cy="457200"/>
+          </a:xfrm>
+          <a:prstGeom prst="rect">
+            <a:avLst/>
+          </a:prstGeom>
+          <a:solidFill>
+            <a:srgbClr val="2E5C8A"/>
+          </a:solidFill>
+          <a:ln>
+            <a:noFill/>
+          </a:ln>
+          <a:effectLst/>
+        </p:spPr>
+        <p:style>
+          <a:lnRef idx="1">
+            <a:schemeClr val="accent1"/>
+          </a:lnRef>
+          <a:fillRef idx="3">
+            <a:schemeClr val="accent1"/>
+          </a:fillRef>
+          <a:effectRef idx="2">
+            <a:schemeClr val="accent1"/>
+          </a:effectRef>
+          <a:fontRef idx="minor">
+            <a:schemeClr val="lt1"/>
+          </a:fontRef>
+        </p:style>
+        <p:txBody>
+          <a:bodyPr rtlCol="0" anchor="ctr" wrap="square" tIns="36576" bIns="36576"/>
+          <a:lstStyle/>
+          <a:p>
+            <a:pPr algn="ctr">
+              <a:spcAft>
+                <a:spcPts val="200"/>
+              </a:spcAft>
+            </a:pPr>
+            <a:r>
+              <a:rPr sz="1400" b="1">
+                <a:solidFill>
+                  <a:srgbClr val="FFFFFF"/>
+                </a:solidFill>
+                <a:latin typeface="IPAGothic"/>
+                <a:eastAsia typeface="IPAGothic"/>
+              </a:rPr>
+              <a:t>まず疑う:4つの切り分け</a:t>
+            </a:r>
+          </a:p>
+        </p:txBody>
+      </p:sp>
+      <p:sp>
+        <p:nvSpPr>
+          <p:cNvPr id="10" name="Rectangle 9"/>
+          <p:cNvSpPr/>
+          <p:nvPr/>
+        </p:nvSpPr>
+        <p:spPr>
+          <a:xfrm>
+            <a:off x="457200" y="2240280"/>
+            <a:ext cx="5486400" cy="2788920"/>
+          </a:xfrm>
+          <a:prstGeom prst="rect">
+            <a:avLst/>
+          </a:prstGeom>
+          <a:solidFill>
+            <a:srgbClr val="D6E4F0"/>
+          </a:solidFill>
+          <a:ln w="12700">
+            <a:solidFill>
+              <a:srgbClr val="2E5C8A"/>
+            </a:solidFill>
+          </a:ln>
+          <a:effectLst/>
+        </p:spPr>
+        <p:style>
+          <a:lnRef idx="1">
+            <a:schemeClr val="accent1"/>
+          </a:lnRef>
+          <a:fillRef idx="3">
+            <a:schemeClr val="accent1"/>
+          </a:fillRef>
+          <a:effectRef idx="2">
+            <a:schemeClr val="accent1"/>
+          </a:effectRef>
+          <a:fontRef idx="minor">
+            <a:schemeClr val="lt1"/>
+          </a:fontRef>
+        </p:style>
+        <p:txBody>
+          <a:bodyPr rtlCol="0" anchor="ctr"/>
+          <a:lstStyle/>
+          <a:p>
+            <a:pPr algn="ctr"/>
+          </a:p>
+        </p:txBody>
+      </p:sp>
+      <p:sp>
+        <p:nvSpPr>
+          <p:cNvPr id="11" name="TextBox 10"/>
+          <p:cNvSpPr txBox="1"/>
+          <p:nvPr/>
+        </p:nvSpPr>
+        <p:spPr>
+          <a:xfrm>
+            <a:off x="640080" y="2377440"/>
+            <a:ext cx="5120640" cy="502920"/>
+          </a:xfrm>
+          <a:prstGeom prst="rect">
+            <a:avLst/>
+          </a:prstGeom>
+          <a:noFill/>
+          <a:ln>
+            <a:noFill/>
+          </a:ln>
+        </p:spPr>
+        <p:txBody>
+          <a:bodyPr wrap="square" lIns="73152" rIns="73152" tIns="36576" bIns="36576" anchor="ctr">
+            <a:spAutoFit/>
+          </a:bodyPr>
+          <a:lstStyle/>
+          <a:p>
+            <a:pPr algn="l">
+              <a:spcAft>
+                <a:spcPts val="200"/>
+              </a:spcAft>
+            </a:pPr>
+            <a:r>
+              <a:rPr sz="1400" b="1">
+                <a:solidFill>
+                  <a:srgbClr val="222222"/>
+                </a:solidFill>
+                <a:latin typeface="IPAGothic"/>
+                <a:eastAsia typeface="IPAGothic"/>
+              </a:rPr>
+              <a:t>① 形式・性格面の“汚染”(最も多い)</a:t>
+            </a:r>
+          </a:p>
+        </p:txBody>
+      </p:sp>
+      <p:sp>
+        <p:nvSpPr>
+          <p:cNvPr id="12" name="TextBox 11"/>
+          <p:cNvSpPr txBox="1"/>
+          <p:nvPr/>
+        </p:nvSpPr>
+        <p:spPr>
+          <a:xfrm>
+            <a:off x="640080" y="2944368"/>
+            <a:ext cx="5120640" cy="502920"/>
+          </a:xfrm>
+          <a:prstGeom prst="rect">
+            <a:avLst/>
+          </a:prstGeom>
+          <a:noFill/>
+          <a:ln>
+            <a:noFill/>
+          </a:ln>
+        </p:spPr>
+        <p:txBody>
+          <a:bodyPr wrap="square" lIns="73152" rIns="73152" tIns="36576" bIns="36576" anchor="ctr">
+            <a:spAutoFit/>
+          </a:bodyPr>
+          <a:lstStyle/>
+          <a:p>
+            <a:pPr algn="l">
+              <a:spcAft>
+                <a:spcPts val="200"/>
+              </a:spcAft>
+            </a:pPr>
+            <a:r>
+              <a:rPr sz="1400" b="1">
+                <a:solidFill>
+                  <a:srgbClr val="222222"/>
+                </a:solidFill>
+                <a:latin typeface="IPAGothic"/>
+                <a:eastAsia typeface="IPAGothic"/>
+              </a:rPr>
+              <a:t>② 1時間・1方法という“点”で見ている</a:t>
+            </a:r>
+          </a:p>
+        </p:txBody>
+      </p:sp>
+      <p:sp>
+        <p:nvSpPr>
+          <p:cNvPr id="13" name="TextBox 12"/>
+          <p:cNvSpPr txBox="1"/>
+          <p:nvPr/>
+        </p:nvSpPr>
+        <p:spPr>
+          <a:xfrm>
+            <a:off x="640080" y="3511296"/>
+            <a:ext cx="5120640" cy="502920"/>
+          </a:xfrm>
+          <a:prstGeom prst="rect">
+            <a:avLst/>
+          </a:prstGeom>
+          <a:noFill/>
+          <a:ln>
+            <a:noFill/>
+          </a:ln>
+        </p:spPr>
+        <p:txBody>
+          <a:bodyPr wrap="square" lIns="73152" rIns="73152" tIns="36576" bIns="36576" anchor="ctr">
+            <a:spAutoFit/>
+          </a:bodyPr>
+          <a:lstStyle/>
+          <a:p>
+            <a:pPr algn="l">
+              <a:spcAft>
+                <a:spcPts val="200"/>
+              </a:spcAft>
+            </a:pPr>
+            <a:r>
+              <a:rPr sz="1400" b="1">
+                <a:solidFill>
+                  <a:srgbClr val="222222"/>
+                </a:solidFill>
+                <a:latin typeface="IPAGothic"/>
+                <a:eastAsia typeface="IPAGothic"/>
+              </a:rPr>
+              <a:t>③ 単元途中の一過性 ＝ 想定内</a:t>
+            </a:r>
+          </a:p>
+        </p:txBody>
+      </p:sp>
+      <p:sp>
+        <p:nvSpPr>
+          <p:cNvPr id="14" name="TextBox 13"/>
+          <p:cNvSpPr txBox="1"/>
+          <p:nvPr/>
+        </p:nvSpPr>
+        <p:spPr>
+          <a:xfrm>
+            <a:off x="640080" y="4078224"/>
+            <a:ext cx="5120640" cy="502920"/>
+          </a:xfrm>
+          <a:prstGeom prst="rect">
+            <a:avLst/>
+          </a:prstGeom>
+          <a:noFill/>
+          <a:ln>
+            <a:noFill/>
+          </a:ln>
+        </p:spPr>
+        <p:txBody>
+          <a:bodyPr wrap="square" lIns="73152" rIns="73152" tIns="36576" bIns="36576" anchor="ctr">
+            <a:spAutoFit/>
+          </a:bodyPr>
+          <a:lstStyle/>
+          <a:p>
+            <a:pPr algn="l">
+              <a:spcAft>
+                <a:spcPts val="200"/>
+              </a:spcAft>
+            </a:pPr>
+            <a:r>
+              <a:rPr sz="1400" b="1">
+                <a:solidFill>
+                  <a:srgbClr val="222222"/>
+                </a:solidFill>
+                <a:latin typeface="IPAGothic"/>
+                <a:eastAsia typeface="IPAGothic"/>
+              </a:rPr>
+              <a:t>④ 評価規準が観点の趣旨とズレている</a:t>
+            </a:r>
+          </a:p>
+        </p:txBody>
+      </p:sp>
+      <p:sp>
+        <p:nvSpPr>
+          <p:cNvPr id="15" name="Rectangle 14"/>
+          <p:cNvSpPr/>
+          <p:nvPr/>
+        </p:nvSpPr>
+        <p:spPr>
+          <a:xfrm>
+            <a:off x="640080" y="4645152"/>
+            <a:ext cx="5120640" cy="292608"/>
+          </a:xfrm>
+          <a:prstGeom prst="rect">
+            <a:avLst/>
+          </a:prstGeom>
+          <a:solidFill>
+            <a:srgbClr val="FFFFFF"/>
+          </a:solidFill>
+          <a:ln>
+            <a:noFill/>
+          </a:ln>
+          <a:effectLst/>
+        </p:spPr>
+        <p:style>
+          <a:lnRef idx="1">
+            <a:schemeClr val="accent1"/>
+          </a:lnRef>
+          <a:fillRef idx="3">
+            <a:schemeClr val="accent1"/>
+          </a:fillRef>
+          <a:effectRef idx="2">
+            <a:schemeClr val="accent1"/>
+          </a:effectRef>
+          <a:fontRef idx="minor">
+            <a:schemeClr val="lt1"/>
+          </a:fontRef>
+        </p:style>
+        <p:txBody>
+          <a:bodyPr rtlCol="0" anchor="ctr" wrap="square" tIns="36576" bIns="36576"/>
+          <a:lstStyle/>
+          <a:p>
+            <a:pPr algn="ctr">
+              <a:spcAft>
+                <a:spcPts val="200"/>
+              </a:spcAft>
+            </a:pPr>
+            <a:r>
+              <a:rPr sz="1000" b="1">
+                <a:solidFill>
+                  <a:srgbClr val="1F3A5F"/>
+                </a:solidFill>
+                <a:latin typeface="IPAGothic"/>
+                <a:eastAsia typeface="IPAGothic"/>
+              </a:rPr>
+              <a:t>NIER:「単元導入段階のばらつきは生じるとしても」</a:t>
+            </a:r>
+          </a:p>
+        </p:txBody>
+      </p:sp>
+      <p:sp>
+        <p:nvSpPr>
+          <p:cNvPr id="16" name="Rectangle 15"/>
+          <p:cNvSpPr/>
+          <p:nvPr/>
+        </p:nvSpPr>
+        <p:spPr>
+          <a:xfrm>
+            <a:off x="6245352" y="1783080"/>
+            <a:ext cx="5486400" cy="457200"/>
+          </a:xfrm>
+          <a:prstGeom prst="rect">
+            <a:avLst/>
+          </a:prstGeom>
+          <a:solidFill>
+            <a:srgbClr val="C45A11"/>
+          </a:solidFill>
+          <a:ln>
+            <a:noFill/>
+          </a:ln>
+          <a:effectLst/>
+        </p:spPr>
+        <p:style>
+          <a:lnRef idx="1">
+            <a:schemeClr val="accent1"/>
+          </a:lnRef>
+          <a:fillRef idx="3">
+            <a:schemeClr val="accent1"/>
+          </a:fillRef>
+          <a:effectRef idx="2">
+            <a:schemeClr val="accent1"/>
+          </a:effectRef>
+          <a:fontRef idx="minor">
+            <a:schemeClr val="lt1"/>
+          </a:fontRef>
+        </p:style>
+        <p:txBody>
+          <a:bodyPr rtlCol="0" anchor="ctr" wrap="square" tIns="36576" bIns="36576"/>
+          <a:lstStyle/>
+          <a:p>
+            <a:pPr algn="ctr">
+              <a:spcAft>
+                <a:spcPts val="200"/>
+              </a:spcAft>
+            </a:pPr>
+            <a:r>
+              <a:rPr sz="1400" b="1">
+                <a:solidFill>
+                  <a:srgbClr val="FFFFFF"/>
+                </a:solidFill>
+                <a:latin typeface="IPAGothic"/>
+                <a:eastAsia typeface="IPAGothic"/>
+              </a:rPr>
+              <a:t>本物の“悩ましい”2ケース</a:t>
+            </a:r>
+          </a:p>
+        </p:txBody>
+      </p:sp>
+      <p:sp>
+        <p:nvSpPr>
+          <p:cNvPr id="17" name="Rectangle 16"/>
+          <p:cNvSpPr/>
+          <p:nvPr/>
+        </p:nvSpPr>
+        <p:spPr>
+          <a:xfrm>
+            <a:off x="6245352" y="2240280"/>
+            <a:ext cx="5486400" cy="2788920"/>
+          </a:xfrm>
+          <a:prstGeom prst="rect">
+            <a:avLst/>
+          </a:prstGeom>
+          <a:solidFill>
+            <a:srgbClr val="FBE5D6"/>
+          </a:solidFill>
+          <a:ln w="12700">
+            <a:solidFill>
+              <a:srgbClr val="C45A11"/>
+            </a:solidFill>
+          </a:ln>
+          <a:effectLst/>
+        </p:spPr>
+        <p:style>
+          <a:lnRef idx="1">
+            <a:schemeClr val="accent1"/>
+          </a:lnRef>
+          <a:fillRef idx="3">
+            <a:schemeClr val="accent1"/>
+          </a:fillRef>
+          <a:effectRef idx="2">
+            <a:schemeClr val="accent1"/>
+          </a:effectRef>
+          <a:fontRef idx="minor">
+            <a:schemeClr val="lt1"/>
+          </a:fontRef>
+        </p:style>
+        <p:txBody>
+          <a:bodyPr rtlCol="0" anchor="ctr"/>
+          <a:lstStyle/>
+          <a:p>
+            <a:pPr algn="ctr"/>
+          </a:p>
+        </p:txBody>
+      </p:sp>
+      <p:sp>
+        <p:nvSpPr>
+          <p:cNvPr id="18" name="TextBox 17"/>
+          <p:cNvSpPr txBox="1"/>
+          <p:nvPr/>
+        </p:nvSpPr>
+        <p:spPr>
+          <a:xfrm>
+            <a:off x="6400800" y="2359152"/>
+            <a:ext cx="5175504" cy="1143000"/>
+          </a:xfrm>
+          <a:prstGeom prst="rect">
+            <a:avLst/>
+          </a:prstGeom>
+          <a:noFill/>
+          <a:ln>
+            <a:noFill/>
+          </a:ln>
+        </p:spPr>
+        <p:txBody>
+          <a:bodyPr wrap="square" lIns="73152" rIns="73152" tIns="36576" bIns="36576" anchor="t">
+            <a:spAutoFit/>
+          </a:bodyPr>
+          <a:lstStyle/>
+          <a:p>
+            <a:pPr algn="l">
+              <a:spcAft>
+                <a:spcPts val="200"/>
+              </a:spcAft>
+            </a:pPr>
+            <a:r>
+              <a:rPr sz="1200" b="0">
+                <a:solidFill>
+                  <a:srgbClr val="222222"/>
+                </a:solidFill>
+                <a:latin typeface="IPAGothic"/>
+                <a:eastAsia typeface="IPAGothic"/>
+              </a:rPr>
+              <a:t>◆ できる子が退屈して態度C(AAC型)</a:t>
+            </a:r>
+          </a:p>
+          <a:p>
+            <a:pPr algn="l">
+              <a:spcAft>
+                <a:spcPts val="200"/>
+              </a:spcAft>
+            </a:pPr>
+            <a:r>
+              <a:rPr sz="1200" b="0">
+                <a:solidFill>
+                  <a:srgbClr val="222222"/>
+                </a:solidFill>
+                <a:latin typeface="IPAGothic"/>
+                <a:eastAsia typeface="IPAGothic"/>
+              </a:rPr>
+              <a:t>  → 態度=努力の“量”ではない。効率よく</a:t>
+            </a:r>
+          </a:p>
+          <a:p>
+            <a:pPr algn="l">
+              <a:spcAft>
+                <a:spcPts val="200"/>
+              </a:spcAft>
+            </a:pPr>
+            <a:r>
+              <a:rPr sz="1200" b="0">
+                <a:solidFill>
+                  <a:srgbClr val="222222"/>
+                </a:solidFill>
+                <a:latin typeface="IPAGothic"/>
+                <a:eastAsia typeface="IPAGothic"/>
+              </a:rPr>
+              <a:t>     調整して達するのも主体的。</a:t>
+            </a:r>
+          </a:p>
+          <a:p>
+            <a:pPr algn="l">
+              <a:spcAft>
+                <a:spcPts val="200"/>
+              </a:spcAft>
+            </a:pPr>
+            <a:r>
+              <a:rPr sz="1200" b="0">
+                <a:solidFill>
+                  <a:srgbClr val="222222"/>
+                </a:solidFill>
+                <a:latin typeface="IPAGothic"/>
+                <a:eastAsia typeface="IPAGothic"/>
+              </a:rPr>
+              <a:t>     課題がその子に易しすぎるサイン。</a:t>
+            </a:r>
+          </a:p>
+        </p:txBody>
+      </p:sp>
+      <p:sp>
+        <p:nvSpPr>
+          <p:cNvPr id="19" name="TextBox 18"/>
+          <p:cNvSpPr txBox="1"/>
+          <p:nvPr/>
+        </p:nvSpPr>
+        <p:spPr>
+          <a:xfrm>
+            <a:off x="6400800" y="3566160"/>
+            <a:ext cx="5175504" cy="1143000"/>
+          </a:xfrm>
+          <a:prstGeom prst="rect">
+            <a:avLst/>
+          </a:prstGeom>
+          <a:noFill/>
+          <a:ln>
+            <a:noFill/>
+          </a:ln>
+        </p:spPr>
+        <p:txBody>
+          <a:bodyPr wrap="square" lIns="73152" rIns="73152" tIns="36576" bIns="36576" anchor="t">
+            <a:spAutoFit/>
+          </a:bodyPr>
+          <a:lstStyle/>
+          <a:p>
+            <a:pPr algn="l">
+              <a:spcAft>
+                <a:spcPts val="200"/>
+              </a:spcAft>
+            </a:pPr>
+            <a:r>
+              <a:rPr sz="1200" b="0">
+                <a:solidFill>
+                  <a:srgbClr val="222222"/>
+                </a:solidFill>
+                <a:latin typeface="IPAGothic"/>
+                <a:eastAsia typeface="IPAGothic"/>
+              </a:rPr>
+              <a:t>◆ 懸命だが伸びず知識・思考C(CCA型)</a:t>
+            </a:r>
+          </a:p>
+          <a:p>
+            <a:pPr algn="l">
+              <a:spcAft>
+                <a:spcPts val="200"/>
+              </a:spcAft>
+            </a:pPr>
+            <a:r>
+              <a:rPr sz="1200" b="0">
+                <a:solidFill>
+                  <a:srgbClr val="222222"/>
+                </a:solidFill>
+                <a:latin typeface="IPAGothic"/>
+                <a:eastAsia typeface="IPAGothic"/>
+              </a:rPr>
+              <a:t>  → 自己調整を支える指導が届いて</a:t>
+            </a:r>
+          </a:p>
+          <a:p>
+            <a:pPr algn="l">
+              <a:spcAft>
+                <a:spcPts val="200"/>
+              </a:spcAft>
+            </a:pPr>
+            <a:r>
+              <a:rPr sz="1200" b="0">
+                <a:solidFill>
+                  <a:srgbClr val="222222"/>
+                </a:solidFill>
+                <a:latin typeface="IPAGothic"/>
+                <a:eastAsia typeface="IPAGothic"/>
+              </a:rPr>
+              <a:t>     いないサイン。指導の方を変える。</a:t>
+            </a:r>
+          </a:p>
+        </p:txBody>
+      </p:sp>
+      <p:sp>
+        <p:nvSpPr>
+          <p:cNvPr id="20" name="Rectangle 19"/>
+          <p:cNvSpPr/>
+          <p:nvPr/>
+        </p:nvSpPr>
+        <p:spPr>
+          <a:xfrm>
+            <a:off x="457200" y="5212080"/>
+            <a:ext cx="11274552" cy="1097280"/>
+          </a:xfrm>
+          <a:prstGeom prst="rect">
+            <a:avLst/>
+          </a:prstGeom>
+          <a:solidFill>
+            <a:srgbClr val="FFF2CC"/>
+          </a:solidFill>
+          <a:ln w="12700">
+            <a:solidFill>
+              <a:srgbClr val="C45A11"/>
+            </a:solidFill>
+          </a:ln>
+          <a:effectLst/>
+        </p:spPr>
+        <p:style>
+          <a:lnRef idx="1">
+            <a:schemeClr val="accent1"/>
+          </a:lnRef>
+          <a:fillRef idx="3">
+            <a:schemeClr val="accent1"/>
+          </a:fillRef>
+          <a:effectRef idx="2">
+            <a:schemeClr val="accent1"/>
+          </a:effectRef>
+          <a:fontRef idx="minor">
+            <a:schemeClr val="lt1"/>
+          </a:fontRef>
+        </p:style>
+        <p:txBody>
+          <a:bodyPr rtlCol="0" anchor="ctr" wrap="square" tIns="36576" bIns="36576"/>
+          <a:lstStyle/>
+          <a:p>
+            <a:pPr algn="ctr">
+              <a:spcAft>
+                <a:spcPts val="200"/>
+              </a:spcAft>
+            </a:pPr>
+            <a:r>
+              <a:rPr sz="1400" b="1">
+                <a:solidFill>
+                  <a:srgbClr val="1F3A5F"/>
+                </a:solidFill>
+                <a:latin typeface="IPAGothic"/>
+                <a:eastAsia typeface="IPAGothic"/>
+              </a:rPr>
+              <a:t>★ どちらも「生徒の人格・努力の評価」ではなく、「こちらの課題設計・指導へのフィードバック」として読む。</a:t>
+            </a:r>
+          </a:p>
+          <a:p>
+            <a:pPr algn="ctr">
+              <a:spcAft>
+                <a:spcPts val="200"/>
+              </a:spcAft>
+            </a:pPr>
+            <a:r>
+              <a:rPr sz="1400" b="1">
+                <a:solidFill>
+                  <a:srgbClr val="1F3A5F"/>
+                </a:solidFill>
+                <a:latin typeface="IPAGothic"/>
+                <a:eastAsia typeface="IPAGothic"/>
+              </a:rPr>
+              <a:t>  生徒の評定をいじる前に、“なぜそう見えるのか”の原因を特定するのが先。</a:t>
+            </a:r>
+          </a:p>
+        </p:txBody>
+      </p:sp>
+    </p:spTree>
+  </p:cSld>
+  <p:clrMapOvr>
+    <a:masterClrMapping/>
+  </p:clrMapOvr>
+</p:sld>
+</file>
+
+<file path=ppt/slides/slide19.xml><?xml version="1.0" encoding="utf-8"?>
+<p:sld xmlns:a="http://schemas.openxmlformats.org/drawingml/2006/main" xmlns:p="http://schemas.openxmlformats.org/presentationml/2006/main" xmlns:r="http://schemas.openxmlformats.org/officeDocument/2006/relationships">
+  <p:cSld>
+    <p:spTree>
+      <p:nvGrpSpPr>
+        <p:cNvPr id="1" name=""/>
+        <p:cNvGrpSpPr/>
+        <p:nvPr/>
+      </p:nvGrpSpPr>
+      <p:grpSpPr/>
+      <p:sp>
+        <p:nvSpPr>
+          <p:cNvPr id="2" name="Rectangle 1"/>
+          <p:cNvSpPr/>
+          <p:nvPr/>
+        </p:nvSpPr>
+        <p:spPr>
+          <a:xfrm>
+            <a:off x="0" y="0"/>
+            <a:ext cx="12191695" cy="777240"/>
+          </a:xfrm>
+          <a:prstGeom prst="rect">
+            <a:avLst/>
+          </a:prstGeom>
+          <a:solidFill>
+            <a:srgbClr val="1F3A5F"/>
+          </a:solidFill>
+          <a:ln>
+            <a:noFill/>
+          </a:ln>
+          <a:effectLst/>
+        </p:spPr>
+        <p:style>
+          <a:lnRef idx="1">
+            <a:schemeClr val="accent1"/>
+          </a:lnRef>
+          <a:fillRef idx="3">
+            <a:schemeClr val="accent1"/>
+          </a:fillRef>
+          <a:effectRef idx="2">
+            <a:schemeClr val="accent1"/>
+          </a:effectRef>
+          <a:fontRef idx="minor">
+            <a:schemeClr val="lt1"/>
+          </a:fontRef>
+        </p:style>
+        <p:txBody>
+          <a:bodyPr rtlCol="0" anchor="ctr"/>
+          <a:lstStyle/>
+          <a:p>
+            <a:pPr algn="ctr"/>
+          </a:p>
+        </p:txBody>
+      </p:sp>
+      <p:sp>
+        <p:nvSpPr>
+          <p:cNvPr id="3" name="Rectangle 2"/>
+          <p:cNvSpPr/>
+          <p:nvPr/>
+        </p:nvSpPr>
+        <p:spPr>
+          <a:xfrm>
+            <a:off x="0" y="777240"/>
+            <a:ext cx="12191695" cy="54864"/>
+          </a:xfrm>
+          <a:prstGeom prst="rect">
+            <a:avLst/>
+          </a:prstGeom>
+          <a:solidFill>
+            <a:srgbClr val="C45A11"/>
+          </a:solidFill>
+          <a:ln>
+            <a:noFill/>
+          </a:ln>
+          <a:effectLst/>
+        </p:spPr>
+        <p:style>
+          <a:lnRef idx="1">
+            <a:schemeClr val="accent1"/>
+          </a:lnRef>
+          <a:fillRef idx="3">
+            <a:schemeClr val="accent1"/>
+          </a:fillRef>
+          <a:effectRef idx="2">
+            <a:schemeClr val="accent1"/>
+          </a:effectRef>
+          <a:fontRef idx="minor">
+            <a:schemeClr val="lt1"/>
+          </a:fontRef>
+        </p:style>
+        <p:txBody>
+          <a:bodyPr rtlCol="0" anchor="ctr"/>
+          <a:lstStyle/>
+          <a:p>
+            <a:pPr algn="ctr"/>
+          </a:p>
+        </p:txBody>
+      </p:sp>
+      <p:sp>
+        <p:nvSpPr>
+          <p:cNvPr id="4" name="TextBox 3"/>
+          <p:cNvSpPr txBox="1"/>
+          <p:nvPr/>
+        </p:nvSpPr>
+        <p:spPr>
+          <a:xfrm>
+            <a:off x="365760" y="73152"/>
+            <a:ext cx="10424160" cy="658368"/>
+          </a:xfrm>
+          <a:prstGeom prst="rect">
+            <a:avLst/>
+          </a:prstGeom>
+          <a:noFill/>
+          <a:ln>
+            <a:noFill/>
+          </a:ln>
+        </p:spPr>
+        <p:txBody>
+          <a:bodyPr wrap="square" lIns="73152" rIns="73152" tIns="36576" bIns="36576" anchor="ctr">
+            <a:spAutoFit/>
+          </a:bodyPr>
+          <a:lstStyle/>
+          <a:p>
+            <a:pPr algn="l">
+              <a:spcAft>
+                <a:spcPts val="200"/>
+              </a:spcAft>
+            </a:pPr>
+            <a:r>
+              <a:rPr sz="2200" b="1">
+                <a:solidFill>
+                  <a:srgbClr val="FFFFFF"/>
+                </a:solidFill>
+                <a:latin typeface="IPAGothic"/>
+                <a:eastAsia typeface="IPAGothic"/>
+              </a:rPr>
+              <a:t>補論⑥ “なりそうなとき”どう回避・指導するか</a:t>
+            </a:r>
+          </a:p>
+        </p:txBody>
+      </p:sp>
+      <p:sp>
+        <p:nvSpPr>
+          <p:cNvPr id="5" name="TextBox 4"/>
+          <p:cNvSpPr txBox="1"/>
+          <p:nvPr/>
+        </p:nvSpPr>
+        <p:spPr>
+          <a:xfrm>
+            <a:off x="10881360" y="73152"/>
+            <a:ext cx="1188720" cy="658368"/>
+          </a:xfrm>
+          <a:prstGeom prst="rect">
+            <a:avLst/>
+          </a:prstGeom>
+          <a:noFill/>
+          <a:ln>
+            <a:noFill/>
+          </a:ln>
+        </p:spPr>
+        <p:txBody>
+          <a:bodyPr wrap="square" lIns="73152" rIns="73152" tIns="36576" bIns="36576" anchor="ctr">
+            <a:spAutoFit/>
+          </a:bodyPr>
+          <a:lstStyle/>
+          <a:p>
+            <a:pPr algn="r">
+              <a:spcAft>
+                <a:spcPts val="200"/>
+              </a:spcAft>
+            </a:pPr>
+            <a:r>
+              <a:rPr sz="1200" b="0">
+                <a:solidFill>
+                  <a:srgbClr val="FFFFFF"/>
+                </a:solidFill>
+                <a:latin typeface="IPAGothic"/>
+                <a:eastAsia typeface="IPAGothic"/>
+              </a:rPr>
+              <a:t>補論 6 / 8</a:t>
+            </a:r>
+          </a:p>
+        </p:txBody>
+      </p:sp>
+      <p:sp>
+        <p:nvSpPr>
+          <p:cNvPr id="6" name="Rectangle 5"/>
+          <p:cNvSpPr/>
+          <p:nvPr/>
+        </p:nvSpPr>
+        <p:spPr>
+          <a:xfrm>
+            <a:off x="0" y="6583680"/>
+            <a:ext cx="12191695" cy="274320"/>
+          </a:xfrm>
+          <a:prstGeom prst="rect">
+            <a:avLst/>
+          </a:prstGeom>
+          <a:solidFill>
+            <a:srgbClr val="F2F2F2"/>
+          </a:solidFill>
+          <a:ln>
+            <a:noFill/>
+          </a:ln>
+          <a:effectLst/>
+        </p:spPr>
+        <p:style>
+          <a:lnRef idx="1">
+            <a:schemeClr val="accent1"/>
+          </a:lnRef>
+          <a:fillRef idx="3">
+            <a:schemeClr val="accent1"/>
+          </a:fillRef>
+          <a:effectRef idx="2">
+            <a:schemeClr val="accent1"/>
+          </a:effectRef>
+          <a:fontRef idx="minor">
+            <a:schemeClr val="lt1"/>
+          </a:fontRef>
+        </p:style>
+        <p:txBody>
+          <a:bodyPr rtlCol="0" anchor="ctr"/>
+          <a:lstStyle/>
+          <a:p>
+            <a:pPr algn="ctr"/>
+          </a:p>
+        </p:txBody>
+      </p:sp>
+      <p:sp>
+        <p:nvSpPr>
+          <p:cNvPr id="7" name="TextBox 6"/>
+          <p:cNvSpPr txBox="1"/>
+          <p:nvPr/>
+        </p:nvSpPr>
+        <p:spPr>
+          <a:xfrm>
+            <a:off x="365760" y="6583680"/>
+            <a:ext cx="11430000" cy="274320"/>
+          </a:xfrm>
+          <a:prstGeom prst="rect">
+            <a:avLst/>
+          </a:prstGeom>
+          <a:noFill/>
+          <a:ln>
+            <a:noFill/>
+          </a:ln>
+        </p:spPr>
+        <p:txBody>
+          <a:bodyPr wrap="square" lIns="73152" rIns="73152" tIns="36576" bIns="36576" anchor="ctr">
+            <a:spAutoFit/>
+          </a:bodyPr>
+          <a:lstStyle/>
+          <a:p>
+            <a:pPr algn="l">
+              <a:spcAft>
+                <a:spcPts val="200"/>
+              </a:spcAft>
+            </a:pPr>
+            <a:r>
+              <a:rPr sz="1000" b="0">
+                <a:solidFill>
+                  <a:srgbClr val="595959"/>
+                </a:solidFill>
+                <a:latin typeface="IPAGothic"/>
+                <a:eastAsia typeface="IPAGothic"/>
+              </a:rPr>
+              <a:t>補論 ― 「AAC」「CCA」評価をどう考えるか</a:t>
+            </a:r>
+          </a:p>
+        </p:txBody>
+      </p:sp>
+      <p:sp>
+        <p:nvSpPr>
+          <p:cNvPr id="8" name="Rectangle 7"/>
+          <p:cNvSpPr/>
+          <p:nvPr/>
+        </p:nvSpPr>
+        <p:spPr>
+          <a:xfrm>
+            <a:off x="457200" y="960120"/>
+            <a:ext cx="11274552" cy="566928"/>
+          </a:xfrm>
+          <a:prstGeom prst="rect">
+            <a:avLst/>
+          </a:prstGeom>
+          <a:solidFill>
+            <a:srgbClr val="2E5C8A"/>
+          </a:solidFill>
+          <a:ln>
+            <a:noFill/>
+          </a:ln>
+          <a:effectLst/>
+        </p:spPr>
+        <p:style>
+          <a:lnRef idx="1">
+            <a:schemeClr val="accent1"/>
+          </a:lnRef>
+          <a:fillRef idx="3">
+            <a:schemeClr val="accent1"/>
+          </a:fillRef>
+          <a:effectRef idx="2">
+            <a:schemeClr val="accent1"/>
+          </a:effectRef>
+          <a:fontRef idx="minor">
+            <a:schemeClr val="lt1"/>
+          </a:fontRef>
+        </p:style>
+        <p:txBody>
+          <a:bodyPr rtlCol="0" anchor="ctr" wrap="square" tIns="36576" bIns="36576"/>
+          <a:lstStyle/>
+          <a:p>
+            <a:pPr algn="ctr">
+              <a:spcAft>
+                <a:spcPts val="200"/>
+              </a:spcAft>
+            </a:pPr>
+            <a:r>
+              <a:rPr sz="1500" b="1">
+                <a:solidFill>
+                  <a:srgbClr val="FFFFFF"/>
+                </a:solidFill>
+                <a:latin typeface="IPAGothic"/>
+                <a:eastAsia typeface="IPAGothic"/>
+              </a:rPr>
+              <a:t>本丸は ② 形成的評価 ― 単元末に困る前に、途中で見つけて指導で閉じる</a:t>
+            </a:r>
+          </a:p>
+        </p:txBody>
+      </p:sp>
+      <p:sp>
+        <p:nvSpPr>
+          <p:cNvPr id="9" name="Rectangle 8"/>
+          <p:cNvSpPr/>
+          <p:nvPr/>
+        </p:nvSpPr>
+        <p:spPr>
+          <a:xfrm>
+            <a:off x="457200" y="1737360"/>
+            <a:ext cx="1737360" cy="411480"/>
+          </a:xfrm>
+          <a:prstGeom prst="rect">
+            <a:avLst/>
+          </a:prstGeom>
+          <a:solidFill>
+            <a:srgbClr val="1F3A5F"/>
+          </a:solidFill>
+          <a:ln>
+            <a:noFill/>
+          </a:ln>
+          <a:effectLst/>
+        </p:spPr>
+        <p:style>
+          <a:lnRef idx="1">
+            <a:schemeClr val="accent1"/>
+          </a:lnRef>
+          <a:fillRef idx="3">
+            <a:schemeClr val="accent1"/>
+          </a:fillRef>
+          <a:effectRef idx="2">
+            <a:schemeClr val="accent1"/>
+          </a:effectRef>
+          <a:fontRef idx="minor">
+            <a:schemeClr val="lt1"/>
+          </a:fontRef>
+        </p:style>
+        <p:txBody>
+          <a:bodyPr rtlCol="0" anchor="ctr" wrap="square" tIns="36576" bIns="36576"/>
+          <a:lstStyle/>
+          <a:p>
+            <a:pPr algn="ctr">
+              <a:spcAft>
+                <a:spcPts val="200"/>
+              </a:spcAft>
+            </a:pPr>
+            <a:r>
+              <a:rPr sz="1300" b="1">
+                <a:solidFill>
+                  <a:srgbClr val="FFFFFF"/>
+                </a:solidFill>
+                <a:latin typeface="IPAGothic"/>
+                <a:eastAsia typeface="IPAGothic"/>
+              </a:rPr>
+              <a:t>段階</a:t>
+            </a:r>
+          </a:p>
+        </p:txBody>
+      </p:sp>
+      <p:sp>
+        <p:nvSpPr>
+          <p:cNvPr id="10" name="Rectangle 9"/>
+          <p:cNvSpPr/>
+          <p:nvPr/>
+        </p:nvSpPr>
+        <p:spPr>
+          <a:xfrm>
+            <a:off x="2194560" y="1737360"/>
+            <a:ext cx="6949440" cy="411480"/>
+          </a:xfrm>
+          <a:prstGeom prst="rect">
+            <a:avLst/>
+          </a:prstGeom>
+          <a:solidFill>
+            <a:srgbClr val="1F3A5F"/>
+          </a:solidFill>
+          <a:ln>
+            <a:noFill/>
+          </a:ln>
+          <a:effectLst/>
+        </p:spPr>
+        <p:style>
+          <a:lnRef idx="1">
+            <a:schemeClr val="accent1"/>
+          </a:lnRef>
+          <a:fillRef idx="3">
+            <a:schemeClr val="accent1"/>
+          </a:fillRef>
+          <a:effectRef idx="2">
+            <a:schemeClr val="accent1"/>
+          </a:effectRef>
+          <a:fontRef idx="minor">
+            <a:schemeClr val="lt1"/>
+          </a:fontRef>
+        </p:style>
+        <p:txBody>
+          <a:bodyPr rtlCol="0" anchor="ctr" wrap="square" tIns="36576" bIns="36576"/>
+          <a:lstStyle/>
+          <a:p>
+            <a:pPr algn="ctr">
+              <a:spcAft>
+                <a:spcPts val="200"/>
+              </a:spcAft>
+            </a:pPr>
+            <a:r>
+              <a:rPr sz="1300" b="1">
+                <a:solidFill>
+                  <a:srgbClr val="FFFFFF"/>
+                </a:solidFill>
+                <a:latin typeface="IPAGothic"/>
+                <a:eastAsia typeface="IPAGothic"/>
+              </a:rPr>
+              <a:t>やること</a:t>
+            </a:r>
+          </a:p>
+        </p:txBody>
+      </p:sp>
+      <p:sp>
+        <p:nvSpPr>
+          <p:cNvPr id="11" name="Rectangle 10"/>
+          <p:cNvSpPr/>
+          <p:nvPr/>
+        </p:nvSpPr>
+        <p:spPr>
+          <a:xfrm>
+            <a:off x="9144000" y="1737360"/>
+            <a:ext cx="2404872" cy="411480"/>
+          </a:xfrm>
+          <a:prstGeom prst="rect">
+            <a:avLst/>
+          </a:prstGeom>
+          <a:solidFill>
+            <a:srgbClr val="1F3A5F"/>
+          </a:solidFill>
+          <a:ln>
+            <a:noFill/>
+          </a:ln>
+          <a:effectLst/>
+        </p:spPr>
+        <p:style>
+          <a:lnRef idx="1">
+            <a:schemeClr val="accent1"/>
+          </a:lnRef>
+          <a:fillRef idx="3">
+            <a:schemeClr val="accent1"/>
+          </a:fillRef>
+          <a:effectRef idx="2">
+            <a:schemeClr val="accent1"/>
+          </a:effectRef>
+          <a:fontRef idx="minor">
+            <a:schemeClr val="lt1"/>
+          </a:fontRef>
+        </p:style>
+        <p:txBody>
+          <a:bodyPr rtlCol="0" anchor="ctr" wrap="square" tIns="36576" bIns="36576"/>
+          <a:lstStyle/>
+          <a:p>
+            <a:pPr algn="ctr">
+              <a:spcAft>
+                <a:spcPts val="200"/>
+              </a:spcAft>
+            </a:pPr>
+            <a:r>
+              <a:rPr sz="1300" b="1">
+                <a:solidFill>
+                  <a:srgbClr val="FFFFFF"/>
+                </a:solidFill>
+                <a:latin typeface="IPAGothic"/>
+                <a:eastAsia typeface="IPAGothic"/>
+              </a:rPr>
+              <a:t>公的根拠</a:t>
+            </a:r>
+          </a:p>
+        </p:txBody>
+      </p:sp>
+      <p:sp>
+        <p:nvSpPr>
+          <p:cNvPr id="12" name="Rectangle 11"/>
+          <p:cNvSpPr/>
+          <p:nvPr/>
+        </p:nvSpPr>
+        <p:spPr>
+          <a:xfrm>
+            <a:off x="457200" y="2148840"/>
+            <a:ext cx="1737360" cy="786384"/>
+          </a:xfrm>
+          <a:prstGeom prst="rect">
+            <a:avLst/>
+          </a:prstGeom>
+          <a:solidFill>
+            <a:srgbClr val="D6E4F0"/>
+          </a:solidFill>
+          <a:ln w="6350">
+            <a:solidFill>
+              <a:srgbClr val="595959"/>
+            </a:solidFill>
+          </a:ln>
+          <a:effectLst/>
+        </p:spPr>
+        <p:style>
+          <a:lnRef idx="1">
+            <a:schemeClr val="accent1"/>
+          </a:lnRef>
+          <a:fillRef idx="3">
+            <a:schemeClr val="accent1"/>
+          </a:fillRef>
+          <a:effectRef idx="2">
+            <a:schemeClr val="accent1"/>
+          </a:effectRef>
+          <a:fontRef idx="minor">
+            <a:schemeClr val="lt1"/>
+          </a:fontRef>
+        </p:style>
+        <p:txBody>
+          <a:bodyPr rtlCol="0" anchor="ctr" wrap="square" tIns="36576" bIns="36576"/>
+          <a:lstStyle/>
+          <a:p>
+            <a:pPr algn="ctr">
+              <a:spcAft>
+                <a:spcPts val="200"/>
+              </a:spcAft>
+            </a:pPr>
+            <a:r>
+              <a:rPr sz="1200" b="1">
+                <a:solidFill>
+                  <a:srgbClr val="1F3A5F"/>
+                </a:solidFill>
+                <a:latin typeface="IPAGothic"/>
+                <a:eastAsia typeface="IPAGothic"/>
+              </a:rPr>
+              <a:t>① 設計</a:t>
+            </a:r>
+          </a:p>
+          <a:p>
+            <a:pPr algn="ctr">
+              <a:spcAft>
+                <a:spcPts val="200"/>
+              </a:spcAft>
+            </a:pPr>
+            <a:r>
+              <a:rPr sz="1200" b="1">
+                <a:solidFill>
+                  <a:srgbClr val="1F3A5F"/>
+                </a:solidFill>
+                <a:latin typeface="IPAGothic"/>
+                <a:eastAsia typeface="IPAGothic"/>
+              </a:rPr>
+              <a:t>(事前)</a:t>
+            </a:r>
+          </a:p>
+        </p:txBody>
+      </p:sp>
+      <p:sp>
+        <p:nvSpPr>
+          <p:cNvPr id="13" name="Rectangle 12"/>
+          <p:cNvSpPr/>
+          <p:nvPr/>
+        </p:nvSpPr>
+        <p:spPr>
+          <a:xfrm>
+            <a:off x="2194560" y="2148840"/>
+            <a:ext cx="6949440" cy="786384"/>
+          </a:xfrm>
+          <a:prstGeom prst="rect">
+            <a:avLst/>
+          </a:prstGeom>
+          <a:solidFill>
+            <a:srgbClr val="FFFFFF"/>
+          </a:solidFill>
+          <a:ln w="6350">
+            <a:solidFill>
+              <a:srgbClr val="595959"/>
+            </a:solidFill>
+          </a:ln>
+          <a:effectLst/>
+        </p:spPr>
+        <p:style>
+          <a:lnRef idx="1">
+            <a:schemeClr val="accent1"/>
+          </a:lnRef>
+          <a:fillRef idx="3">
+            <a:schemeClr val="accent1"/>
+          </a:fillRef>
+          <a:effectRef idx="2">
+            <a:schemeClr val="accent1"/>
+          </a:effectRef>
+          <a:fontRef idx="minor">
+            <a:schemeClr val="lt1"/>
+          </a:fontRef>
+        </p:style>
+        <p:txBody>
+          <a:bodyPr rtlCol="0" anchor="ctr" wrap="square" tIns="36576" bIns="36576"/>
+          <a:lstStyle/>
+          <a:p>
+            <a:pPr algn="l">
+              <a:spcAft>
+                <a:spcPts val="200"/>
+              </a:spcAft>
+            </a:pPr>
+            <a:r>
+              <a:rPr sz="1200" b="0">
+                <a:solidFill>
+                  <a:srgbClr val="222222"/>
+                </a:solidFill>
+                <a:latin typeface="IPAGothic"/>
+                <a:eastAsia typeface="IPAGothic"/>
+              </a:rPr>
+              <a:t>3観点の規準を“同じ学習活動”から導く。態度の規準に挙手・提出・忘れ物を入れない</a:t>
+            </a:r>
+          </a:p>
+        </p:txBody>
+      </p:sp>
+      <p:sp>
+        <p:nvSpPr>
+          <p:cNvPr id="14" name="Rectangle 13"/>
+          <p:cNvSpPr/>
+          <p:nvPr/>
+        </p:nvSpPr>
+        <p:spPr>
+          <a:xfrm>
+            <a:off x="9144000" y="2148840"/>
+            <a:ext cx="2404872" cy="786384"/>
+          </a:xfrm>
+          <a:prstGeom prst="rect">
+            <a:avLst/>
+          </a:prstGeom>
+          <a:solidFill>
+            <a:srgbClr val="FFFFFF"/>
+          </a:solidFill>
+          <a:ln w="6350">
+            <a:solidFill>
+              <a:srgbClr val="595959"/>
+            </a:solidFill>
+          </a:ln>
+          <a:effectLst/>
+        </p:spPr>
+        <p:style>
+          <a:lnRef idx="1">
+            <a:schemeClr val="accent1"/>
+          </a:lnRef>
+          <a:fillRef idx="3">
+            <a:schemeClr val="accent1"/>
+          </a:fillRef>
+          <a:effectRef idx="2">
+            <a:schemeClr val="accent1"/>
+          </a:effectRef>
+          <a:fontRef idx="minor">
+            <a:schemeClr val="lt1"/>
+          </a:fontRef>
+        </p:style>
+        <p:txBody>
+          <a:bodyPr rtlCol="0" anchor="ctr" wrap="square" tIns="36576" bIns="36576"/>
+          <a:lstStyle/>
+          <a:p>
+            <a:pPr algn="ctr">
+              <a:spcAft>
+                <a:spcPts val="200"/>
+              </a:spcAft>
+            </a:pPr>
+            <a:r>
+              <a:rPr sz="1100" b="1">
+                <a:solidFill>
+                  <a:srgbClr val="4E7A36"/>
+                </a:solidFill>
+                <a:latin typeface="IPAGothic"/>
+                <a:eastAsia typeface="IPAGothic"/>
+              </a:rPr>
+              <a:t>中教審 / NIER</a:t>
+            </a:r>
+          </a:p>
+        </p:txBody>
+      </p:sp>
+      <p:sp>
+        <p:nvSpPr>
+          <p:cNvPr id="15" name="Rectangle 14"/>
+          <p:cNvSpPr/>
+          <p:nvPr/>
+        </p:nvSpPr>
+        <p:spPr>
+          <a:xfrm>
+            <a:off x="457200" y="2935224"/>
+            <a:ext cx="1737360" cy="786384"/>
+          </a:xfrm>
+          <a:prstGeom prst="rect">
+            <a:avLst/>
+          </a:prstGeom>
+          <a:solidFill>
+            <a:srgbClr val="D6E4F0"/>
+          </a:solidFill>
+          <a:ln w="6350">
+            <a:solidFill>
+              <a:srgbClr val="595959"/>
+            </a:solidFill>
+          </a:ln>
+          <a:effectLst/>
+        </p:spPr>
+        <p:style>
+          <a:lnRef idx="1">
+            <a:schemeClr val="accent1"/>
+          </a:lnRef>
+          <a:fillRef idx="3">
+            <a:schemeClr val="accent1"/>
+          </a:fillRef>
+          <a:effectRef idx="2">
+            <a:schemeClr val="accent1"/>
+          </a:effectRef>
+          <a:fontRef idx="minor">
+            <a:schemeClr val="lt1"/>
+          </a:fontRef>
+        </p:style>
+        <p:txBody>
+          <a:bodyPr rtlCol="0" anchor="ctr" wrap="square" tIns="36576" bIns="36576"/>
+          <a:lstStyle/>
+          <a:p>
+            <a:pPr algn="ctr">
+              <a:spcAft>
+                <a:spcPts val="200"/>
+              </a:spcAft>
+            </a:pPr>
+            <a:r>
+              <a:rPr sz="1200" b="1">
+                <a:solidFill>
+                  <a:srgbClr val="1F3A5F"/>
+                </a:solidFill>
+                <a:latin typeface="IPAGothic"/>
+                <a:eastAsia typeface="IPAGothic"/>
+              </a:rPr>
+              <a:t>② 形成的</a:t>
+            </a:r>
+          </a:p>
+          <a:p>
+            <a:pPr algn="ctr">
+              <a:spcAft>
+                <a:spcPts val="200"/>
+              </a:spcAft>
+            </a:pPr>
+            <a:r>
+              <a:rPr sz="1200" b="1">
+                <a:solidFill>
+                  <a:srgbClr val="1F3A5F"/>
+                </a:solidFill>
+                <a:latin typeface="IPAGothic"/>
+                <a:eastAsia typeface="IPAGothic"/>
+              </a:rPr>
+              <a:t>(途中)★</a:t>
+            </a:r>
+          </a:p>
+        </p:txBody>
+      </p:sp>
+      <p:sp>
+        <p:nvSpPr>
+          <p:cNvPr id="16" name="Rectangle 15"/>
+          <p:cNvSpPr/>
+          <p:nvPr/>
+        </p:nvSpPr>
+        <p:spPr>
+          <a:xfrm>
+            <a:off x="2194560" y="2935224"/>
+            <a:ext cx="6949440" cy="786384"/>
+          </a:xfrm>
+          <a:prstGeom prst="rect">
+            <a:avLst/>
+          </a:prstGeom>
+          <a:solidFill>
+            <a:srgbClr val="FFF2CC"/>
+          </a:solidFill>
+          <a:ln w="6350">
+            <a:solidFill>
+              <a:srgbClr val="595959"/>
+            </a:solidFill>
+          </a:ln>
+          <a:effectLst/>
+        </p:spPr>
+        <p:style>
+          <a:lnRef idx="1">
+            <a:schemeClr val="accent1"/>
+          </a:lnRef>
+          <a:fillRef idx="3">
+            <a:schemeClr val="accent1"/>
+          </a:fillRef>
+          <a:effectRef idx="2">
+            <a:schemeClr val="accent1"/>
+          </a:effectRef>
+          <a:fontRef idx="minor">
+            <a:schemeClr val="lt1"/>
+          </a:fontRef>
+        </p:style>
+        <p:txBody>
+          <a:bodyPr rtlCol="0" anchor="ctr" wrap="square" tIns="36576" bIns="36576"/>
+          <a:lstStyle/>
+          <a:p>
+            <a:pPr algn="l">
+              <a:spcAft>
+                <a:spcPts val="200"/>
+              </a:spcAft>
+            </a:pPr>
+            <a:r>
+              <a:rPr sz="1200" b="0">
+                <a:solidFill>
+                  <a:srgbClr val="222222"/>
+                </a:solidFill>
+                <a:latin typeface="IPAGothic"/>
+                <a:eastAsia typeface="IPAGothic"/>
+              </a:rPr>
+              <a:t>態度C傾向を早期発見 → 原因診断(難しすぎ/方法不明/見通しなし)→ 足場かけ・方法例示。AAC傾向には挑戦的課題</a:t>
+            </a:r>
+          </a:p>
+        </p:txBody>
+      </p:sp>
+      <p:sp>
+        <p:nvSpPr>
+          <p:cNvPr id="17" name="Rectangle 16"/>
+          <p:cNvSpPr/>
+          <p:nvPr/>
+        </p:nvSpPr>
+        <p:spPr>
+          <a:xfrm>
+            <a:off x="9144000" y="2935224"/>
+            <a:ext cx="2404872" cy="786384"/>
+          </a:xfrm>
+          <a:prstGeom prst="rect">
+            <a:avLst/>
+          </a:prstGeom>
+          <a:solidFill>
+            <a:srgbClr val="FFF2CC"/>
+          </a:solidFill>
+          <a:ln w="6350">
+            <a:solidFill>
+              <a:srgbClr val="595959"/>
+            </a:solidFill>
+          </a:ln>
+          <a:effectLst/>
+        </p:spPr>
+        <p:style>
+          <a:lnRef idx="1">
+            <a:schemeClr val="accent1"/>
+          </a:lnRef>
+          <a:fillRef idx="3">
+            <a:schemeClr val="accent1"/>
+          </a:fillRef>
+          <a:effectRef idx="2">
+            <a:schemeClr val="accent1"/>
+          </a:effectRef>
+          <a:fontRef idx="minor">
+            <a:schemeClr val="lt1"/>
+          </a:fontRef>
+        </p:style>
+        <p:txBody>
+          <a:bodyPr rtlCol="0" anchor="ctr" wrap="square" tIns="36576" bIns="36576"/>
+          <a:lstStyle/>
+          <a:p>
+            <a:pPr algn="ctr">
+              <a:spcAft>
+                <a:spcPts val="200"/>
+              </a:spcAft>
+            </a:pPr>
+            <a:r>
+              <a:rPr sz="1100" b="1">
+                <a:solidFill>
+                  <a:srgbClr val="4E7A36"/>
+                </a:solidFill>
+                <a:latin typeface="IPAGothic"/>
+                <a:eastAsia typeface="IPAGothic"/>
+              </a:rPr>
+              <a:t>NIER</a:t>
+            </a:r>
+          </a:p>
+        </p:txBody>
+      </p:sp>
+      <p:sp>
+        <p:nvSpPr>
+          <p:cNvPr id="18" name="Rectangle 17"/>
+          <p:cNvSpPr/>
+          <p:nvPr/>
+        </p:nvSpPr>
+        <p:spPr>
+          <a:xfrm>
+            <a:off x="457200" y="3721608"/>
+            <a:ext cx="1737360" cy="786384"/>
+          </a:xfrm>
+          <a:prstGeom prst="rect">
+            <a:avLst/>
+          </a:prstGeom>
+          <a:solidFill>
+            <a:srgbClr val="D6E4F0"/>
+          </a:solidFill>
+          <a:ln w="6350">
+            <a:solidFill>
+              <a:srgbClr val="595959"/>
+            </a:solidFill>
+          </a:ln>
+          <a:effectLst/>
+        </p:spPr>
+        <p:style>
+          <a:lnRef idx="1">
+            <a:schemeClr val="accent1"/>
+          </a:lnRef>
+          <a:fillRef idx="3">
+            <a:schemeClr val="accent1"/>
+          </a:fillRef>
+          <a:effectRef idx="2">
+            <a:schemeClr val="accent1"/>
+          </a:effectRef>
+          <a:fontRef idx="minor">
+            <a:schemeClr val="lt1"/>
+          </a:fontRef>
+        </p:style>
+        <p:txBody>
+          <a:bodyPr rtlCol="0" anchor="ctr" wrap="square" tIns="36576" bIns="36576"/>
+          <a:lstStyle/>
+          <a:p>
+            <a:pPr algn="ctr">
+              <a:spcAft>
+                <a:spcPts val="200"/>
+              </a:spcAft>
+            </a:pPr>
+            <a:r>
+              <a:rPr sz="1200" b="1">
+                <a:solidFill>
+                  <a:srgbClr val="1F3A5F"/>
+                </a:solidFill>
+                <a:latin typeface="IPAGothic"/>
+                <a:eastAsia typeface="IPAGothic"/>
+              </a:rPr>
+              <a:t>③ 総括</a:t>
+            </a:r>
+          </a:p>
+          <a:p>
+            <a:pPr algn="ctr">
+              <a:spcAft>
+                <a:spcPts val="200"/>
+              </a:spcAft>
+            </a:pPr>
+            <a:r>
+              <a:rPr sz="1200" b="1">
+                <a:solidFill>
+                  <a:srgbClr val="1F3A5F"/>
+                </a:solidFill>
+                <a:latin typeface="IPAGothic"/>
+                <a:eastAsia typeface="IPAGothic"/>
+              </a:rPr>
+              <a:t>(単元末)</a:t>
+            </a:r>
+          </a:p>
+        </p:txBody>
+      </p:sp>
+      <p:sp>
+        <p:nvSpPr>
+          <p:cNvPr id="19" name="Rectangle 18"/>
+          <p:cNvSpPr/>
+          <p:nvPr/>
+        </p:nvSpPr>
+        <p:spPr>
+          <a:xfrm>
+            <a:off x="2194560" y="3721608"/>
+            <a:ext cx="6949440" cy="786384"/>
+          </a:xfrm>
+          <a:prstGeom prst="rect">
+            <a:avLst/>
+          </a:prstGeom>
+          <a:solidFill>
+            <a:srgbClr val="FFFFFF"/>
+          </a:solidFill>
+          <a:ln w="6350">
+            <a:solidFill>
+              <a:srgbClr val="595959"/>
+            </a:solidFill>
+          </a:ln>
+          <a:effectLst/>
+        </p:spPr>
+        <p:style>
+          <a:lnRef idx="1">
+            <a:schemeClr val="accent1"/>
+          </a:lnRef>
+          <a:fillRef idx="3">
+            <a:schemeClr val="accent1"/>
+          </a:fillRef>
+          <a:effectRef idx="2">
+            <a:schemeClr val="accent1"/>
+          </a:effectRef>
+          <a:fontRef idx="minor">
+            <a:schemeClr val="lt1"/>
+          </a:fontRef>
+        </p:style>
+        <p:txBody>
+          <a:bodyPr rtlCol="0" anchor="ctr" wrap="square" tIns="36576" bIns="36576"/>
+          <a:lstStyle/>
+          <a:p>
+            <a:pPr algn="l">
+              <a:spcAft>
+                <a:spcPts val="200"/>
+              </a:spcAft>
+            </a:pPr>
+            <a:r>
+              <a:rPr sz="1200" b="0">
+                <a:solidFill>
+                  <a:srgbClr val="222222"/>
+                </a:solidFill>
+                <a:latin typeface="IPAGothic"/>
+                <a:eastAsia typeface="IPAGothic"/>
+              </a:rPr>
+              <a:t>1時間・1方法で決めない。記述・発言・行動観察・自己/相互評価を“材料の一つ”に。他観点と照らす</a:t>
+            </a:r>
+          </a:p>
+        </p:txBody>
+      </p:sp>
+      <p:sp>
+        <p:nvSpPr>
+          <p:cNvPr id="20" name="Rectangle 19"/>
+          <p:cNvSpPr/>
+          <p:nvPr/>
+        </p:nvSpPr>
+        <p:spPr>
+          <a:xfrm>
+            <a:off x="9144000" y="3721608"/>
+            <a:ext cx="2404872" cy="786384"/>
+          </a:xfrm>
+          <a:prstGeom prst="rect">
+            <a:avLst/>
+          </a:prstGeom>
+          <a:solidFill>
+            <a:srgbClr val="FFFFFF"/>
+          </a:solidFill>
+          <a:ln w="6350">
+            <a:solidFill>
+              <a:srgbClr val="595959"/>
+            </a:solidFill>
+          </a:ln>
+          <a:effectLst/>
+        </p:spPr>
+        <p:style>
+          <a:lnRef idx="1">
+            <a:schemeClr val="accent1"/>
+          </a:lnRef>
+          <a:fillRef idx="3">
+            <a:schemeClr val="accent1"/>
+          </a:fillRef>
+          <a:effectRef idx="2">
+            <a:schemeClr val="accent1"/>
+          </a:effectRef>
+          <a:fontRef idx="minor">
+            <a:schemeClr val="lt1"/>
+          </a:fontRef>
+        </p:style>
+        <p:txBody>
+          <a:bodyPr rtlCol="0" anchor="ctr" wrap="square" tIns="36576" bIns="36576"/>
+          <a:lstStyle/>
+          <a:p>
+            <a:pPr algn="ctr">
+              <a:spcAft>
+                <a:spcPts val="200"/>
+              </a:spcAft>
+            </a:pPr>
+            <a:r>
+              <a:rPr sz="1100" b="1">
+                <a:solidFill>
+                  <a:srgbClr val="4E7A36"/>
+                </a:solidFill>
+                <a:latin typeface="IPAGothic"/>
+                <a:eastAsia typeface="IPAGothic"/>
+              </a:rPr>
+              <a:t>東京都 / 中教審</a:t>
+            </a:r>
+          </a:p>
+        </p:txBody>
+      </p:sp>
+      <p:sp>
+        <p:nvSpPr>
+          <p:cNvPr id="21" name="Rectangle 20"/>
+          <p:cNvSpPr/>
+          <p:nvPr/>
+        </p:nvSpPr>
+        <p:spPr>
+          <a:xfrm>
+            <a:off x="457200" y="4507992"/>
+            <a:ext cx="1737360" cy="786384"/>
+          </a:xfrm>
+          <a:prstGeom prst="rect">
+            <a:avLst/>
+          </a:prstGeom>
+          <a:solidFill>
+            <a:srgbClr val="D6E4F0"/>
+          </a:solidFill>
+          <a:ln w="6350">
+            <a:solidFill>
+              <a:srgbClr val="595959"/>
+            </a:solidFill>
+          </a:ln>
+          <a:effectLst/>
+        </p:spPr>
+        <p:style>
+          <a:lnRef idx="1">
+            <a:schemeClr val="accent1"/>
+          </a:lnRef>
+          <a:fillRef idx="3">
+            <a:schemeClr val="accent1"/>
+          </a:fillRef>
+          <a:effectRef idx="2">
+            <a:schemeClr val="accent1"/>
+          </a:effectRef>
+          <a:fontRef idx="minor">
+            <a:schemeClr val="lt1"/>
+          </a:fontRef>
+        </p:style>
+        <p:txBody>
+          <a:bodyPr rtlCol="0" anchor="ctr" wrap="square" tIns="36576" bIns="36576"/>
+          <a:lstStyle/>
+          <a:p>
+            <a:pPr algn="ctr">
+              <a:spcAft>
+                <a:spcPts val="200"/>
+              </a:spcAft>
+            </a:pPr>
+            <a:r>
+              <a:rPr sz="1200" b="1">
+                <a:solidFill>
+                  <a:srgbClr val="1F3A5F"/>
+                </a:solidFill>
+                <a:latin typeface="IPAGothic"/>
+                <a:eastAsia typeface="IPAGothic"/>
+              </a:rPr>
+              <a:t>④ 組織</a:t>
+            </a:r>
+          </a:p>
+        </p:txBody>
+      </p:sp>
+      <p:sp>
+        <p:nvSpPr>
+          <p:cNvPr id="22" name="Rectangle 21"/>
+          <p:cNvSpPr/>
+          <p:nvPr/>
+        </p:nvSpPr>
+        <p:spPr>
+          <a:xfrm>
+            <a:off x="2194560" y="4507992"/>
+            <a:ext cx="6949440" cy="786384"/>
+          </a:xfrm>
+          <a:prstGeom prst="rect">
+            <a:avLst/>
+          </a:prstGeom>
+          <a:solidFill>
+            <a:srgbClr val="FFFFFF"/>
+          </a:solidFill>
+          <a:ln w="6350">
+            <a:solidFill>
+              <a:srgbClr val="595959"/>
+            </a:solidFill>
+          </a:ln>
+          <a:effectLst/>
+        </p:spPr>
+        <p:style>
+          <a:lnRef idx="1">
+            <a:schemeClr val="accent1"/>
+          </a:lnRef>
+          <a:fillRef idx="3">
+            <a:schemeClr val="accent1"/>
+          </a:fillRef>
+          <a:effectRef idx="2">
+            <a:schemeClr val="accent1"/>
+          </a:effectRef>
+          <a:fontRef idx="minor">
+            <a:schemeClr val="lt1"/>
+          </a:fontRef>
+        </p:style>
+        <p:txBody>
+          <a:bodyPr rtlCol="0" anchor="ctr" wrap="square" tIns="36576" bIns="36576"/>
+          <a:lstStyle/>
+          <a:p>
+            <a:pPr algn="l">
+              <a:spcAft>
+                <a:spcPts val="200"/>
+              </a:spcAft>
+            </a:pPr>
+            <a:r>
+              <a:rPr sz="1200" b="0">
+                <a:solidFill>
+                  <a:srgbClr val="222222"/>
+                </a:solidFill>
+                <a:latin typeface="IPAGothic"/>
+                <a:eastAsia typeface="IPAGothic"/>
+              </a:rPr>
+              <a:t>教科会・学年でモデレーション(評価のすり合わせ)。ルーブリックを生徒と事前共有</a:t>
+            </a:r>
+          </a:p>
+        </p:txBody>
+      </p:sp>
+      <p:sp>
+        <p:nvSpPr>
+          <p:cNvPr id="23" name="Rectangle 22"/>
+          <p:cNvSpPr/>
+          <p:nvPr/>
+        </p:nvSpPr>
+        <p:spPr>
+          <a:xfrm>
+            <a:off x="9144000" y="4507992"/>
+            <a:ext cx="2404872" cy="786384"/>
+          </a:xfrm>
+          <a:prstGeom prst="rect">
+            <a:avLst/>
+          </a:prstGeom>
+          <a:solidFill>
+            <a:srgbClr val="FFFFFF"/>
+          </a:solidFill>
+          <a:ln w="6350">
+            <a:solidFill>
+              <a:srgbClr val="595959"/>
+            </a:solidFill>
+          </a:ln>
+          <a:effectLst/>
+        </p:spPr>
+        <p:style>
+          <a:lnRef idx="1">
+            <a:schemeClr val="accent1"/>
+          </a:lnRef>
+          <a:fillRef idx="3">
+            <a:schemeClr val="accent1"/>
+          </a:fillRef>
+          <a:effectRef idx="2">
+            <a:schemeClr val="accent1"/>
+          </a:effectRef>
+          <a:fontRef idx="minor">
+            <a:schemeClr val="lt1"/>
+          </a:fontRef>
+        </p:style>
+        <p:txBody>
+          <a:bodyPr rtlCol="0" anchor="ctr" wrap="square" tIns="36576" bIns="36576"/>
+          <a:lstStyle/>
+          <a:p>
+            <a:pPr algn="ctr">
+              <a:spcAft>
+                <a:spcPts val="200"/>
+              </a:spcAft>
+            </a:pPr>
+            <a:r>
+              <a:rPr sz="1100" b="1">
+                <a:solidFill>
+                  <a:srgbClr val="4E7A36"/>
+                </a:solidFill>
+                <a:latin typeface="IPAGothic"/>
+                <a:eastAsia typeface="IPAGothic"/>
+              </a:rPr>
+              <a:t>各教委</a:t>
+            </a:r>
+          </a:p>
+        </p:txBody>
+      </p:sp>
+      <p:sp>
+        <p:nvSpPr>
+          <p:cNvPr id="24" name="Rectangle 23"/>
+          <p:cNvSpPr/>
+          <p:nvPr/>
+        </p:nvSpPr>
+        <p:spPr>
+          <a:xfrm>
+            <a:off x="457200" y="5294376"/>
+            <a:ext cx="1737360" cy="786384"/>
+          </a:xfrm>
+          <a:prstGeom prst="rect">
+            <a:avLst/>
+          </a:prstGeom>
+          <a:solidFill>
+            <a:srgbClr val="D6E4F0"/>
+          </a:solidFill>
+          <a:ln w="6350">
+            <a:solidFill>
+              <a:srgbClr val="595959"/>
+            </a:solidFill>
+          </a:ln>
+          <a:effectLst/>
+        </p:spPr>
+        <p:style>
+          <a:lnRef idx="1">
+            <a:schemeClr val="accent1"/>
+          </a:lnRef>
+          <a:fillRef idx="3">
+            <a:schemeClr val="accent1"/>
+          </a:fillRef>
+          <a:effectRef idx="2">
+            <a:schemeClr val="accent1"/>
+          </a:effectRef>
+          <a:fontRef idx="minor">
+            <a:schemeClr val="lt1"/>
+          </a:fontRef>
+        </p:style>
+        <p:txBody>
+          <a:bodyPr rtlCol="0" anchor="ctr" wrap="square" tIns="36576" bIns="36576"/>
+          <a:lstStyle/>
+          <a:p>
+            <a:pPr algn="ctr">
+              <a:spcAft>
+                <a:spcPts val="200"/>
+              </a:spcAft>
+            </a:pPr>
+            <a:r>
+              <a:rPr sz="1200" b="1">
+                <a:solidFill>
+                  <a:srgbClr val="1F3A5F"/>
+                </a:solidFill>
+                <a:latin typeface="IPAGothic"/>
+                <a:eastAsia typeface="IPAGothic"/>
+              </a:rPr>
+              <a:t>⑤ 点検</a:t>
+            </a:r>
+          </a:p>
+        </p:txBody>
+      </p:sp>
+      <p:sp>
+        <p:nvSpPr>
+          <p:cNvPr id="25" name="Rectangle 24"/>
+          <p:cNvSpPr/>
+          <p:nvPr/>
+        </p:nvSpPr>
+        <p:spPr>
+          <a:xfrm>
+            <a:off x="2194560" y="5294376"/>
+            <a:ext cx="6949440" cy="786384"/>
+          </a:xfrm>
+          <a:prstGeom prst="rect">
+            <a:avLst/>
+          </a:prstGeom>
+          <a:solidFill>
+            <a:srgbClr val="FFFFFF"/>
+          </a:solidFill>
+          <a:ln w="6350">
+            <a:solidFill>
+              <a:srgbClr val="595959"/>
+            </a:solidFill>
+          </a:ln>
+          <a:effectLst/>
+        </p:spPr>
+        <p:style>
+          <a:lnRef idx="1">
+            <a:schemeClr val="accent1"/>
+          </a:lnRef>
+          <a:fillRef idx="3">
+            <a:schemeClr val="accent1"/>
+          </a:fillRef>
+          <a:effectRef idx="2">
+            <a:schemeClr val="accent1"/>
+          </a:effectRef>
+          <a:fontRef idx="minor">
+            <a:schemeClr val="lt1"/>
+          </a:fontRef>
+        </p:style>
+        <p:txBody>
+          <a:bodyPr rtlCol="0" anchor="ctr" wrap="square" tIns="36576" bIns="36576"/>
+          <a:lstStyle/>
+          <a:p>
+            <a:pPr algn="l">
+              <a:spcAft>
+                <a:spcPts val="200"/>
+              </a:spcAft>
+            </a:pPr>
+            <a:r>
+              <a:rPr sz="1200" b="0">
+                <a:solidFill>
+                  <a:srgbClr val="222222"/>
+                </a:solidFill>
+                <a:latin typeface="IPAGothic"/>
+                <a:eastAsia typeface="IPAGothic"/>
+              </a:rPr>
+              <a:t>出たら評定をいじらず、形式要素の混入・規準のズレ・指導の届きを点検</a:t>
+            </a:r>
+          </a:p>
+        </p:txBody>
+      </p:sp>
+      <p:sp>
+        <p:nvSpPr>
+          <p:cNvPr id="26" name="Rectangle 25"/>
+          <p:cNvSpPr/>
+          <p:nvPr/>
+        </p:nvSpPr>
+        <p:spPr>
+          <a:xfrm>
+            <a:off x="9144000" y="5294376"/>
+            <a:ext cx="2404872" cy="786384"/>
+          </a:xfrm>
+          <a:prstGeom prst="rect">
+            <a:avLst/>
+          </a:prstGeom>
+          <a:solidFill>
+            <a:srgbClr val="FFFFFF"/>
+          </a:solidFill>
+          <a:ln w="6350">
+            <a:solidFill>
+              <a:srgbClr val="595959"/>
+            </a:solidFill>
+          </a:ln>
+          <a:effectLst/>
+        </p:spPr>
+        <p:style>
+          <a:lnRef idx="1">
+            <a:schemeClr val="accent1"/>
+          </a:lnRef>
+          <a:fillRef idx="3">
+            <a:schemeClr val="accent1"/>
+          </a:fillRef>
+          <a:effectRef idx="2">
+            <a:schemeClr val="accent1"/>
+          </a:effectRef>
+          <a:fontRef idx="minor">
+            <a:schemeClr val="lt1"/>
+          </a:fontRef>
+        </p:style>
+        <p:txBody>
+          <a:bodyPr rtlCol="0" anchor="ctr" wrap="square" tIns="36576" bIns="36576"/>
+          <a:lstStyle/>
+          <a:p>
+            <a:pPr algn="ctr">
+              <a:spcAft>
+                <a:spcPts val="200"/>
+              </a:spcAft>
+            </a:pPr>
+            <a:r>
+              <a:rPr sz="1100" b="1">
+                <a:solidFill>
+                  <a:srgbClr val="4E7A36"/>
+                </a:solidFill>
+                <a:latin typeface="IPAGothic"/>
+                <a:eastAsia typeface="IPAGothic"/>
+              </a:rPr>
+              <a:t>NIER / 奈良県</a:t>
+            </a:r>
+          </a:p>
+        </p:txBody>
+      </p:sp>
+      <p:sp>
+        <p:nvSpPr>
+          <p:cNvPr id="27" name="Rectangle 26"/>
+          <p:cNvSpPr/>
+          <p:nvPr/>
+        </p:nvSpPr>
+        <p:spPr>
+          <a:xfrm>
+            <a:off x="457200" y="6144768"/>
+            <a:ext cx="11274552" cy="438912"/>
+          </a:xfrm>
+          <a:prstGeom prst="rect">
+            <a:avLst/>
+          </a:prstGeom>
+          <a:solidFill>
+            <a:srgbClr val="C45A11"/>
+          </a:solidFill>
+          <a:ln>
+            <a:noFill/>
+          </a:ln>
+          <a:effectLst/>
+        </p:spPr>
+        <p:style>
+          <a:lnRef idx="1">
+            <a:schemeClr val="accent1"/>
+          </a:lnRef>
+          <a:fillRef idx="3">
+            <a:schemeClr val="accent1"/>
+          </a:fillRef>
+          <a:effectRef idx="2">
+            <a:schemeClr val="accent1"/>
+          </a:effectRef>
+          <a:fontRef idx="minor">
+            <a:schemeClr val="lt1"/>
+          </a:fontRef>
+        </p:style>
+        <p:txBody>
+          <a:bodyPr rtlCol="0" anchor="ctr" wrap="square" tIns="36576" bIns="36576"/>
+          <a:lstStyle/>
+          <a:p>
+            <a:pPr algn="ctr">
+              <a:spcAft>
+                <a:spcPts val="200"/>
+              </a:spcAft>
+            </a:pPr>
+            <a:r>
+              <a:rPr sz="1300" b="1">
+                <a:solidFill>
+                  <a:srgbClr val="FFFFFF"/>
+                </a:solidFill>
+                <a:latin typeface="IPAGothic"/>
+                <a:eastAsia typeface="IPAGothic"/>
+              </a:rPr>
+              <a:t>「指導と評価の一体化」の本旨 ＝ 評価を次の“指導”に返して、ばらつきを閉じていくこと</a:t>
+            </a:r>
+          </a:p>
+        </p:txBody>
+      </p:sp>
+    </p:spTree>
+  </p:cSld>
+  <p:clrMapOvr>
+    <a:masterClrMapping/>
+  </p:clrMapOvr>
+</p:sld>
+</file>
+
 <file path=ppt/slides/slide2.xml><?xml version="1.0" encoding="utf-8"?>
 <p:sld xmlns:a="http://schemas.openxmlformats.org/drawingml/2006/main" xmlns:p="http://schemas.openxmlformats.org/presentationml/2006/main" xmlns:r="http://schemas.openxmlformats.org/officeDocument/2006/relationships">
   <p:cSld>
@@ -8371,6 +14491,2090 @@
                 <a:eastAsia typeface="IPAGothic"/>
               </a:rPr>
               <a:t>明日からの実践に向けて</a:t>
+            </a:r>
+          </a:p>
+        </p:txBody>
+      </p:sp>
+    </p:spTree>
+  </p:cSld>
+  <p:clrMapOvr>
+    <a:masterClrMapping/>
+  </p:clrMapOvr>
+</p:sld>
+</file>
+
+<file path=ppt/slides/slide20.xml><?xml version="1.0" encoding="utf-8"?>
+<p:sld xmlns:a="http://schemas.openxmlformats.org/drawingml/2006/main" xmlns:p="http://schemas.openxmlformats.org/presentationml/2006/main" xmlns:r="http://schemas.openxmlformats.org/officeDocument/2006/relationships">
+  <p:cSld>
+    <p:spTree>
+      <p:nvGrpSpPr>
+        <p:cNvPr id="1" name=""/>
+        <p:cNvGrpSpPr/>
+        <p:nvPr/>
+      </p:nvGrpSpPr>
+      <p:grpSpPr/>
+      <p:sp>
+        <p:nvSpPr>
+          <p:cNvPr id="2" name="Rectangle 1"/>
+          <p:cNvSpPr/>
+          <p:nvPr/>
+        </p:nvSpPr>
+        <p:spPr>
+          <a:xfrm>
+            <a:off x="0" y="0"/>
+            <a:ext cx="12191695" cy="777240"/>
+          </a:xfrm>
+          <a:prstGeom prst="rect">
+            <a:avLst/>
+          </a:prstGeom>
+          <a:solidFill>
+            <a:srgbClr val="1F3A5F"/>
+          </a:solidFill>
+          <a:ln>
+            <a:noFill/>
+          </a:ln>
+          <a:effectLst/>
+        </p:spPr>
+        <p:style>
+          <a:lnRef idx="1">
+            <a:schemeClr val="accent1"/>
+          </a:lnRef>
+          <a:fillRef idx="3">
+            <a:schemeClr val="accent1"/>
+          </a:fillRef>
+          <a:effectRef idx="2">
+            <a:schemeClr val="accent1"/>
+          </a:effectRef>
+          <a:fontRef idx="minor">
+            <a:schemeClr val="lt1"/>
+          </a:fontRef>
+        </p:style>
+        <p:txBody>
+          <a:bodyPr rtlCol="0" anchor="ctr"/>
+          <a:lstStyle/>
+          <a:p>
+            <a:pPr algn="ctr"/>
+          </a:p>
+        </p:txBody>
+      </p:sp>
+      <p:sp>
+        <p:nvSpPr>
+          <p:cNvPr id="3" name="Rectangle 2"/>
+          <p:cNvSpPr/>
+          <p:nvPr/>
+        </p:nvSpPr>
+        <p:spPr>
+          <a:xfrm>
+            <a:off x="0" y="777240"/>
+            <a:ext cx="12191695" cy="54864"/>
+          </a:xfrm>
+          <a:prstGeom prst="rect">
+            <a:avLst/>
+          </a:prstGeom>
+          <a:solidFill>
+            <a:srgbClr val="C45A11"/>
+          </a:solidFill>
+          <a:ln>
+            <a:noFill/>
+          </a:ln>
+          <a:effectLst/>
+        </p:spPr>
+        <p:style>
+          <a:lnRef idx="1">
+            <a:schemeClr val="accent1"/>
+          </a:lnRef>
+          <a:fillRef idx="3">
+            <a:schemeClr val="accent1"/>
+          </a:fillRef>
+          <a:effectRef idx="2">
+            <a:schemeClr val="accent1"/>
+          </a:effectRef>
+          <a:fontRef idx="minor">
+            <a:schemeClr val="lt1"/>
+          </a:fontRef>
+        </p:style>
+        <p:txBody>
+          <a:bodyPr rtlCol="0" anchor="ctr"/>
+          <a:lstStyle/>
+          <a:p>
+            <a:pPr algn="ctr"/>
+          </a:p>
+        </p:txBody>
+      </p:sp>
+      <p:sp>
+        <p:nvSpPr>
+          <p:cNvPr id="4" name="TextBox 3"/>
+          <p:cNvSpPr txBox="1"/>
+          <p:nvPr/>
+        </p:nvSpPr>
+        <p:spPr>
+          <a:xfrm>
+            <a:off x="365760" y="73152"/>
+            <a:ext cx="10424160" cy="658368"/>
+          </a:xfrm>
+          <a:prstGeom prst="rect">
+            <a:avLst/>
+          </a:prstGeom>
+          <a:noFill/>
+          <a:ln>
+            <a:noFill/>
+          </a:ln>
+        </p:spPr>
+        <p:txBody>
+          <a:bodyPr wrap="square" lIns="73152" rIns="73152" tIns="36576" bIns="36576" anchor="ctr">
+            <a:spAutoFit/>
+          </a:bodyPr>
+          <a:lstStyle/>
+          <a:p>
+            <a:pPr algn="l">
+              <a:spcAft>
+                <a:spcPts val="200"/>
+              </a:spcAft>
+            </a:pPr>
+            <a:r>
+              <a:rPr sz="2200" b="1">
+                <a:solidFill>
+                  <a:srgbClr val="FFFFFF"/>
+                </a:solidFill>
+                <a:latin typeface="IPAGothic"/>
+                <a:eastAsia typeface="IPAGothic"/>
+              </a:rPr>
+              <a:t>補論⑦ 国も認めた ― 態度は「評定外」へ</a:t>
+            </a:r>
+          </a:p>
+        </p:txBody>
+      </p:sp>
+      <p:sp>
+        <p:nvSpPr>
+          <p:cNvPr id="5" name="TextBox 4"/>
+          <p:cNvSpPr txBox="1"/>
+          <p:nvPr/>
+        </p:nvSpPr>
+        <p:spPr>
+          <a:xfrm>
+            <a:off x="10881360" y="73152"/>
+            <a:ext cx="1188720" cy="658368"/>
+          </a:xfrm>
+          <a:prstGeom prst="rect">
+            <a:avLst/>
+          </a:prstGeom>
+          <a:noFill/>
+          <a:ln>
+            <a:noFill/>
+          </a:ln>
+        </p:spPr>
+        <p:txBody>
+          <a:bodyPr wrap="square" lIns="73152" rIns="73152" tIns="36576" bIns="36576" anchor="ctr">
+            <a:spAutoFit/>
+          </a:bodyPr>
+          <a:lstStyle/>
+          <a:p>
+            <a:pPr algn="r">
+              <a:spcAft>
+                <a:spcPts val="200"/>
+              </a:spcAft>
+            </a:pPr>
+            <a:r>
+              <a:rPr sz="1200" b="0">
+                <a:solidFill>
+                  <a:srgbClr val="FFFFFF"/>
+                </a:solidFill>
+                <a:latin typeface="IPAGothic"/>
+                <a:eastAsia typeface="IPAGothic"/>
+              </a:rPr>
+              <a:t>補論 7 / 8</a:t>
+            </a:r>
+          </a:p>
+        </p:txBody>
+      </p:sp>
+      <p:sp>
+        <p:nvSpPr>
+          <p:cNvPr id="6" name="Rectangle 5"/>
+          <p:cNvSpPr/>
+          <p:nvPr/>
+        </p:nvSpPr>
+        <p:spPr>
+          <a:xfrm>
+            <a:off x="0" y="6583680"/>
+            <a:ext cx="12191695" cy="274320"/>
+          </a:xfrm>
+          <a:prstGeom prst="rect">
+            <a:avLst/>
+          </a:prstGeom>
+          <a:solidFill>
+            <a:srgbClr val="F2F2F2"/>
+          </a:solidFill>
+          <a:ln>
+            <a:noFill/>
+          </a:ln>
+          <a:effectLst/>
+        </p:spPr>
+        <p:style>
+          <a:lnRef idx="1">
+            <a:schemeClr val="accent1"/>
+          </a:lnRef>
+          <a:fillRef idx="3">
+            <a:schemeClr val="accent1"/>
+          </a:fillRef>
+          <a:effectRef idx="2">
+            <a:schemeClr val="accent1"/>
+          </a:effectRef>
+          <a:fontRef idx="minor">
+            <a:schemeClr val="lt1"/>
+          </a:fontRef>
+        </p:style>
+        <p:txBody>
+          <a:bodyPr rtlCol="0" anchor="ctr"/>
+          <a:lstStyle/>
+          <a:p>
+            <a:pPr algn="ctr"/>
+          </a:p>
+        </p:txBody>
+      </p:sp>
+      <p:sp>
+        <p:nvSpPr>
+          <p:cNvPr id="7" name="TextBox 6"/>
+          <p:cNvSpPr txBox="1"/>
+          <p:nvPr/>
+        </p:nvSpPr>
+        <p:spPr>
+          <a:xfrm>
+            <a:off x="365760" y="6583680"/>
+            <a:ext cx="11430000" cy="274320"/>
+          </a:xfrm>
+          <a:prstGeom prst="rect">
+            <a:avLst/>
+          </a:prstGeom>
+          <a:noFill/>
+          <a:ln>
+            <a:noFill/>
+          </a:ln>
+        </p:spPr>
+        <p:txBody>
+          <a:bodyPr wrap="square" lIns="73152" rIns="73152" tIns="36576" bIns="36576" anchor="ctr">
+            <a:spAutoFit/>
+          </a:bodyPr>
+          <a:lstStyle/>
+          <a:p>
+            <a:pPr algn="l">
+              <a:spcAft>
+                <a:spcPts val="200"/>
+              </a:spcAft>
+            </a:pPr>
+            <a:r>
+              <a:rPr sz="1000" b="0">
+                <a:solidFill>
+                  <a:srgbClr val="595959"/>
+                </a:solidFill>
+                <a:latin typeface="IPAGothic"/>
+                <a:eastAsia typeface="IPAGothic"/>
+              </a:rPr>
+              <a:t>補論 ― 「AAC」「CCA」評価をどう考えるか</a:t>
+            </a:r>
+          </a:p>
+        </p:txBody>
+      </p:sp>
+      <p:sp>
+        <p:nvSpPr>
+          <p:cNvPr id="8" name="Rectangle 7"/>
+          <p:cNvSpPr/>
+          <p:nvPr/>
+        </p:nvSpPr>
+        <p:spPr>
+          <a:xfrm>
+            <a:off x="457200" y="960120"/>
+            <a:ext cx="11274552" cy="566928"/>
+          </a:xfrm>
+          <a:prstGeom prst="rect">
+            <a:avLst/>
+          </a:prstGeom>
+          <a:solidFill>
+            <a:srgbClr val="2E5C8A"/>
+          </a:solidFill>
+          <a:ln>
+            <a:noFill/>
+          </a:ln>
+          <a:effectLst/>
+        </p:spPr>
+        <p:style>
+          <a:lnRef idx="1">
+            <a:schemeClr val="accent1"/>
+          </a:lnRef>
+          <a:fillRef idx="3">
+            <a:schemeClr val="accent1"/>
+          </a:fillRef>
+          <a:effectRef idx="2">
+            <a:schemeClr val="accent1"/>
+          </a:effectRef>
+          <a:fontRef idx="minor">
+            <a:schemeClr val="lt1"/>
+          </a:fontRef>
+        </p:style>
+        <p:txBody>
+          <a:bodyPr rtlCol="0" anchor="ctr" wrap="square" tIns="36576" bIns="36576"/>
+          <a:lstStyle/>
+          <a:p>
+            <a:pPr algn="ctr">
+              <a:spcAft>
+                <a:spcPts val="200"/>
+              </a:spcAft>
+            </a:pPr>
+            <a:r>
+              <a:rPr sz="1500" b="1">
+                <a:solidFill>
+                  <a:srgbClr val="FFFFFF"/>
+                </a:solidFill>
+                <a:latin typeface="IPAGothic"/>
+                <a:eastAsia typeface="IPAGothic"/>
+              </a:rPr>
+              <a:t>次期学習指導要領に向けた最新の方針 ― 皆さんの違和感は制度的にも正しかった</a:t>
+            </a:r>
+          </a:p>
+        </p:txBody>
+      </p:sp>
+      <p:sp>
+        <p:nvSpPr>
+          <p:cNvPr id="9" name="Rectangle 8"/>
+          <p:cNvSpPr/>
+          <p:nvPr/>
+        </p:nvSpPr>
+        <p:spPr>
+          <a:xfrm>
+            <a:off x="457200" y="1783080"/>
+            <a:ext cx="2331720" cy="1371600"/>
+          </a:xfrm>
+          <a:prstGeom prst="rect">
+            <a:avLst/>
+          </a:prstGeom>
+          <a:solidFill>
+            <a:srgbClr val="1F3A5F"/>
+          </a:solidFill>
+          <a:ln>
+            <a:noFill/>
+          </a:ln>
+          <a:effectLst/>
+        </p:spPr>
+        <p:style>
+          <a:lnRef idx="1">
+            <a:schemeClr val="accent1"/>
+          </a:lnRef>
+          <a:fillRef idx="3">
+            <a:schemeClr val="accent1"/>
+          </a:fillRef>
+          <a:effectRef idx="2">
+            <a:schemeClr val="accent1"/>
+          </a:effectRef>
+          <a:fontRef idx="minor">
+            <a:schemeClr val="lt1"/>
+          </a:fontRef>
+        </p:style>
+        <p:txBody>
+          <a:bodyPr rtlCol="0" anchor="ctr" wrap="square" tIns="36576" bIns="36576"/>
+          <a:lstStyle/>
+          <a:p>
+            <a:pPr algn="ctr">
+              <a:spcAft>
+                <a:spcPts val="200"/>
+              </a:spcAft>
+            </a:pPr>
+            <a:r>
+              <a:rPr sz="1800" b="1">
+                <a:solidFill>
+                  <a:srgbClr val="FFFFFF"/>
+                </a:solidFill>
+                <a:latin typeface="IPAGothic"/>
+                <a:eastAsia typeface="IPAGothic"/>
+              </a:rPr>
+              <a:t>2025年</a:t>
+            </a:r>
+          </a:p>
+          <a:p>
+            <a:pPr algn="ctr">
+              <a:spcAft>
+                <a:spcPts val="200"/>
+              </a:spcAft>
+            </a:pPr>
+            <a:r>
+              <a:rPr sz="1800" b="1">
+                <a:solidFill>
+                  <a:srgbClr val="FFFFFF"/>
+                </a:solidFill>
+                <a:latin typeface="IPAGothic"/>
+                <a:eastAsia typeface="IPAGothic"/>
+              </a:rPr>
+              <a:t>7月4日</a:t>
+            </a:r>
+          </a:p>
+        </p:txBody>
+      </p:sp>
+      <p:sp>
+        <p:nvSpPr>
+          <p:cNvPr id="10" name="Rectangle 9"/>
+          <p:cNvSpPr/>
+          <p:nvPr/>
+        </p:nvSpPr>
+        <p:spPr>
+          <a:xfrm>
+            <a:off x="2788920" y="1783080"/>
+            <a:ext cx="8759952" cy="1371600"/>
+          </a:xfrm>
+          <a:prstGeom prst="rect">
+            <a:avLst/>
+          </a:prstGeom>
+          <a:solidFill>
+            <a:srgbClr val="D6E4F0"/>
+          </a:solidFill>
+          <a:ln w="12700">
+            <a:solidFill>
+              <a:srgbClr val="1F3A5F"/>
+            </a:solidFill>
+          </a:ln>
+          <a:effectLst/>
+        </p:spPr>
+        <p:style>
+          <a:lnRef idx="1">
+            <a:schemeClr val="accent1"/>
+          </a:lnRef>
+          <a:fillRef idx="3">
+            <a:schemeClr val="accent1"/>
+          </a:fillRef>
+          <a:effectRef idx="2">
+            <a:schemeClr val="accent1"/>
+          </a:effectRef>
+          <a:fontRef idx="minor">
+            <a:schemeClr val="lt1"/>
+          </a:fontRef>
+        </p:style>
+        <p:txBody>
+          <a:bodyPr rtlCol="0" anchor="ctr" wrap="square" tIns="36576" bIns="36576"/>
+          <a:lstStyle/>
+          <a:p>
+            <a:pPr algn="l">
+              <a:spcAft>
+                <a:spcPts val="200"/>
+              </a:spcAft>
+            </a:pPr>
+            <a:r>
+              <a:rPr sz="1400" b="1">
+                <a:solidFill>
+                  <a:srgbClr val="222222"/>
+                </a:solidFill>
+                <a:latin typeface="IPAGothic"/>
+                <a:eastAsia typeface="IPAGothic"/>
+              </a:rPr>
+              <a:t>中央教育審議会 教育課程企画特別部会で方針提示:</a:t>
+            </a:r>
+          </a:p>
+          <a:p>
+            <a:pPr algn="l">
+              <a:spcAft>
+                <a:spcPts val="200"/>
+              </a:spcAft>
+            </a:pPr>
+            <a:r>
+              <a:rPr sz="1400" b="1">
+                <a:solidFill>
+                  <a:srgbClr val="222222"/>
+                </a:solidFill>
+                <a:latin typeface="IPAGothic"/>
+                <a:eastAsia typeface="IPAGothic"/>
+              </a:rPr>
+              <a:t>「主体的に学習に取り組む態度」(学びに向かう力・人間性等)を</a:t>
+            </a:r>
+          </a:p>
+          <a:p>
+            <a:pPr algn="l">
+              <a:spcAft>
+                <a:spcPts val="200"/>
+              </a:spcAft>
+            </a:pPr>
+            <a:r>
+              <a:rPr sz="1400" b="1">
+                <a:solidFill>
+                  <a:srgbClr val="222222"/>
+                </a:solidFill>
+                <a:latin typeface="IPAGothic"/>
+                <a:eastAsia typeface="IPAGothic"/>
+              </a:rPr>
+              <a:t>評定(A/B/C の目標準拠評価)から外し、教育課程全体を通じた 個人内評価 とする(2030年度以降の次期指導要領に向け検討)</a:t>
+            </a:r>
+          </a:p>
+        </p:txBody>
+      </p:sp>
+      <p:sp>
+        <p:nvSpPr>
+          <p:cNvPr id="11" name="Rectangle 10"/>
+          <p:cNvSpPr/>
+          <p:nvPr/>
+        </p:nvSpPr>
+        <p:spPr>
+          <a:xfrm>
+            <a:off x="457200" y="3337560"/>
+            <a:ext cx="11091672" cy="411480"/>
+          </a:xfrm>
+          <a:prstGeom prst="rect">
+            <a:avLst/>
+          </a:prstGeom>
+          <a:solidFill>
+            <a:srgbClr val="C45A11"/>
+          </a:solidFill>
+          <a:ln>
+            <a:noFill/>
+          </a:ln>
+          <a:effectLst/>
+        </p:spPr>
+        <p:style>
+          <a:lnRef idx="1">
+            <a:schemeClr val="accent1"/>
+          </a:lnRef>
+          <a:fillRef idx="3">
+            <a:schemeClr val="accent1"/>
+          </a:fillRef>
+          <a:effectRef idx="2">
+            <a:schemeClr val="accent1"/>
+          </a:effectRef>
+          <a:fontRef idx="minor">
+            <a:schemeClr val="lt1"/>
+          </a:fontRef>
+        </p:style>
+        <p:txBody>
+          <a:bodyPr rtlCol="0" anchor="ctr" wrap="square" tIns="36576" bIns="36576"/>
+          <a:lstStyle/>
+          <a:p>
+            <a:pPr algn="l">
+              <a:spcAft>
+                <a:spcPts val="200"/>
+              </a:spcAft>
+            </a:pPr>
+            <a:r>
+              <a:rPr sz="1400" b="1">
+                <a:solidFill>
+                  <a:srgbClr val="FFFFFF"/>
+                </a:solidFill>
+                <a:latin typeface="IPAGothic"/>
+                <a:eastAsia typeface="IPAGothic"/>
+              </a:rPr>
+              <a:t>国自身が挙げた理由 ― まさに AAC・CCA 問題と地続き</a:t>
+            </a:r>
+          </a:p>
+        </p:txBody>
+      </p:sp>
+      <p:sp>
+        <p:nvSpPr>
+          <p:cNvPr id="12" name="Rectangle 11"/>
+          <p:cNvSpPr/>
+          <p:nvPr/>
+        </p:nvSpPr>
+        <p:spPr>
+          <a:xfrm>
+            <a:off x="457200" y="3749039"/>
+            <a:ext cx="11091672" cy="1371600"/>
+          </a:xfrm>
+          <a:prstGeom prst="rect">
+            <a:avLst/>
+          </a:prstGeom>
+          <a:solidFill>
+            <a:srgbClr val="FBE5D6"/>
+          </a:solidFill>
+          <a:ln w="12700">
+            <a:solidFill>
+              <a:srgbClr val="C45A11"/>
+            </a:solidFill>
+          </a:ln>
+          <a:effectLst/>
+        </p:spPr>
+        <p:style>
+          <a:lnRef idx="1">
+            <a:schemeClr val="accent1"/>
+          </a:lnRef>
+          <a:fillRef idx="3">
+            <a:schemeClr val="accent1"/>
+          </a:fillRef>
+          <a:effectRef idx="2">
+            <a:schemeClr val="accent1"/>
+          </a:effectRef>
+          <a:fontRef idx="minor">
+            <a:schemeClr val="lt1"/>
+          </a:fontRef>
+        </p:style>
+        <p:txBody>
+          <a:bodyPr rtlCol="0" anchor="ctr"/>
+          <a:lstStyle/>
+          <a:p>
+            <a:pPr algn="ctr"/>
+          </a:p>
+        </p:txBody>
+      </p:sp>
+      <p:sp>
+        <p:nvSpPr>
+          <p:cNvPr id="13" name="TextBox 12"/>
+          <p:cNvSpPr txBox="1"/>
+          <p:nvPr/>
+        </p:nvSpPr>
+        <p:spPr>
+          <a:xfrm>
+            <a:off x="731520" y="3886200"/>
+            <a:ext cx="10515600" cy="384048"/>
+          </a:xfrm>
+          <a:prstGeom prst="rect">
+            <a:avLst/>
+          </a:prstGeom>
+          <a:noFill/>
+          <a:ln>
+            <a:noFill/>
+          </a:ln>
+        </p:spPr>
+        <p:txBody>
+          <a:bodyPr wrap="square" lIns="73152" rIns="73152" tIns="36576" bIns="36576" anchor="ctr">
+            <a:spAutoFit/>
+          </a:bodyPr>
+          <a:lstStyle/>
+          <a:p>
+            <a:pPr algn="l">
+              <a:spcAft>
+                <a:spcPts val="200"/>
+              </a:spcAft>
+            </a:pPr>
+            <a:r>
+              <a:rPr sz="1400" b="0">
+                <a:solidFill>
+                  <a:srgbClr val="222222"/>
+                </a:solidFill>
+                <a:latin typeface="IPAGothic"/>
+                <a:eastAsia typeface="IPAGothic"/>
+              </a:rPr>
+              <a:t>・提出物など“形式的な勤勉さ”で測られてしまう</a:t>
+            </a:r>
+          </a:p>
+        </p:txBody>
+      </p:sp>
+      <p:sp>
+        <p:nvSpPr>
+          <p:cNvPr id="14" name="TextBox 13"/>
+          <p:cNvSpPr txBox="1"/>
+          <p:nvPr/>
+        </p:nvSpPr>
+        <p:spPr>
+          <a:xfrm>
+            <a:off x="731520" y="4297680"/>
+            <a:ext cx="10515600" cy="384048"/>
+          </a:xfrm>
+          <a:prstGeom prst="rect">
+            <a:avLst/>
+          </a:prstGeom>
+          <a:noFill/>
+          <a:ln>
+            <a:noFill/>
+          </a:ln>
+        </p:spPr>
+        <p:txBody>
+          <a:bodyPr wrap="square" lIns="73152" rIns="73152" tIns="36576" bIns="36576" anchor="ctr">
+            <a:spAutoFit/>
+          </a:bodyPr>
+          <a:lstStyle/>
+          <a:p>
+            <a:pPr algn="l">
+              <a:spcAft>
+                <a:spcPts val="200"/>
+              </a:spcAft>
+            </a:pPr>
+            <a:r>
+              <a:rPr sz="1400" b="0">
+                <a:solidFill>
+                  <a:srgbClr val="222222"/>
+                </a:solidFill>
+                <a:latin typeface="IPAGothic"/>
+                <a:eastAsia typeface="IPAGothic"/>
+              </a:rPr>
+              <a:t>・教師の期待する振る舞いを、子どもが過度に意識してしまう</a:t>
+            </a:r>
+          </a:p>
+        </p:txBody>
+      </p:sp>
+      <p:sp>
+        <p:nvSpPr>
+          <p:cNvPr id="15" name="TextBox 14"/>
+          <p:cNvSpPr txBox="1"/>
+          <p:nvPr/>
+        </p:nvSpPr>
+        <p:spPr>
+          <a:xfrm>
+            <a:off x="731520" y="4709160"/>
+            <a:ext cx="10515600" cy="384048"/>
+          </a:xfrm>
+          <a:prstGeom prst="rect">
+            <a:avLst/>
+          </a:prstGeom>
+          <a:noFill/>
+          <a:ln>
+            <a:noFill/>
+          </a:ln>
+        </p:spPr>
+        <p:txBody>
+          <a:bodyPr wrap="square" lIns="73152" rIns="73152" tIns="36576" bIns="36576" anchor="ctr">
+            <a:spAutoFit/>
+          </a:bodyPr>
+          <a:lstStyle/>
+          <a:p>
+            <a:pPr algn="l">
+              <a:spcAft>
+                <a:spcPts val="200"/>
+              </a:spcAft>
+            </a:pPr>
+            <a:r>
+              <a:rPr sz="1400" b="0">
+                <a:solidFill>
+                  <a:srgbClr val="222222"/>
+                </a:solidFill>
+                <a:latin typeface="IPAGothic"/>
+                <a:eastAsia typeface="IPAGothic"/>
+              </a:rPr>
+              <a:t>・態度の評価が難しく評定が低く/付けられず、不登校児童生徒等で不利になる</a:t>
+            </a:r>
+          </a:p>
+        </p:txBody>
+      </p:sp>
+      <p:sp>
+        <p:nvSpPr>
+          <p:cNvPr id="16" name="Rectangle 15"/>
+          <p:cNvSpPr/>
+          <p:nvPr/>
+        </p:nvSpPr>
+        <p:spPr>
+          <a:xfrm>
+            <a:off x="457200" y="5303520"/>
+            <a:ext cx="11091672" cy="457200"/>
+          </a:xfrm>
+          <a:prstGeom prst="rect">
+            <a:avLst/>
+          </a:prstGeom>
+          <a:solidFill>
+            <a:srgbClr val="FFFFFF"/>
+          </a:solidFill>
+          <a:ln w="9525">
+            <a:solidFill>
+              <a:srgbClr val="595959"/>
+            </a:solidFill>
+          </a:ln>
+          <a:effectLst/>
+        </p:spPr>
+        <p:style>
+          <a:lnRef idx="1">
+            <a:schemeClr val="accent1"/>
+          </a:lnRef>
+          <a:fillRef idx="3">
+            <a:schemeClr val="accent1"/>
+          </a:fillRef>
+          <a:effectRef idx="2">
+            <a:schemeClr val="accent1"/>
+          </a:effectRef>
+          <a:fontRef idx="minor">
+            <a:schemeClr val="lt1"/>
+          </a:fontRef>
+        </p:style>
+        <p:txBody>
+          <a:bodyPr rtlCol="0" anchor="ctr" wrap="square" tIns="36576" bIns="36576"/>
+          <a:lstStyle/>
+          <a:p>
+            <a:pPr algn="ctr">
+              <a:spcAft>
+                <a:spcPts val="200"/>
+              </a:spcAft>
+            </a:pPr>
+            <a:r>
+              <a:rPr sz="1200" b="1">
+                <a:solidFill>
+                  <a:srgbClr val="1F3A5F"/>
+                </a:solidFill>
+                <a:latin typeface="IPAGothic"/>
+                <a:eastAsia typeface="IPAGothic"/>
+              </a:rPr>
+              <a:t>※ ただし現行制度では引き続き態度も観点別A/B/C対象。移行までは“診断アラーム運用”が正解。</a:t>
+            </a:r>
+          </a:p>
+        </p:txBody>
+      </p:sp>
+      <p:sp>
+        <p:nvSpPr>
+          <p:cNvPr id="17" name="Rectangle 16"/>
+          <p:cNvSpPr/>
+          <p:nvPr/>
+        </p:nvSpPr>
+        <p:spPr>
+          <a:xfrm>
+            <a:off x="457200" y="5852160"/>
+            <a:ext cx="11091672" cy="502920"/>
+          </a:xfrm>
+          <a:prstGeom prst="rect">
+            <a:avLst/>
+          </a:prstGeom>
+          <a:solidFill>
+            <a:srgbClr val="4E7A36"/>
+          </a:solidFill>
+          <a:ln>
+            <a:noFill/>
+          </a:ln>
+          <a:effectLst/>
+        </p:spPr>
+        <p:style>
+          <a:lnRef idx="1">
+            <a:schemeClr val="accent1"/>
+          </a:lnRef>
+          <a:fillRef idx="3">
+            <a:schemeClr val="accent1"/>
+          </a:fillRef>
+          <a:effectRef idx="2">
+            <a:schemeClr val="accent1"/>
+          </a:effectRef>
+          <a:fontRef idx="minor">
+            <a:schemeClr val="lt1"/>
+          </a:fontRef>
+        </p:style>
+        <p:txBody>
+          <a:bodyPr rtlCol="0" anchor="ctr" wrap="square" tIns="36576" bIns="36576"/>
+          <a:lstStyle/>
+          <a:p>
+            <a:pPr algn="ctr">
+              <a:spcAft>
+                <a:spcPts val="200"/>
+              </a:spcAft>
+            </a:pPr>
+            <a:r>
+              <a:rPr sz="1500" b="1">
+                <a:solidFill>
+                  <a:srgbClr val="FFFFFF"/>
+                </a:solidFill>
+                <a:latin typeface="IPAGothic"/>
+                <a:eastAsia typeface="IPAGothic"/>
+              </a:rPr>
+              <a:t>★「AAC・CCAに違和感がある」という現場感覚は、国の政策転換が裏づけている</a:t>
+            </a:r>
+          </a:p>
+        </p:txBody>
+      </p:sp>
+    </p:spTree>
+  </p:cSld>
+  <p:clrMapOvr>
+    <a:masterClrMapping/>
+  </p:clrMapOvr>
+</p:sld>
+</file>
+
+<file path=ppt/slides/slide21.xml><?xml version="1.0" encoding="utf-8"?>
+<p:sld xmlns:a="http://schemas.openxmlformats.org/drawingml/2006/main" xmlns:p="http://schemas.openxmlformats.org/presentationml/2006/main" xmlns:r="http://schemas.openxmlformats.org/officeDocument/2006/relationships">
+  <p:cSld>
+    <p:spTree>
+      <p:nvGrpSpPr>
+        <p:cNvPr id="1" name=""/>
+        <p:cNvGrpSpPr/>
+        <p:nvPr/>
+      </p:nvGrpSpPr>
+      <p:grpSpPr/>
+      <p:sp>
+        <p:nvSpPr>
+          <p:cNvPr id="2" name="Rectangle 1"/>
+          <p:cNvSpPr/>
+          <p:nvPr/>
+        </p:nvSpPr>
+        <p:spPr>
+          <a:xfrm>
+            <a:off x="0" y="0"/>
+            <a:ext cx="12191695" cy="777240"/>
+          </a:xfrm>
+          <a:prstGeom prst="rect">
+            <a:avLst/>
+          </a:prstGeom>
+          <a:solidFill>
+            <a:srgbClr val="1F3A5F"/>
+          </a:solidFill>
+          <a:ln>
+            <a:noFill/>
+          </a:ln>
+          <a:effectLst/>
+        </p:spPr>
+        <p:style>
+          <a:lnRef idx="1">
+            <a:schemeClr val="accent1"/>
+          </a:lnRef>
+          <a:fillRef idx="3">
+            <a:schemeClr val="accent1"/>
+          </a:fillRef>
+          <a:effectRef idx="2">
+            <a:schemeClr val="accent1"/>
+          </a:effectRef>
+          <a:fontRef idx="minor">
+            <a:schemeClr val="lt1"/>
+          </a:fontRef>
+        </p:style>
+        <p:txBody>
+          <a:bodyPr rtlCol="0" anchor="ctr"/>
+          <a:lstStyle/>
+          <a:p>
+            <a:pPr algn="ctr"/>
+          </a:p>
+        </p:txBody>
+      </p:sp>
+      <p:sp>
+        <p:nvSpPr>
+          <p:cNvPr id="3" name="Rectangle 2"/>
+          <p:cNvSpPr/>
+          <p:nvPr/>
+        </p:nvSpPr>
+        <p:spPr>
+          <a:xfrm>
+            <a:off x="0" y="777240"/>
+            <a:ext cx="12191695" cy="54864"/>
+          </a:xfrm>
+          <a:prstGeom prst="rect">
+            <a:avLst/>
+          </a:prstGeom>
+          <a:solidFill>
+            <a:srgbClr val="C45A11"/>
+          </a:solidFill>
+          <a:ln>
+            <a:noFill/>
+          </a:ln>
+          <a:effectLst/>
+        </p:spPr>
+        <p:style>
+          <a:lnRef idx="1">
+            <a:schemeClr val="accent1"/>
+          </a:lnRef>
+          <a:fillRef idx="3">
+            <a:schemeClr val="accent1"/>
+          </a:fillRef>
+          <a:effectRef idx="2">
+            <a:schemeClr val="accent1"/>
+          </a:effectRef>
+          <a:fontRef idx="minor">
+            <a:schemeClr val="lt1"/>
+          </a:fontRef>
+        </p:style>
+        <p:txBody>
+          <a:bodyPr rtlCol="0" anchor="ctr"/>
+          <a:lstStyle/>
+          <a:p>
+            <a:pPr algn="ctr"/>
+          </a:p>
+        </p:txBody>
+      </p:sp>
+      <p:sp>
+        <p:nvSpPr>
+          <p:cNvPr id="4" name="TextBox 3"/>
+          <p:cNvSpPr txBox="1"/>
+          <p:nvPr/>
+        </p:nvSpPr>
+        <p:spPr>
+          <a:xfrm>
+            <a:off x="365760" y="73152"/>
+            <a:ext cx="10424160" cy="658368"/>
+          </a:xfrm>
+          <a:prstGeom prst="rect">
+            <a:avLst/>
+          </a:prstGeom>
+          <a:noFill/>
+          <a:ln>
+            <a:noFill/>
+          </a:ln>
+        </p:spPr>
+        <p:txBody>
+          <a:bodyPr wrap="square" lIns="73152" rIns="73152" tIns="36576" bIns="36576" anchor="ctr">
+            <a:spAutoFit/>
+          </a:bodyPr>
+          <a:lstStyle/>
+          <a:p>
+            <a:pPr algn="l">
+              <a:spcAft>
+                <a:spcPts val="200"/>
+              </a:spcAft>
+            </a:pPr>
+            <a:r>
+              <a:rPr sz="2200" b="1">
+                <a:solidFill>
+                  <a:srgbClr val="FFFFFF"/>
+                </a:solidFill>
+                <a:latin typeface="IPAGothic"/>
+                <a:eastAsia typeface="IPAGothic"/>
+              </a:rPr>
+              <a:t>補論⑧ まとめと出典</a:t>
+            </a:r>
+          </a:p>
+        </p:txBody>
+      </p:sp>
+      <p:sp>
+        <p:nvSpPr>
+          <p:cNvPr id="5" name="TextBox 4"/>
+          <p:cNvSpPr txBox="1"/>
+          <p:nvPr/>
+        </p:nvSpPr>
+        <p:spPr>
+          <a:xfrm>
+            <a:off x="10881360" y="73152"/>
+            <a:ext cx="1188720" cy="658368"/>
+          </a:xfrm>
+          <a:prstGeom prst="rect">
+            <a:avLst/>
+          </a:prstGeom>
+          <a:noFill/>
+          <a:ln>
+            <a:noFill/>
+          </a:ln>
+        </p:spPr>
+        <p:txBody>
+          <a:bodyPr wrap="square" lIns="73152" rIns="73152" tIns="36576" bIns="36576" anchor="ctr">
+            <a:spAutoFit/>
+          </a:bodyPr>
+          <a:lstStyle/>
+          <a:p>
+            <a:pPr algn="r">
+              <a:spcAft>
+                <a:spcPts val="200"/>
+              </a:spcAft>
+            </a:pPr>
+            <a:r>
+              <a:rPr sz="1200" b="0">
+                <a:solidFill>
+                  <a:srgbClr val="FFFFFF"/>
+                </a:solidFill>
+                <a:latin typeface="IPAGothic"/>
+                <a:eastAsia typeface="IPAGothic"/>
+              </a:rPr>
+              <a:t>補論 8 / 8</a:t>
+            </a:r>
+          </a:p>
+        </p:txBody>
+      </p:sp>
+      <p:sp>
+        <p:nvSpPr>
+          <p:cNvPr id="6" name="Rectangle 5"/>
+          <p:cNvSpPr/>
+          <p:nvPr/>
+        </p:nvSpPr>
+        <p:spPr>
+          <a:xfrm>
+            <a:off x="0" y="6583680"/>
+            <a:ext cx="12191695" cy="274320"/>
+          </a:xfrm>
+          <a:prstGeom prst="rect">
+            <a:avLst/>
+          </a:prstGeom>
+          <a:solidFill>
+            <a:srgbClr val="F2F2F2"/>
+          </a:solidFill>
+          <a:ln>
+            <a:noFill/>
+          </a:ln>
+          <a:effectLst/>
+        </p:spPr>
+        <p:style>
+          <a:lnRef idx="1">
+            <a:schemeClr val="accent1"/>
+          </a:lnRef>
+          <a:fillRef idx="3">
+            <a:schemeClr val="accent1"/>
+          </a:fillRef>
+          <a:effectRef idx="2">
+            <a:schemeClr val="accent1"/>
+          </a:effectRef>
+          <a:fontRef idx="minor">
+            <a:schemeClr val="lt1"/>
+          </a:fontRef>
+        </p:style>
+        <p:txBody>
+          <a:bodyPr rtlCol="0" anchor="ctr"/>
+          <a:lstStyle/>
+          <a:p>
+            <a:pPr algn="ctr"/>
+          </a:p>
+        </p:txBody>
+      </p:sp>
+      <p:sp>
+        <p:nvSpPr>
+          <p:cNvPr id="7" name="TextBox 6"/>
+          <p:cNvSpPr txBox="1"/>
+          <p:nvPr/>
+        </p:nvSpPr>
+        <p:spPr>
+          <a:xfrm>
+            <a:off x="365760" y="6583680"/>
+            <a:ext cx="11430000" cy="274320"/>
+          </a:xfrm>
+          <a:prstGeom prst="rect">
+            <a:avLst/>
+          </a:prstGeom>
+          <a:noFill/>
+          <a:ln>
+            <a:noFill/>
+          </a:ln>
+        </p:spPr>
+        <p:txBody>
+          <a:bodyPr wrap="square" lIns="73152" rIns="73152" tIns="36576" bIns="36576" anchor="ctr">
+            <a:spAutoFit/>
+          </a:bodyPr>
+          <a:lstStyle/>
+          <a:p>
+            <a:pPr algn="l">
+              <a:spcAft>
+                <a:spcPts val="200"/>
+              </a:spcAft>
+            </a:pPr>
+            <a:r>
+              <a:rPr sz="1000" b="0">
+                <a:solidFill>
+                  <a:srgbClr val="595959"/>
+                </a:solidFill>
+                <a:latin typeface="IPAGothic"/>
+                <a:eastAsia typeface="IPAGothic"/>
+              </a:rPr>
+              <a:t>補論 ― 「AAC」「CCA」評価をどう考えるか</a:t>
+            </a:r>
+          </a:p>
+        </p:txBody>
+      </p:sp>
+      <p:sp>
+        <p:nvSpPr>
+          <p:cNvPr id="8" name="Rectangle 7"/>
+          <p:cNvSpPr/>
+          <p:nvPr/>
+        </p:nvSpPr>
+        <p:spPr>
+          <a:xfrm>
+            <a:off x="457200" y="960120"/>
+            <a:ext cx="11274552" cy="566928"/>
+          </a:xfrm>
+          <a:prstGeom prst="rect">
+            <a:avLst/>
+          </a:prstGeom>
+          <a:solidFill>
+            <a:srgbClr val="2E5C8A"/>
+          </a:solidFill>
+          <a:ln>
+            <a:noFill/>
+          </a:ln>
+          <a:effectLst/>
+        </p:spPr>
+        <p:style>
+          <a:lnRef idx="1">
+            <a:schemeClr val="accent1"/>
+          </a:lnRef>
+          <a:fillRef idx="3">
+            <a:schemeClr val="accent1"/>
+          </a:fillRef>
+          <a:effectRef idx="2">
+            <a:schemeClr val="accent1"/>
+          </a:effectRef>
+          <a:fontRef idx="minor">
+            <a:schemeClr val="lt1"/>
+          </a:fontRef>
+        </p:style>
+        <p:txBody>
+          <a:bodyPr rtlCol="0" anchor="ctr" wrap="square" tIns="36576" bIns="36576"/>
+          <a:lstStyle/>
+          <a:p>
+            <a:pPr algn="ctr">
+              <a:spcAft>
+                <a:spcPts val="200"/>
+              </a:spcAft>
+            </a:pPr>
+            <a:r>
+              <a:rPr sz="1500" b="1">
+                <a:solidFill>
+                  <a:srgbClr val="FFFFFF"/>
+                </a:solidFill>
+                <a:latin typeface="IPAGothic"/>
+                <a:eastAsia typeface="IPAGothic"/>
+              </a:rPr>
+              <a:t>先生方に返す“3つの要点”</a:t>
+            </a:r>
+          </a:p>
+        </p:txBody>
+      </p:sp>
+      <p:sp>
+        <p:nvSpPr>
+          <p:cNvPr id="9" name="Oval 8"/>
+          <p:cNvSpPr/>
+          <p:nvPr/>
+        </p:nvSpPr>
+        <p:spPr>
+          <a:xfrm>
+            <a:off x="457200" y="1737360"/>
+            <a:ext cx="731520" cy="868680"/>
+          </a:xfrm>
+          <a:prstGeom prst="ellipse">
+            <a:avLst/>
+          </a:prstGeom>
+          <a:solidFill>
+            <a:srgbClr val="1F3A5F"/>
+          </a:solidFill>
+          <a:ln>
+            <a:noFill/>
+          </a:ln>
+          <a:effectLst/>
+        </p:spPr>
+        <p:style>
+          <a:lnRef idx="1">
+            <a:schemeClr val="accent1"/>
+          </a:lnRef>
+          <a:fillRef idx="3">
+            <a:schemeClr val="accent1"/>
+          </a:fillRef>
+          <a:effectRef idx="2">
+            <a:schemeClr val="accent1"/>
+          </a:effectRef>
+          <a:fontRef idx="minor">
+            <a:schemeClr val="lt1"/>
+          </a:fontRef>
+        </p:style>
+        <p:txBody>
+          <a:bodyPr rtlCol="0" anchor="ctr" wrap="square" tIns="36576" bIns="36576"/>
+          <a:lstStyle/>
+          <a:p>
+            <a:pPr algn="ctr">
+              <a:spcAft>
+                <a:spcPts val="200"/>
+              </a:spcAft>
+            </a:pPr>
+            <a:r>
+              <a:rPr sz="2400" b="1">
+                <a:solidFill>
+                  <a:srgbClr val="FFFFFF"/>
+                </a:solidFill>
+                <a:latin typeface="IPAGothic"/>
+                <a:eastAsia typeface="IPAGothic"/>
+              </a:rPr>
+              <a:t>1</a:t>
+            </a:r>
+          </a:p>
+        </p:txBody>
+      </p:sp>
+      <p:sp>
+        <p:nvSpPr>
+          <p:cNvPr id="10" name="Rectangle 9"/>
+          <p:cNvSpPr/>
+          <p:nvPr/>
+        </p:nvSpPr>
+        <p:spPr>
+          <a:xfrm>
+            <a:off x="1325880" y="1737360"/>
+            <a:ext cx="3200400" cy="868680"/>
+          </a:xfrm>
+          <a:prstGeom prst="rect">
+            <a:avLst/>
+          </a:prstGeom>
+          <a:solidFill>
+            <a:srgbClr val="2E5C8A"/>
+          </a:solidFill>
+          <a:ln>
+            <a:noFill/>
+          </a:ln>
+          <a:effectLst/>
+        </p:spPr>
+        <p:style>
+          <a:lnRef idx="1">
+            <a:schemeClr val="accent1"/>
+          </a:lnRef>
+          <a:fillRef idx="3">
+            <a:schemeClr val="accent1"/>
+          </a:fillRef>
+          <a:effectRef idx="2">
+            <a:schemeClr val="accent1"/>
+          </a:effectRef>
+          <a:fontRef idx="minor">
+            <a:schemeClr val="lt1"/>
+          </a:fontRef>
+        </p:style>
+        <p:txBody>
+          <a:bodyPr rtlCol="0" anchor="ctr" wrap="square" tIns="36576" bIns="36576"/>
+          <a:lstStyle/>
+          <a:p>
+            <a:pPr algn="ctr">
+              <a:spcAft>
+                <a:spcPts val="200"/>
+              </a:spcAft>
+            </a:pPr>
+            <a:r>
+              <a:rPr sz="1400" b="1">
+                <a:solidFill>
+                  <a:srgbClr val="FFFFFF"/>
+                </a:solidFill>
+                <a:latin typeface="IPAGothic"/>
+                <a:eastAsia typeface="IPAGothic"/>
+              </a:rPr>
+              <a:t>「ありえない」＝禁止ではない</a:t>
+            </a:r>
+          </a:p>
+        </p:txBody>
+      </p:sp>
+      <p:sp>
+        <p:nvSpPr>
+          <p:cNvPr id="11" name="Rectangle 10"/>
+          <p:cNvSpPr/>
+          <p:nvPr/>
+        </p:nvSpPr>
+        <p:spPr>
+          <a:xfrm>
+            <a:off x="4617720" y="1737360"/>
+            <a:ext cx="6931152" cy="868680"/>
+          </a:xfrm>
+          <a:prstGeom prst="rect">
+            <a:avLst/>
+          </a:prstGeom>
+          <a:solidFill>
+            <a:srgbClr val="F2F2F2"/>
+          </a:solidFill>
+          <a:ln w="6350">
+            <a:solidFill>
+              <a:srgbClr val="595959"/>
+            </a:solidFill>
+          </a:ln>
+          <a:effectLst/>
+        </p:spPr>
+        <p:style>
+          <a:lnRef idx="1">
+            <a:schemeClr val="accent1"/>
+          </a:lnRef>
+          <a:fillRef idx="3">
+            <a:schemeClr val="accent1"/>
+          </a:fillRef>
+          <a:effectRef idx="2">
+            <a:schemeClr val="accent1"/>
+          </a:effectRef>
+          <a:fontRef idx="minor">
+            <a:schemeClr val="lt1"/>
+          </a:fontRef>
+        </p:style>
+        <p:txBody>
+          <a:bodyPr rtlCol="0" anchor="ctr" wrap="square" tIns="36576" bIns="36576"/>
+          <a:lstStyle/>
+          <a:p>
+            <a:pPr algn="l">
+              <a:spcAft>
+                <a:spcPts val="200"/>
+              </a:spcAft>
+            </a:pPr>
+            <a:r>
+              <a:rPr sz="1300" b="0">
+                <a:solidFill>
+                  <a:srgbClr val="222222"/>
+                </a:solidFill>
+                <a:latin typeface="IPAGothic"/>
+                <a:eastAsia typeface="IPAGothic"/>
+              </a:rPr>
+              <a:t>総括でAAC・CCAが出たら、評価方法か指導が機能していない “診断アラーム” と捉え点検する。</a:t>
+            </a:r>
+          </a:p>
+        </p:txBody>
+      </p:sp>
+      <p:sp>
+        <p:nvSpPr>
+          <p:cNvPr id="12" name="Oval 11"/>
+          <p:cNvSpPr/>
+          <p:nvPr/>
+        </p:nvSpPr>
+        <p:spPr>
+          <a:xfrm>
+            <a:off x="457200" y="2697480"/>
+            <a:ext cx="731520" cy="868680"/>
+          </a:xfrm>
+          <a:prstGeom prst="ellipse">
+            <a:avLst/>
+          </a:prstGeom>
+          <a:solidFill>
+            <a:srgbClr val="1F3A5F"/>
+          </a:solidFill>
+          <a:ln>
+            <a:noFill/>
+          </a:ln>
+          <a:effectLst/>
+        </p:spPr>
+        <p:style>
+          <a:lnRef idx="1">
+            <a:schemeClr val="accent1"/>
+          </a:lnRef>
+          <a:fillRef idx="3">
+            <a:schemeClr val="accent1"/>
+          </a:fillRef>
+          <a:effectRef idx="2">
+            <a:schemeClr val="accent1"/>
+          </a:effectRef>
+          <a:fontRef idx="minor">
+            <a:schemeClr val="lt1"/>
+          </a:fontRef>
+        </p:style>
+        <p:txBody>
+          <a:bodyPr rtlCol="0" anchor="ctr" wrap="square" tIns="36576" bIns="36576"/>
+          <a:lstStyle/>
+          <a:p>
+            <a:pPr algn="ctr">
+              <a:spcAft>
+                <a:spcPts val="200"/>
+              </a:spcAft>
+            </a:pPr>
+            <a:r>
+              <a:rPr sz="2400" b="1">
+                <a:solidFill>
+                  <a:srgbClr val="FFFFFF"/>
+                </a:solidFill>
+                <a:latin typeface="IPAGothic"/>
+                <a:eastAsia typeface="IPAGothic"/>
+              </a:rPr>
+              <a:t>2</a:t>
+            </a:r>
+          </a:p>
+        </p:txBody>
+      </p:sp>
+      <p:sp>
+        <p:nvSpPr>
+          <p:cNvPr id="13" name="Rectangle 12"/>
+          <p:cNvSpPr/>
+          <p:nvPr/>
+        </p:nvSpPr>
+        <p:spPr>
+          <a:xfrm>
+            <a:off x="1325880" y="2697480"/>
+            <a:ext cx="3200400" cy="868680"/>
+          </a:xfrm>
+          <a:prstGeom prst="rect">
+            <a:avLst/>
+          </a:prstGeom>
+          <a:solidFill>
+            <a:srgbClr val="2E5C8A"/>
+          </a:solidFill>
+          <a:ln>
+            <a:noFill/>
+          </a:ln>
+          <a:effectLst/>
+        </p:spPr>
+        <p:style>
+          <a:lnRef idx="1">
+            <a:schemeClr val="accent1"/>
+          </a:lnRef>
+          <a:fillRef idx="3">
+            <a:schemeClr val="accent1"/>
+          </a:fillRef>
+          <a:effectRef idx="2">
+            <a:schemeClr val="accent1"/>
+          </a:effectRef>
+          <a:fontRef idx="minor">
+            <a:schemeClr val="lt1"/>
+          </a:fontRef>
+        </p:style>
+        <p:txBody>
+          <a:bodyPr rtlCol="0" anchor="ctr" wrap="square" tIns="36576" bIns="36576"/>
+          <a:lstStyle/>
+          <a:p>
+            <a:pPr algn="ctr">
+              <a:spcAft>
+                <a:spcPts val="200"/>
+              </a:spcAft>
+            </a:pPr>
+            <a:r>
+              <a:rPr sz="1400" b="1">
+                <a:solidFill>
+                  <a:srgbClr val="FFFFFF"/>
+                </a:solidFill>
+                <a:latin typeface="IPAGothic"/>
+                <a:eastAsia typeface="IPAGothic"/>
+              </a:rPr>
+              <a:t>態度は“別の物差し”ではない</a:t>
+            </a:r>
+          </a:p>
+        </p:txBody>
+      </p:sp>
+      <p:sp>
+        <p:nvSpPr>
+          <p:cNvPr id="14" name="Rectangle 13"/>
+          <p:cNvSpPr/>
+          <p:nvPr/>
+        </p:nvSpPr>
+        <p:spPr>
+          <a:xfrm>
+            <a:off x="4617720" y="2697480"/>
+            <a:ext cx="6931152" cy="868680"/>
+          </a:xfrm>
+          <a:prstGeom prst="rect">
+            <a:avLst/>
+          </a:prstGeom>
+          <a:solidFill>
+            <a:srgbClr val="F2F2F2"/>
+          </a:solidFill>
+          <a:ln w="6350">
+            <a:solidFill>
+              <a:srgbClr val="595959"/>
+            </a:solidFill>
+          </a:ln>
+          <a:effectLst/>
+        </p:spPr>
+        <p:style>
+          <a:lnRef idx="1">
+            <a:schemeClr val="accent1"/>
+          </a:lnRef>
+          <a:fillRef idx="3">
+            <a:schemeClr val="accent1"/>
+          </a:fillRef>
+          <a:effectRef idx="2">
+            <a:schemeClr val="accent1"/>
+          </a:effectRef>
+          <a:fontRef idx="minor">
+            <a:schemeClr val="lt1"/>
+          </a:fontRef>
+        </p:style>
+        <p:txBody>
+          <a:bodyPr rtlCol="0" anchor="ctr" wrap="square" tIns="36576" bIns="36576"/>
+          <a:lstStyle/>
+          <a:p>
+            <a:pPr algn="l">
+              <a:spcAft>
+                <a:spcPts val="200"/>
+              </a:spcAft>
+            </a:pPr>
+            <a:r>
+              <a:rPr sz="1300" b="0">
+                <a:solidFill>
+                  <a:srgbClr val="222222"/>
+                </a:solidFill>
+                <a:latin typeface="IPAGothic"/>
+                <a:eastAsia typeface="IPAGothic"/>
+              </a:rPr>
+              <a:t>知識・思考を生み出す同じ学びの意思的側面(粘り強さ・自己調整)。極端なズレは“形式・性格面で測っている”サイン。</a:t>
+            </a:r>
+          </a:p>
+        </p:txBody>
+      </p:sp>
+      <p:sp>
+        <p:nvSpPr>
+          <p:cNvPr id="15" name="Oval 14"/>
+          <p:cNvSpPr/>
+          <p:nvPr/>
+        </p:nvSpPr>
+        <p:spPr>
+          <a:xfrm>
+            <a:off x="457200" y="3657600"/>
+            <a:ext cx="731520" cy="868680"/>
+          </a:xfrm>
+          <a:prstGeom prst="ellipse">
+            <a:avLst/>
+          </a:prstGeom>
+          <a:solidFill>
+            <a:srgbClr val="1F3A5F"/>
+          </a:solidFill>
+          <a:ln>
+            <a:noFill/>
+          </a:ln>
+          <a:effectLst/>
+        </p:spPr>
+        <p:style>
+          <a:lnRef idx="1">
+            <a:schemeClr val="accent1"/>
+          </a:lnRef>
+          <a:fillRef idx="3">
+            <a:schemeClr val="accent1"/>
+          </a:fillRef>
+          <a:effectRef idx="2">
+            <a:schemeClr val="accent1"/>
+          </a:effectRef>
+          <a:fontRef idx="minor">
+            <a:schemeClr val="lt1"/>
+          </a:fontRef>
+        </p:style>
+        <p:txBody>
+          <a:bodyPr rtlCol="0" anchor="ctr" wrap="square" tIns="36576" bIns="36576"/>
+          <a:lstStyle/>
+          <a:p>
+            <a:pPr algn="ctr">
+              <a:spcAft>
+                <a:spcPts val="200"/>
+              </a:spcAft>
+            </a:pPr>
+            <a:r>
+              <a:rPr sz="2400" b="1">
+                <a:solidFill>
+                  <a:srgbClr val="FFFFFF"/>
+                </a:solidFill>
+                <a:latin typeface="IPAGothic"/>
+                <a:eastAsia typeface="IPAGothic"/>
+              </a:rPr>
+              <a:t>3</a:t>
+            </a:r>
+          </a:p>
+        </p:txBody>
+      </p:sp>
+      <p:sp>
+        <p:nvSpPr>
+          <p:cNvPr id="16" name="Rectangle 15"/>
+          <p:cNvSpPr/>
+          <p:nvPr/>
+        </p:nvSpPr>
+        <p:spPr>
+          <a:xfrm>
+            <a:off x="1325880" y="3657600"/>
+            <a:ext cx="3200400" cy="868680"/>
+          </a:xfrm>
+          <a:prstGeom prst="rect">
+            <a:avLst/>
+          </a:prstGeom>
+          <a:solidFill>
+            <a:srgbClr val="2E5C8A"/>
+          </a:solidFill>
+          <a:ln>
+            <a:noFill/>
+          </a:ln>
+          <a:effectLst/>
+        </p:spPr>
+        <p:style>
+          <a:lnRef idx="1">
+            <a:schemeClr val="accent1"/>
+          </a:lnRef>
+          <a:fillRef idx="3">
+            <a:schemeClr val="accent1"/>
+          </a:fillRef>
+          <a:effectRef idx="2">
+            <a:schemeClr val="accent1"/>
+          </a:effectRef>
+          <a:fontRef idx="minor">
+            <a:schemeClr val="lt1"/>
+          </a:fontRef>
+        </p:style>
+        <p:txBody>
+          <a:bodyPr rtlCol="0" anchor="ctr" wrap="square" tIns="36576" bIns="36576"/>
+          <a:lstStyle/>
+          <a:p>
+            <a:pPr algn="ctr">
+              <a:spcAft>
+                <a:spcPts val="200"/>
+              </a:spcAft>
+            </a:pPr>
+            <a:r>
+              <a:rPr sz="1400" b="1">
+                <a:solidFill>
+                  <a:srgbClr val="FFFFFF"/>
+                </a:solidFill>
+                <a:latin typeface="IPAGothic"/>
+                <a:eastAsia typeface="IPAGothic"/>
+              </a:rPr>
+              <a:t>途中のばらつきは想定内</a:t>
+            </a:r>
+          </a:p>
+        </p:txBody>
+      </p:sp>
+      <p:sp>
+        <p:nvSpPr>
+          <p:cNvPr id="17" name="Rectangle 16"/>
+          <p:cNvSpPr/>
+          <p:nvPr/>
+        </p:nvSpPr>
+        <p:spPr>
+          <a:xfrm>
+            <a:off x="4617720" y="3657600"/>
+            <a:ext cx="6931152" cy="868680"/>
+          </a:xfrm>
+          <a:prstGeom prst="rect">
+            <a:avLst/>
+          </a:prstGeom>
+          <a:solidFill>
+            <a:srgbClr val="F2F2F2"/>
+          </a:solidFill>
+          <a:ln w="6350">
+            <a:solidFill>
+              <a:srgbClr val="595959"/>
+            </a:solidFill>
+          </a:ln>
+          <a:effectLst/>
+        </p:spPr>
+        <p:style>
+          <a:lnRef idx="1">
+            <a:schemeClr val="accent1"/>
+          </a:lnRef>
+          <a:fillRef idx="3">
+            <a:schemeClr val="accent1"/>
+          </a:fillRef>
+          <a:effectRef idx="2">
+            <a:schemeClr val="accent1"/>
+          </a:effectRef>
+          <a:fontRef idx="minor">
+            <a:schemeClr val="lt1"/>
+          </a:fontRef>
+        </p:style>
+        <p:txBody>
+          <a:bodyPr rtlCol="0" anchor="ctr" wrap="square" tIns="36576" bIns="36576"/>
+          <a:lstStyle/>
+          <a:p>
+            <a:pPr algn="l">
+              <a:spcAft>
+                <a:spcPts val="200"/>
+              </a:spcAft>
+            </a:pPr>
+            <a:r>
+              <a:rPr sz="1300" b="0">
+                <a:solidFill>
+                  <a:srgbClr val="222222"/>
+                </a:solidFill>
+                <a:latin typeface="IPAGothic"/>
+                <a:eastAsia typeface="IPAGothic"/>
+              </a:rPr>
+              <a:t>本丸は形成的評価で“指導して閉じる”こと。国も態度を評定外(個人内評価)へ動いている。</a:t>
+            </a:r>
+          </a:p>
+        </p:txBody>
+      </p:sp>
+      <p:sp>
+        <p:nvSpPr>
+          <p:cNvPr id="18" name="Rectangle 17"/>
+          <p:cNvSpPr/>
+          <p:nvPr/>
+        </p:nvSpPr>
+        <p:spPr>
+          <a:xfrm>
+            <a:off x="457200" y="4709160"/>
+            <a:ext cx="11091672" cy="365760"/>
+          </a:xfrm>
+          <a:prstGeom prst="rect">
+            <a:avLst/>
+          </a:prstGeom>
+          <a:solidFill>
+            <a:srgbClr val="C45A11"/>
+          </a:solidFill>
+          <a:ln>
+            <a:noFill/>
+          </a:ln>
+          <a:effectLst/>
+        </p:spPr>
+        <p:style>
+          <a:lnRef idx="1">
+            <a:schemeClr val="accent1"/>
+          </a:lnRef>
+          <a:fillRef idx="3">
+            <a:schemeClr val="accent1"/>
+          </a:fillRef>
+          <a:effectRef idx="2">
+            <a:schemeClr val="accent1"/>
+          </a:effectRef>
+          <a:fontRef idx="minor">
+            <a:schemeClr val="lt1"/>
+          </a:fontRef>
+        </p:style>
+        <p:txBody>
+          <a:bodyPr rtlCol="0" anchor="ctr" wrap="square" tIns="36576" bIns="36576"/>
+          <a:lstStyle/>
+          <a:p>
+            <a:pPr algn="l">
+              <a:spcAft>
+                <a:spcPts val="200"/>
+              </a:spcAft>
+            </a:pPr>
+            <a:r>
+              <a:rPr sz="1300" b="1">
+                <a:solidFill>
+                  <a:srgbClr val="FFFFFF"/>
+                </a:solidFill>
+                <a:latin typeface="IPAGothic"/>
+                <a:eastAsia typeface="IPAGothic"/>
+              </a:rPr>
+              <a:t>公的資料(出典)</a:t>
+            </a:r>
+          </a:p>
+        </p:txBody>
+      </p:sp>
+      <p:sp>
+        <p:nvSpPr>
+          <p:cNvPr id="19" name="Rectangle 18"/>
+          <p:cNvSpPr/>
+          <p:nvPr/>
+        </p:nvSpPr>
+        <p:spPr>
+          <a:xfrm>
+            <a:off x="457200" y="5074920"/>
+            <a:ext cx="11091672" cy="1417320"/>
+          </a:xfrm>
+          <a:prstGeom prst="rect">
+            <a:avLst/>
+          </a:prstGeom>
+          <a:solidFill>
+            <a:srgbClr val="FFFFFF"/>
+          </a:solidFill>
+          <a:ln w="9525">
+            <a:solidFill>
+              <a:srgbClr val="595959"/>
+            </a:solidFill>
+          </a:ln>
+          <a:effectLst/>
+        </p:spPr>
+        <p:style>
+          <a:lnRef idx="1">
+            <a:schemeClr val="accent1"/>
+          </a:lnRef>
+          <a:fillRef idx="3">
+            <a:schemeClr val="accent1"/>
+          </a:fillRef>
+          <a:effectRef idx="2">
+            <a:schemeClr val="accent1"/>
+          </a:effectRef>
+          <a:fontRef idx="minor">
+            <a:schemeClr val="lt1"/>
+          </a:fontRef>
+        </p:style>
+        <p:txBody>
+          <a:bodyPr rtlCol="0" anchor="ctr"/>
+          <a:lstStyle/>
+          <a:p>
+            <a:pPr algn="ctr"/>
+          </a:p>
+        </p:txBody>
+      </p:sp>
+      <p:sp>
+        <p:nvSpPr>
+          <p:cNvPr id="20" name="TextBox 19"/>
+          <p:cNvSpPr txBox="1"/>
+          <p:nvPr/>
+        </p:nvSpPr>
+        <p:spPr>
+          <a:xfrm>
+            <a:off x="594360" y="5138928"/>
+            <a:ext cx="10835640" cy="265176"/>
+          </a:xfrm>
+          <a:prstGeom prst="rect">
+            <a:avLst/>
+          </a:prstGeom>
+          <a:noFill/>
+          <a:ln>
+            <a:noFill/>
+          </a:ln>
+        </p:spPr>
+        <p:txBody>
+          <a:bodyPr wrap="square" lIns="73152" rIns="73152" tIns="36576" bIns="36576" anchor="ctr">
+            <a:spAutoFit/>
+          </a:bodyPr>
+          <a:lstStyle/>
+          <a:p>
+            <a:pPr algn="l">
+              <a:spcAft>
+                <a:spcPts val="200"/>
+              </a:spcAft>
+            </a:pPr>
+            <a:r>
+              <a:rPr sz="1050" b="0">
+                <a:solidFill>
+                  <a:srgbClr val="222222"/>
+                </a:solidFill>
+                <a:latin typeface="IPAGothic"/>
+                <a:eastAsia typeface="IPAGothic"/>
+              </a:rPr>
+              <a:t>・中央教育審議会「児童生徒の学習評価の在り方について(報告)」平成31年1月21日(2側面/形式的態度の戒め/他観点と照らし合わせ)</a:t>
+            </a:r>
+          </a:p>
+        </p:txBody>
+      </p:sp>
+      <p:sp>
+        <p:nvSpPr>
+          <p:cNvPr id="21" name="TextBox 20"/>
+          <p:cNvSpPr txBox="1"/>
+          <p:nvPr/>
+        </p:nvSpPr>
+        <p:spPr>
+          <a:xfrm>
+            <a:off x="594360" y="5408676"/>
+            <a:ext cx="10835640" cy="265176"/>
+          </a:xfrm>
+          <a:prstGeom prst="rect">
+            <a:avLst/>
+          </a:prstGeom>
+          <a:noFill/>
+          <a:ln>
+            <a:noFill/>
+          </a:ln>
+        </p:spPr>
+        <p:txBody>
+          <a:bodyPr wrap="square" lIns="73152" rIns="73152" tIns="36576" bIns="36576" anchor="ctr">
+            <a:spAutoFit/>
+          </a:bodyPr>
+          <a:lstStyle/>
+          <a:p>
+            <a:pPr algn="l">
+              <a:spcAft>
+                <a:spcPts val="200"/>
+              </a:spcAft>
+            </a:pPr>
+            <a:r>
+              <a:rPr sz="1050" b="0">
+                <a:solidFill>
+                  <a:srgbClr val="222222"/>
+                </a:solidFill>
+                <a:latin typeface="IPAGothic"/>
+                <a:eastAsia typeface="IPAGothic"/>
+              </a:rPr>
+              <a:t>・国立教育政策研究所「『指導と評価の一体化』のための学習評価に関する参考資料」第1編 総説(AAC・CCA等のばらつきを生じさせない)</a:t>
+            </a:r>
+          </a:p>
+        </p:txBody>
+      </p:sp>
+      <p:sp>
+        <p:nvSpPr>
+          <p:cNvPr id="22" name="TextBox 21"/>
+          <p:cNvSpPr txBox="1"/>
+          <p:nvPr/>
+        </p:nvSpPr>
+        <p:spPr>
+          <a:xfrm>
+            <a:off x="594360" y="5678424"/>
+            <a:ext cx="10835640" cy="265176"/>
+          </a:xfrm>
+          <a:prstGeom prst="rect">
+            <a:avLst/>
+          </a:prstGeom>
+          <a:noFill/>
+          <a:ln>
+            <a:noFill/>
+          </a:ln>
+        </p:spPr>
+        <p:txBody>
+          <a:bodyPr wrap="square" lIns="73152" rIns="73152" tIns="36576" bIns="36576" anchor="ctr">
+            <a:spAutoFit/>
+          </a:bodyPr>
+          <a:lstStyle/>
+          <a:p>
+            <a:pPr algn="l">
+              <a:spcAft>
+                <a:spcPts val="200"/>
+              </a:spcAft>
+            </a:pPr>
+            <a:r>
+              <a:rPr sz="1050" b="0">
+                <a:solidFill>
+                  <a:srgbClr val="222222"/>
+                </a:solidFill>
+                <a:latin typeface="IPAGothic"/>
+                <a:eastAsia typeface="IPAGothic"/>
+              </a:rPr>
+              <a:t>・東京都教育委員会「指導と評価の一体化を目指して」理論編(評価方法=記述・発言・行動観察・自己/相互評価)</a:t>
+            </a:r>
+          </a:p>
+        </p:txBody>
+      </p:sp>
+      <p:sp>
+        <p:nvSpPr>
+          <p:cNvPr id="23" name="TextBox 22"/>
+          <p:cNvSpPr txBox="1"/>
+          <p:nvPr/>
+        </p:nvSpPr>
+        <p:spPr>
+          <a:xfrm>
+            <a:off x="594360" y="5948172"/>
+            <a:ext cx="10835640" cy="265176"/>
+          </a:xfrm>
+          <a:prstGeom prst="rect">
+            <a:avLst/>
+          </a:prstGeom>
+          <a:noFill/>
+          <a:ln>
+            <a:noFill/>
+          </a:ln>
+        </p:spPr>
+        <p:txBody>
+          <a:bodyPr wrap="square" lIns="73152" rIns="73152" tIns="36576" bIns="36576" anchor="ctr">
+            <a:spAutoFit/>
+          </a:bodyPr>
+          <a:lstStyle/>
+          <a:p>
+            <a:pPr algn="l">
+              <a:spcAft>
+                <a:spcPts val="200"/>
+              </a:spcAft>
+            </a:pPr>
+            <a:r>
+              <a:rPr sz="1050" b="0">
+                <a:solidFill>
+                  <a:srgbClr val="222222"/>
+                </a:solidFill>
+                <a:latin typeface="IPAGothic"/>
+                <a:eastAsia typeface="IPAGothic"/>
+              </a:rPr>
+              <a:t>・「主体的に学習に取り組む態度」の評価に関するガイドライン(奈良県教育委員会)/ 文科省「学習評価の在り方ハンドブック」</a:t>
+            </a:r>
+          </a:p>
+        </p:txBody>
+      </p:sp>
+      <p:sp>
+        <p:nvSpPr>
+          <p:cNvPr id="24" name="TextBox 23"/>
+          <p:cNvSpPr txBox="1"/>
+          <p:nvPr/>
+        </p:nvSpPr>
+        <p:spPr>
+          <a:xfrm>
+            <a:off x="594360" y="6217920"/>
+            <a:ext cx="10835640" cy="265176"/>
+          </a:xfrm>
+          <a:prstGeom prst="rect">
+            <a:avLst/>
+          </a:prstGeom>
+          <a:noFill/>
+          <a:ln>
+            <a:noFill/>
+          </a:ln>
+        </p:spPr>
+        <p:txBody>
+          <a:bodyPr wrap="square" lIns="73152" rIns="73152" tIns="36576" bIns="36576" anchor="ctr">
+            <a:spAutoFit/>
+          </a:bodyPr>
+          <a:lstStyle/>
+          <a:p>
+            <a:pPr algn="l">
+              <a:spcAft>
+                <a:spcPts val="200"/>
+              </a:spcAft>
+            </a:pPr>
+            <a:r>
+              <a:rPr sz="1050" b="0">
+                <a:solidFill>
+                  <a:srgbClr val="222222"/>
+                </a:solidFill>
+                <a:latin typeface="IPAGothic"/>
+                <a:eastAsia typeface="IPAGothic"/>
+              </a:rPr>
+              <a:t>・中教審 教育課程企画特別部会(2025.7.4)― 態度を評定外=個人内評価とする方針(2030年度以降の次期指導要領)</a:t>
+            </a:r>
+          </a:p>
+        </p:txBody>
+      </p:sp>
+      <p:sp>
+        <p:nvSpPr>
+          <p:cNvPr id="25" name="TextBox 24"/>
+          <p:cNvSpPr txBox="1"/>
+          <p:nvPr/>
+        </p:nvSpPr>
+        <p:spPr>
+          <a:xfrm>
+            <a:off x="457200" y="6547104"/>
+            <a:ext cx="11091672" cy="36576"/>
+          </a:xfrm>
+          <a:prstGeom prst="rect">
+            <a:avLst/>
+          </a:prstGeom>
+          <a:noFill/>
+          <a:ln>
+            <a:noFill/>
+          </a:ln>
+        </p:spPr>
+        <p:txBody>
+          <a:bodyPr wrap="square" lIns="73152" rIns="73152" tIns="36576" bIns="36576" anchor="t">
+            <a:spAutoFit/>
+          </a:bodyPr>
+          <a:lstStyle/>
+          <a:p>
+            <a:pPr algn="l">
+              <a:spcAft>
+                <a:spcPts val="200"/>
+              </a:spcAft>
+            </a:pPr>
+            <a:r>
+              <a:rPr sz="600" b="0">
+                <a:solidFill>
+                  <a:srgbClr val="222222"/>
+                </a:solidFill>
+                <a:latin typeface="IPAGothic"/>
+                <a:eastAsia typeface="IPAGothic"/>
+              </a:rPr>
+              <a:t/>
             </a:r>
           </a:p>
         </p:txBody>

--- a/主体的に学習に取り組む態度の評価方法.pptx
+++ b/主体的に学習に取り組む態度の評価方法.pptx
@@ -26,6 +26,10 @@
     <p:sldId id="274" r:id="rId25"/>
     <p:sldId id="275" r:id="rId26"/>
     <p:sldId id="276" r:id="rId27"/>
+    <p:sldId id="277" r:id="rId28"/>
+    <p:sldId id="278" r:id="rId29"/>
+    <p:sldId id="279" r:id="rId30"/>
+    <p:sldId id="280" r:id="rId31"/>
   </p:sldIdLst>
   <p:sldSz cx="12191695" cy="6858000" type="screen4x3"/>
   <p:notesSz cx="6858000" cy="9144000"/>
@@ -16575,6 +16579,3407 @@
                 <a:eastAsia typeface="IPAGothic"/>
               </a:rPr>
               <a:t/>
+            </a:r>
+          </a:p>
+        </p:txBody>
+      </p:sp>
+    </p:spTree>
+  </p:cSld>
+  <p:clrMapOvr>
+    <a:masterClrMapping/>
+  </p:clrMapOvr>
+</p:sld>
+</file>
+
+<file path=ppt/slides/slide22.xml><?xml version="1.0" encoding="utf-8"?>
+<p:sld xmlns:a="http://schemas.openxmlformats.org/drawingml/2006/main" xmlns:p="http://schemas.openxmlformats.org/presentationml/2006/main" xmlns:r="http://schemas.openxmlformats.org/officeDocument/2006/relationships">
+  <p:cSld>
+    <p:spTree>
+      <p:nvGrpSpPr>
+        <p:cNvPr id="1" name=""/>
+        <p:cNvGrpSpPr/>
+        <p:nvPr/>
+      </p:nvGrpSpPr>
+      <p:grpSpPr/>
+      <p:sp>
+        <p:nvSpPr>
+          <p:cNvPr id="2" name="Rectangle 1"/>
+          <p:cNvSpPr/>
+          <p:nvPr/>
+        </p:nvSpPr>
+        <p:spPr>
+          <a:xfrm>
+            <a:off x="0" y="0"/>
+            <a:ext cx="12191695" cy="6858000"/>
+          </a:xfrm>
+          <a:prstGeom prst="rect">
+            <a:avLst/>
+          </a:prstGeom>
+          <a:solidFill>
+            <a:srgbClr val="1F3A5F"/>
+          </a:solidFill>
+          <a:ln>
+            <a:noFill/>
+          </a:ln>
+          <a:effectLst/>
+        </p:spPr>
+        <p:style>
+          <a:lnRef idx="1">
+            <a:schemeClr val="accent1"/>
+          </a:lnRef>
+          <a:fillRef idx="3">
+            <a:schemeClr val="accent1"/>
+          </a:fillRef>
+          <a:effectRef idx="2">
+            <a:schemeClr val="accent1"/>
+          </a:effectRef>
+          <a:fontRef idx="minor">
+            <a:schemeClr val="lt1"/>
+          </a:fontRef>
+        </p:style>
+        <p:txBody>
+          <a:bodyPr rtlCol="0" anchor="ctr"/>
+          <a:lstStyle/>
+          <a:p>
+            <a:pPr algn="ctr"/>
+          </a:p>
+        </p:txBody>
+      </p:sp>
+      <p:sp>
+        <p:nvSpPr>
+          <p:cNvPr id="3" name="Rectangle 2"/>
+          <p:cNvSpPr/>
+          <p:nvPr/>
+        </p:nvSpPr>
+        <p:spPr>
+          <a:xfrm>
+            <a:off x="0" y="2286000"/>
+            <a:ext cx="12191695" cy="73152"/>
+          </a:xfrm>
+          <a:prstGeom prst="rect">
+            <a:avLst/>
+          </a:prstGeom>
+          <a:solidFill>
+            <a:srgbClr val="C45A11"/>
+          </a:solidFill>
+          <a:ln>
+            <a:noFill/>
+          </a:ln>
+          <a:effectLst/>
+        </p:spPr>
+        <p:style>
+          <a:lnRef idx="1">
+            <a:schemeClr val="accent1"/>
+          </a:lnRef>
+          <a:fillRef idx="3">
+            <a:schemeClr val="accent1"/>
+          </a:fillRef>
+          <a:effectRef idx="2">
+            <a:schemeClr val="accent1"/>
+          </a:effectRef>
+          <a:fontRef idx="minor">
+            <a:schemeClr val="lt1"/>
+          </a:fontRef>
+        </p:style>
+        <p:txBody>
+          <a:bodyPr rtlCol="0" anchor="ctr"/>
+          <a:lstStyle/>
+          <a:p>
+            <a:pPr algn="ctr"/>
+          </a:p>
+        </p:txBody>
+      </p:sp>
+      <p:sp>
+        <p:nvSpPr>
+          <p:cNvPr id="4" name="Rectangle 3"/>
+          <p:cNvSpPr/>
+          <p:nvPr/>
+        </p:nvSpPr>
+        <p:spPr>
+          <a:xfrm>
+            <a:off x="4727448" y="1188720"/>
+            <a:ext cx="2743200" cy="502920"/>
+          </a:xfrm>
+          <a:prstGeom prst="rect">
+            <a:avLst/>
+          </a:prstGeom>
+          <a:solidFill>
+            <a:srgbClr val="FFFFFF"/>
+          </a:solidFill>
+          <a:ln>
+            <a:noFill/>
+          </a:ln>
+          <a:effectLst/>
+        </p:spPr>
+        <p:style>
+          <a:lnRef idx="1">
+            <a:schemeClr val="accent1"/>
+          </a:lnRef>
+          <a:fillRef idx="3">
+            <a:schemeClr val="accent1"/>
+          </a:fillRef>
+          <a:effectRef idx="2">
+            <a:schemeClr val="accent1"/>
+          </a:effectRef>
+          <a:fontRef idx="minor">
+            <a:schemeClr val="lt1"/>
+          </a:fontRef>
+        </p:style>
+        <p:txBody>
+          <a:bodyPr rtlCol="0" anchor="ctr" wrap="square" tIns="36576" bIns="36576"/>
+          <a:lstStyle/>
+          <a:p>
+            <a:pPr algn="ctr">
+              <a:spcAft>
+                <a:spcPts val="200"/>
+              </a:spcAft>
+            </a:pPr>
+            <a:r>
+              <a:rPr sz="1900" b="1">
+                <a:solidFill>
+                  <a:srgbClr val="1F3A5F"/>
+                </a:solidFill>
+                <a:latin typeface="IPAGothic"/>
+                <a:eastAsia typeface="IPAGothic"/>
+              </a:rPr>
+              <a:t>想 定 問 答</a:t>
+            </a:r>
+          </a:p>
+        </p:txBody>
+      </p:sp>
+      <p:sp>
+        <p:nvSpPr>
+          <p:cNvPr id="5" name="TextBox 4"/>
+          <p:cNvSpPr txBox="1"/>
+          <p:nvPr/>
+        </p:nvSpPr>
+        <p:spPr>
+          <a:xfrm>
+            <a:off x="457200" y="2468880"/>
+            <a:ext cx="11274552" cy="914400"/>
+          </a:xfrm>
+          <a:prstGeom prst="rect">
+            <a:avLst/>
+          </a:prstGeom>
+          <a:noFill/>
+          <a:ln>
+            <a:noFill/>
+          </a:ln>
+        </p:spPr>
+        <p:txBody>
+          <a:bodyPr wrap="square" lIns="73152" rIns="73152" tIns="36576" bIns="36576" anchor="ctr">
+            <a:spAutoFit/>
+          </a:bodyPr>
+          <a:lstStyle/>
+          <a:p>
+            <a:pPr algn="ctr">
+              <a:spcAft>
+                <a:spcPts val="200"/>
+              </a:spcAft>
+            </a:pPr>
+            <a:r>
+              <a:rPr sz="3800" b="1">
+                <a:solidFill>
+                  <a:srgbClr val="FFFFFF"/>
+                </a:solidFill>
+                <a:latin typeface="IPAGothic"/>
+                <a:eastAsia typeface="IPAGothic"/>
+              </a:rPr>
+              <a:t>評価方法への疑問に答える</a:t>
+            </a:r>
+          </a:p>
+        </p:txBody>
+      </p:sp>
+      <p:sp>
+        <p:nvSpPr>
+          <p:cNvPr id="6" name="TextBox 5"/>
+          <p:cNvSpPr txBox="1"/>
+          <p:nvPr/>
+        </p:nvSpPr>
+        <p:spPr>
+          <a:xfrm>
+            <a:off x="457200" y="3429000"/>
+            <a:ext cx="11274552" cy="548640"/>
+          </a:xfrm>
+          <a:prstGeom prst="rect">
+            <a:avLst/>
+          </a:prstGeom>
+          <a:noFill/>
+          <a:ln>
+            <a:noFill/>
+          </a:ln>
+        </p:spPr>
+        <p:txBody>
+          <a:bodyPr wrap="square" lIns="73152" rIns="73152" tIns="36576" bIns="36576" anchor="ctr">
+            <a:spAutoFit/>
+          </a:bodyPr>
+          <a:lstStyle/>
+          <a:p>
+            <a:pPr algn="ctr">
+              <a:spcAft>
+                <a:spcPts val="200"/>
+              </a:spcAft>
+            </a:pPr>
+            <a:r>
+              <a:rPr sz="1600" b="0">
+                <a:solidFill>
+                  <a:srgbClr val="D6E4F0"/>
+                </a:solidFill>
+                <a:latin typeface="IPAGothic"/>
+                <a:eastAsia typeface="IPAGothic"/>
+              </a:rPr>
+              <a:t>―「授業中の発言」「教師による行動観察」をめぐって / 公的資料に基づく整理 ―</a:t>
+            </a:r>
+          </a:p>
+        </p:txBody>
+      </p:sp>
+      <p:sp>
+        <p:nvSpPr>
+          <p:cNvPr id="7" name="Rectangle 6"/>
+          <p:cNvSpPr/>
+          <p:nvPr/>
+        </p:nvSpPr>
+        <p:spPr>
+          <a:xfrm>
+            <a:off x="1280160" y="4297680"/>
+            <a:ext cx="9628632" cy="548640"/>
+          </a:xfrm>
+          <a:prstGeom prst="rect">
+            <a:avLst/>
+          </a:prstGeom>
+          <a:solidFill>
+            <a:srgbClr val="FFF2CC"/>
+          </a:solidFill>
+          <a:ln>
+            <a:noFill/>
+          </a:ln>
+          <a:effectLst/>
+        </p:spPr>
+        <p:style>
+          <a:lnRef idx="1">
+            <a:schemeClr val="accent1"/>
+          </a:lnRef>
+          <a:fillRef idx="3">
+            <a:schemeClr val="accent1"/>
+          </a:fillRef>
+          <a:effectRef idx="2">
+            <a:schemeClr val="accent1"/>
+          </a:effectRef>
+          <a:fontRef idx="minor">
+            <a:schemeClr val="lt1"/>
+          </a:fontRef>
+        </p:style>
+        <p:txBody>
+          <a:bodyPr rtlCol="0" anchor="ctr" wrap="square" tIns="36576" bIns="36576"/>
+          <a:lstStyle/>
+          <a:p>
+            <a:pPr algn="l">
+              <a:spcAft>
+                <a:spcPts val="200"/>
+              </a:spcAft>
+            </a:pPr>
+            <a:r>
+              <a:rPr sz="1500" b="1">
+                <a:solidFill>
+                  <a:srgbClr val="1F3A5F"/>
+                </a:solidFill>
+                <a:latin typeface="IPAGothic"/>
+                <a:eastAsia typeface="IPAGothic"/>
+              </a:rPr>
+              <a:t>Q1  毎時間、全員の発言を拾うのか?</a:t>
+            </a:r>
+          </a:p>
+        </p:txBody>
+      </p:sp>
+      <p:sp>
+        <p:nvSpPr>
+          <p:cNvPr id="8" name="Rectangle 7"/>
+          <p:cNvSpPr/>
+          <p:nvPr/>
+        </p:nvSpPr>
+        <p:spPr>
+          <a:xfrm>
+            <a:off x="1280160" y="4956048"/>
+            <a:ext cx="9628632" cy="548640"/>
+          </a:xfrm>
+          <a:prstGeom prst="rect">
+            <a:avLst/>
+          </a:prstGeom>
+          <a:solidFill>
+            <a:srgbClr val="FFF2CC"/>
+          </a:solidFill>
+          <a:ln>
+            <a:noFill/>
+          </a:ln>
+          <a:effectLst/>
+        </p:spPr>
+        <p:style>
+          <a:lnRef idx="1">
+            <a:schemeClr val="accent1"/>
+          </a:lnRef>
+          <a:fillRef idx="3">
+            <a:schemeClr val="accent1"/>
+          </a:fillRef>
+          <a:effectRef idx="2">
+            <a:schemeClr val="accent1"/>
+          </a:effectRef>
+          <a:fontRef idx="minor">
+            <a:schemeClr val="lt1"/>
+          </a:fontRef>
+        </p:style>
+        <p:txBody>
+          <a:bodyPr rtlCol="0" anchor="ctr" wrap="square" tIns="36576" bIns="36576"/>
+          <a:lstStyle/>
+          <a:p>
+            <a:pPr algn="l">
+              <a:spcAft>
+                <a:spcPts val="200"/>
+              </a:spcAft>
+            </a:pPr>
+            <a:r>
+              <a:rPr sz="1500" b="1">
+                <a:solidFill>
+                  <a:srgbClr val="1F3A5F"/>
+                </a:solidFill>
+                <a:latin typeface="IPAGothic"/>
+                <a:eastAsia typeface="IPAGothic"/>
+              </a:rPr>
+              <a:t>Q2  発言を評価に入れると宣言したら、賢い子がウケ狙いで発言するのでは?</a:t>
+            </a:r>
+          </a:p>
+        </p:txBody>
+      </p:sp>
+      <p:sp>
+        <p:nvSpPr>
+          <p:cNvPr id="9" name="Rectangle 8"/>
+          <p:cNvSpPr/>
+          <p:nvPr/>
+        </p:nvSpPr>
+        <p:spPr>
+          <a:xfrm>
+            <a:off x="1280160" y="5614416"/>
+            <a:ext cx="9628632" cy="548640"/>
+          </a:xfrm>
+          <a:prstGeom prst="rect">
+            <a:avLst/>
+          </a:prstGeom>
+          <a:solidFill>
+            <a:srgbClr val="FFF2CC"/>
+          </a:solidFill>
+          <a:ln>
+            <a:noFill/>
+          </a:ln>
+          <a:effectLst/>
+        </p:spPr>
+        <p:style>
+          <a:lnRef idx="1">
+            <a:schemeClr val="accent1"/>
+          </a:lnRef>
+          <a:fillRef idx="3">
+            <a:schemeClr val="accent1"/>
+          </a:fillRef>
+          <a:effectRef idx="2">
+            <a:schemeClr val="accent1"/>
+          </a:effectRef>
+          <a:fontRef idx="minor">
+            <a:schemeClr val="lt1"/>
+          </a:fontRef>
+        </p:style>
+        <p:txBody>
+          <a:bodyPr rtlCol="0" anchor="ctr" wrap="square" tIns="36576" bIns="36576"/>
+          <a:lstStyle/>
+          <a:p>
+            <a:pPr algn="l">
+              <a:spcAft>
+                <a:spcPts val="200"/>
+              </a:spcAft>
+            </a:pPr>
+            <a:r>
+              <a:rPr sz="1500" b="1">
+                <a:solidFill>
+                  <a:srgbClr val="1F3A5F"/>
+                </a:solidFill>
+                <a:latin typeface="IPAGothic"/>
+                <a:eastAsia typeface="IPAGothic"/>
+              </a:rPr>
+              <a:t>Q3  「教師による行動観察」は、主観が入るのでは?</a:t>
+            </a:r>
+          </a:p>
+        </p:txBody>
+      </p:sp>
+    </p:spTree>
+  </p:cSld>
+  <p:clrMapOvr>
+    <a:masterClrMapping/>
+  </p:clrMapOvr>
+</p:sld>
+</file>
+
+<file path=ppt/slides/slide23.xml><?xml version="1.0" encoding="utf-8"?>
+<p:sld xmlns:a="http://schemas.openxmlformats.org/drawingml/2006/main" xmlns:p="http://schemas.openxmlformats.org/presentationml/2006/main" xmlns:r="http://schemas.openxmlformats.org/officeDocument/2006/relationships">
+  <p:cSld>
+    <p:spTree>
+      <p:nvGrpSpPr>
+        <p:cNvPr id="1" name=""/>
+        <p:cNvGrpSpPr/>
+        <p:nvPr/>
+      </p:nvGrpSpPr>
+      <p:grpSpPr/>
+      <p:sp>
+        <p:nvSpPr>
+          <p:cNvPr id="2" name="Rectangle 1"/>
+          <p:cNvSpPr/>
+          <p:nvPr/>
+        </p:nvSpPr>
+        <p:spPr>
+          <a:xfrm>
+            <a:off x="0" y="0"/>
+            <a:ext cx="12191695" cy="777240"/>
+          </a:xfrm>
+          <a:prstGeom prst="rect">
+            <a:avLst/>
+          </a:prstGeom>
+          <a:solidFill>
+            <a:srgbClr val="1F3A5F"/>
+          </a:solidFill>
+          <a:ln>
+            <a:noFill/>
+          </a:ln>
+          <a:effectLst/>
+        </p:spPr>
+        <p:style>
+          <a:lnRef idx="1">
+            <a:schemeClr val="accent1"/>
+          </a:lnRef>
+          <a:fillRef idx="3">
+            <a:schemeClr val="accent1"/>
+          </a:fillRef>
+          <a:effectRef idx="2">
+            <a:schemeClr val="accent1"/>
+          </a:effectRef>
+          <a:fontRef idx="minor">
+            <a:schemeClr val="lt1"/>
+          </a:fontRef>
+        </p:style>
+        <p:txBody>
+          <a:bodyPr rtlCol="0" anchor="ctr"/>
+          <a:lstStyle/>
+          <a:p>
+            <a:pPr algn="ctr"/>
+          </a:p>
+        </p:txBody>
+      </p:sp>
+      <p:sp>
+        <p:nvSpPr>
+          <p:cNvPr id="3" name="Rectangle 2"/>
+          <p:cNvSpPr/>
+          <p:nvPr/>
+        </p:nvSpPr>
+        <p:spPr>
+          <a:xfrm>
+            <a:off x="0" y="777240"/>
+            <a:ext cx="12191695" cy="54864"/>
+          </a:xfrm>
+          <a:prstGeom prst="rect">
+            <a:avLst/>
+          </a:prstGeom>
+          <a:solidFill>
+            <a:srgbClr val="C45A11"/>
+          </a:solidFill>
+          <a:ln>
+            <a:noFill/>
+          </a:ln>
+          <a:effectLst/>
+        </p:spPr>
+        <p:style>
+          <a:lnRef idx="1">
+            <a:schemeClr val="accent1"/>
+          </a:lnRef>
+          <a:fillRef idx="3">
+            <a:schemeClr val="accent1"/>
+          </a:fillRef>
+          <a:effectRef idx="2">
+            <a:schemeClr val="accent1"/>
+          </a:effectRef>
+          <a:fontRef idx="minor">
+            <a:schemeClr val="lt1"/>
+          </a:fontRef>
+        </p:style>
+        <p:txBody>
+          <a:bodyPr rtlCol="0" anchor="ctr"/>
+          <a:lstStyle/>
+          <a:p>
+            <a:pPr algn="ctr"/>
+          </a:p>
+        </p:txBody>
+      </p:sp>
+      <p:sp>
+        <p:nvSpPr>
+          <p:cNvPr id="4" name="TextBox 3"/>
+          <p:cNvSpPr txBox="1"/>
+          <p:nvPr/>
+        </p:nvSpPr>
+        <p:spPr>
+          <a:xfrm>
+            <a:off x="365760" y="73152"/>
+            <a:ext cx="10241280" cy="658368"/>
+          </a:xfrm>
+          <a:prstGeom prst="rect">
+            <a:avLst/>
+          </a:prstGeom>
+          <a:noFill/>
+          <a:ln>
+            <a:noFill/>
+          </a:ln>
+        </p:spPr>
+        <p:txBody>
+          <a:bodyPr wrap="square" lIns="73152" rIns="73152" tIns="36576" bIns="36576" anchor="ctr">
+            <a:spAutoFit/>
+          </a:bodyPr>
+          <a:lstStyle/>
+          <a:p>
+            <a:pPr algn="l">
+              <a:spcAft>
+                <a:spcPts val="200"/>
+              </a:spcAft>
+            </a:pPr>
+            <a:r>
+              <a:rPr sz="2100" b="1">
+                <a:solidFill>
+                  <a:srgbClr val="FFFFFF"/>
+                </a:solidFill>
+                <a:latin typeface="IPAGothic"/>
+                <a:eastAsia typeface="IPAGothic"/>
+              </a:rPr>
+              <a:t>Q1「授業中の発言」― 毎時間、全員分を拾うのか?</a:t>
+            </a:r>
+          </a:p>
+        </p:txBody>
+      </p:sp>
+      <p:sp>
+        <p:nvSpPr>
+          <p:cNvPr id="5" name="TextBox 4"/>
+          <p:cNvSpPr txBox="1"/>
+          <p:nvPr/>
+        </p:nvSpPr>
+        <p:spPr>
+          <a:xfrm>
+            <a:off x="10652760" y="73152"/>
+            <a:ext cx="1417320" cy="658368"/>
+          </a:xfrm>
+          <a:prstGeom prst="rect">
+            <a:avLst/>
+          </a:prstGeom>
+          <a:noFill/>
+          <a:ln>
+            <a:noFill/>
+          </a:ln>
+        </p:spPr>
+        <p:txBody>
+          <a:bodyPr wrap="square" lIns="73152" rIns="73152" tIns="36576" bIns="36576" anchor="ctr">
+            <a:spAutoFit/>
+          </a:bodyPr>
+          <a:lstStyle/>
+          <a:p>
+            <a:pPr algn="r">
+              <a:spcAft>
+                <a:spcPts val="200"/>
+              </a:spcAft>
+            </a:pPr>
+            <a:r>
+              <a:rPr sz="1200" b="0">
+                <a:solidFill>
+                  <a:srgbClr val="FFFFFF"/>
+                </a:solidFill>
+                <a:latin typeface="IPAGothic"/>
+                <a:eastAsia typeface="IPAGothic"/>
+              </a:rPr>
+              <a:t>想定問答 1 / 3</a:t>
+            </a:r>
+          </a:p>
+        </p:txBody>
+      </p:sp>
+      <p:sp>
+        <p:nvSpPr>
+          <p:cNvPr id="6" name="Rectangle 5"/>
+          <p:cNvSpPr/>
+          <p:nvPr/>
+        </p:nvSpPr>
+        <p:spPr>
+          <a:xfrm>
+            <a:off x="0" y="6583680"/>
+            <a:ext cx="12191695" cy="274320"/>
+          </a:xfrm>
+          <a:prstGeom prst="rect">
+            <a:avLst/>
+          </a:prstGeom>
+          <a:solidFill>
+            <a:srgbClr val="F2F2F2"/>
+          </a:solidFill>
+          <a:ln>
+            <a:noFill/>
+          </a:ln>
+          <a:effectLst/>
+        </p:spPr>
+        <p:style>
+          <a:lnRef idx="1">
+            <a:schemeClr val="accent1"/>
+          </a:lnRef>
+          <a:fillRef idx="3">
+            <a:schemeClr val="accent1"/>
+          </a:fillRef>
+          <a:effectRef idx="2">
+            <a:schemeClr val="accent1"/>
+          </a:effectRef>
+          <a:fontRef idx="minor">
+            <a:schemeClr val="lt1"/>
+          </a:fontRef>
+        </p:style>
+        <p:txBody>
+          <a:bodyPr rtlCol="0" anchor="ctr"/>
+          <a:lstStyle/>
+          <a:p>
+            <a:pPr algn="ctr"/>
+          </a:p>
+        </p:txBody>
+      </p:sp>
+      <p:sp>
+        <p:nvSpPr>
+          <p:cNvPr id="7" name="TextBox 6"/>
+          <p:cNvSpPr txBox="1"/>
+          <p:nvPr/>
+        </p:nvSpPr>
+        <p:spPr>
+          <a:xfrm>
+            <a:off x="365760" y="6583680"/>
+            <a:ext cx="11430000" cy="274320"/>
+          </a:xfrm>
+          <a:prstGeom prst="rect">
+            <a:avLst/>
+          </a:prstGeom>
+          <a:noFill/>
+          <a:ln>
+            <a:noFill/>
+          </a:ln>
+        </p:spPr>
+        <p:txBody>
+          <a:bodyPr wrap="square" lIns="73152" rIns="73152" tIns="36576" bIns="36576" anchor="ctr">
+            <a:spAutoFit/>
+          </a:bodyPr>
+          <a:lstStyle/>
+          <a:p>
+            <a:pPr algn="l">
+              <a:spcAft>
+                <a:spcPts val="200"/>
+              </a:spcAft>
+            </a:pPr>
+            <a:r>
+              <a:rPr sz="1000" b="0">
+                <a:solidFill>
+                  <a:srgbClr val="595959"/>
+                </a:solidFill>
+                <a:latin typeface="IPAGothic"/>
+                <a:eastAsia typeface="IPAGothic"/>
+              </a:rPr>
+              <a:t>想定問答 ― 「授業中の発言」「教師による行動観察」をめぐって</a:t>
+            </a:r>
+          </a:p>
+        </p:txBody>
+      </p:sp>
+      <p:sp>
+        <p:nvSpPr>
+          <p:cNvPr id="8" name="Rectangle 7"/>
+          <p:cNvSpPr/>
+          <p:nvPr/>
+        </p:nvSpPr>
+        <p:spPr>
+          <a:xfrm>
+            <a:off x="457200" y="960120"/>
+            <a:ext cx="11274552" cy="566928"/>
+          </a:xfrm>
+          <a:prstGeom prst="rect">
+            <a:avLst/>
+          </a:prstGeom>
+          <a:solidFill>
+            <a:srgbClr val="4E7A36"/>
+          </a:solidFill>
+          <a:ln>
+            <a:noFill/>
+          </a:ln>
+          <a:effectLst/>
+        </p:spPr>
+        <p:style>
+          <a:lnRef idx="1">
+            <a:schemeClr val="accent1"/>
+          </a:lnRef>
+          <a:fillRef idx="3">
+            <a:schemeClr val="accent1"/>
+          </a:fillRef>
+          <a:effectRef idx="2">
+            <a:schemeClr val="accent1"/>
+          </a:effectRef>
+          <a:fontRef idx="minor">
+            <a:schemeClr val="lt1"/>
+          </a:fontRef>
+        </p:style>
+        <p:txBody>
+          <a:bodyPr rtlCol="0" anchor="ctr" wrap="square" tIns="36576" bIns="36576"/>
+          <a:lstStyle/>
+          <a:p>
+            <a:pPr algn="ctr">
+              <a:spcAft>
+                <a:spcPts val="200"/>
+              </a:spcAft>
+            </a:pPr>
+            <a:r>
+              <a:rPr sz="1600" b="1">
+                <a:solidFill>
+                  <a:srgbClr val="FFFFFF"/>
+                </a:solidFill>
+                <a:latin typeface="IPAGothic"/>
+                <a:eastAsia typeface="IPAGothic"/>
+              </a:rPr>
+              <a:t>答え:NO ― 毎時間・全員・悉皆(しっかい)で記録するものではない</a:t>
+            </a:r>
+          </a:p>
+        </p:txBody>
+      </p:sp>
+      <p:sp>
+        <p:nvSpPr>
+          <p:cNvPr id="9" name="Oval 8"/>
+          <p:cNvSpPr/>
+          <p:nvPr/>
+        </p:nvSpPr>
+        <p:spPr>
+          <a:xfrm>
+            <a:off x="457200" y="1783080"/>
+            <a:ext cx="640080" cy="1051560"/>
+          </a:xfrm>
+          <a:prstGeom prst="ellipse">
+            <a:avLst/>
+          </a:prstGeom>
+          <a:solidFill>
+            <a:srgbClr val="1F3A5F"/>
+          </a:solidFill>
+          <a:ln>
+            <a:noFill/>
+          </a:ln>
+          <a:effectLst/>
+        </p:spPr>
+        <p:style>
+          <a:lnRef idx="1">
+            <a:schemeClr val="accent1"/>
+          </a:lnRef>
+          <a:fillRef idx="3">
+            <a:schemeClr val="accent1"/>
+          </a:fillRef>
+          <a:effectRef idx="2">
+            <a:schemeClr val="accent1"/>
+          </a:effectRef>
+          <a:fontRef idx="minor">
+            <a:schemeClr val="lt1"/>
+          </a:fontRef>
+        </p:style>
+        <p:txBody>
+          <a:bodyPr rtlCol="0" anchor="ctr" wrap="square" tIns="36576" bIns="36576"/>
+          <a:lstStyle/>
+          <a:p>
+            <a:pPr algn="ctr">
+              <a:spcAft>
+                <a:spcPts val="200"/>
+              </a:spcAft>
+            </a:pPr>
+            <a:r>
+              <a:rPr sz="2000" b="1">
+                <a:solidFill>
+                  <a:srgbClr val="FFFFFF"/>
+                </a:solidFill>
+                <a:latin typeface="IPAGothic"/>
+                <a:eastAsia typeface="IPAGothic"/>
+              </a:rPr>
+              <a:t>1</a:t>
+            </a:r>
+          </a:p>
+        </p:txBody>
+      </p:sp>
+      <p:sp>
+        <p:nvSpPr>
+          <p:cNvPr id="10" name="Rectangle 9"/>
+          <p:cNvSpPr/>
+          <p:nvPr/>
+        </p:nvSpPr>
+        <p:spPr>
+          <a:xfrm>
+            <a:off x="1234440" y="1783080"/>
+            <a:ext cx="10497312" cy="1051560"/>
+          </a:xfrm>
+          <a:prstGeom prst="rect">
+            <a:avLst/>
+          </a:prstGeom>
+          <a:solidFill>
+            <a:srgbClr val="D6E4F0"/>
+          </a:solidFill>
+          <a:ln w="9525">
+            <a:solidFill>
+              <a:srgbClr val="595959"/>
+            </a:solidFill>
+          </a:ln>
+          <a:effectLst/>
+        </p:spPr>
+        <p:style>
+          <a:lnRef idx="1">
+            <a:schemeClr val="accent1"/>
+          </a:lnRef>
+          <a:fillRef idx="3">
+            <a:schemeClr val="accent1"/>
+          </a:fillRef>
+          <a:effectRef idx="2">
+            <a:schemeClr val="accent1"/>
+          </a:effectRef>
+          <a:fontRef idx="minor">
+            <a:schemeClr val="lt1"/>
+          </a:fontRef>
+        </p:style>
+        <p:txBody>
+          <a:bodyPr rtlCol="0" anchor="ctr" wrap="square" tIns="36576" bIns="36576"/>
+          <a:lstStyle/>
+          <a:p>
+            <a:pPr algn="l">
+              <a:spcAft>
+                <a:spcPts val="200"/>
+              </a:spcAft>
+            </a:pPr>
+            <a:r>
+              <a:rPr sz="1400" b="0">
+                <a:solidFill>
+                  <a:srgbClr val="222222"/>
+                </a:solidFill>
+                <a:latin typeface="IPAGothic"/>
+                <a:eastAsia typeface="IPAGothic"/>
+              </a:rPr>
+              <a:t>「主体的に学習に取り組む態度」は1時間単位ではなく “単元のまとまり” で評価する。</a:t>
+            </a:r>
+          </a:p>
+          <a:p>
+            <a:pPr algn="l">
+              <a:spcAft>
+                <a:spcPts val="200"/>
+              </a:spcAft>
+            </a:pPr>
+            <a:r>
+              <a:rPr sz="1400" b="0">
+                <a:solidFill>
+                  <a:srgbClr val="222222"/>
+                </a:solidFill>
+                <a:latin typeface="IPAGothic"/>
+                <a:eastAsia typeface="IPAGothic"/>
+              </a:rPr>
+              <a:t>あらかじめ計画した “評価場面” で見取るもの。</a:t>
+            </a:r>
+          </a:p>
+        </p:txBody>
+      </p:sp>
+      <p:sp>
+        <p:nvSpPr>
+          <p:cNvPr id="11" name="Oval 10"/>
+          <p:cNvSpPr/>
+          <p:nvPr/>
+        </p:nvSpPr>
+        <p:spPr>
+          <a:xfrm>
+            <a:off x="457200" y="2944368"/>
+            <a:ext cx="640080" cy="1325880"/>
+          </a:xfrm>
+          <a:prstGeom prst="ellipse">
+            <a:avLst/>
+          </a:prstGeom>
+          <a:solidFill>
+            <a:srgbClr val="1F3A5F"/>
+          </a:solidFill>
+          <a:ln>
+            <a:noFill/>
+          </a:ln>
+          <a:effectLst/>
+        </p:spPr>
+        <p:style>
+          <a:lnRef idx="1">
+            <a:schemeClr val="accent1"/>
+          </a:lnRef>
+          <a:fillRef idx="3">
+            <a:schemeClr val="accent1"/>
+          </a:fillRef>
+          <a:effectRef idx="2">
+            <a:schemeClr val="accent1"/>
+          </a:effectRef>
+          <a:fontRef idx="minor">
+            <a:schemeClr val="lt1"/>
+          </a:fontRef>
+        </p:style>
+        <p:txBody>
+          <a:bodyPr rtlCol="0" anchor="ctr" wrap="square" tIns="36576" bIns="36576"/>
+          <a:lstStyle/>
+          <a:p>
+            <a:pPr algn="ctr">
+              <a:spcAft>
+                <a:spcPts val="200"/>
+              </a:spcAft>
+            </a:pPr>
+            <a:r>
+              <a:rPr sz="2000" b="1">
+                <a:solidFill>
+                  <a:srgbClr val="FFFFFF"/>
+                </a:solidFill>
+                <a:latin typeface="IPAGothic"/>
+                <a:eastAsia typeface="IPAGothic"/>
+              </a:rPr>
+              <a:t>2</a:t>
+            </a:r>
+          </a:p>
+        </p:txBody>
+      </p:sp>
+      <p:sp>
+        <p:nvSpPr>
+          <p:cNvPr id="12" name="Rectangle 11"/>
+          <p:cNvSpPr/>
+          <p:nvPr/>
+        </p:nvSpPr>
+        <p:spPr>
+          <a:xfrm>
+            <a:off x="1234440" y="2944368"/>
+            <a:ext cx="10497312" cy="1325880"/>
+          </a:xfrm>
+          <a:prstGeom prst="rect">
+            <a:avLst/>
+          </a:prstGeom>
+          <a:solidFill>
+            <a:srgbClr val="F2F2F2"/>
+          </a:solidFill>
+          <a:ln w="9525">
+            <a:solidFill>
+              <a:srgbClr val="595959"/>
+            </a:solidFill>
+          </a:ln>
+          <a:effectLst/>
+        </p:spPr>
+        <p:style>
+          <a:lnRef idx="1">
+            <a:schemeClr val="accent1"/>
+          </a:lnRef>
+          <a:fillRef idx="3">
+            <a:schemeClr val="accent1"/>
+          </a:fillRef>
+          <a:effectRef idx="2">
+            <a:schemeClr val="accent1"/>
+          </a:effectRef>
+          <a:fontRef idx="minor">
+            <a:schemeClr val="lt1"/>
+          </a:fontRef>
+        </p:style>
+        <p:txBody>
+          <a:bodyPr rtlCol="0" anchor="ctr" wrap="square" tIns="36576" bIns="36576"/>
+          <a:lstStyle/>
+          <a:p>
+            <a:pPr algn="l">
+              <a:spcAft>
+                <a:spcPts val="200"/>
+              </a:spcAft>
+            </a:pPr>
+            <a:r>
+              <a:rPr sz="1300" b="0">
+                <a:solidFill>
+                  <a:srgbClr val="222222"/>
+                </a:solidFill>
+                <a:latin typeface="IPAGothic"/>
+                <a:eastAsia typeface="IPAGothic"/>
+              </a:rPr>
+              <a:t>中教審報告:評価のための “記録” に労力を割かれ、指導が疎かになる本末転倒を避け、「評価場面を精選する」(働き方改革の観点)。</a:t>
+            </a:r>
+          </a:p>
+          <a:p>
+            <a:pPr algn="l">
+              <a:spcAft>
+                <a:spcPts val="200"/>
+              </a:spcAft>
+            </a:pPr>
+            <a:r>
+              <a:rPr sz="1300" b="0">
+                <a:solidFill>
+                  <a:srgbClr val="222222"/>
+                </a:solidFill>
+                <a:latin typeface="IPAGothic"/>
+                <a:eastAsia typeface="IPAGothic"/>
+              </a:rPr>
+              <a:t>→ 毎時間すべての発言をログに取る運用は、むしろ趣旨に反する。</a:t>
+            </a:r>
+          </a:p>
+        </p:txBody>
+      </p:sp>
+      <p:sp>
+        <p:nvSpPr>
+          <p:cNvPr id="13" name="Oval 12"/>
+          <p:cNvSpPr/>
+          <p:nvPr/>
+        </p:nvSpPr>
+        <p:spPr>
+          <a:xfrm>
+            <a:off x="457200" y="4379976"/>
+            <a:ext cx="640080" cy="1280160"/>
+          </a:xfrm>
+          <a:prstGeom prst="ellipse">
+            <a:avLst/>
+          </a:prstGeom>
+          <a:solidFill>
+            <a:srgbClr val="1F3A5F"/>
+          </a:solidFill>
+          <a:ln>
+            <a:noFill/>
+          </a:ln>
+          <a:effectLst/>
+        </p:spPr>
+        <p:style>
+          <a:lnRef idx="1">
+            <a:schemeClr val="accent1"/>
+          </a:lnRef>
+          <a:fillRef idx="3">
+            <a:schemeClr val="accent1"/>
+          </a:fillRef>
+          <a:effectRef idx="2">
+            <a:schemeClr val="accent1"/>
+          </a:effectRef>
+          <a:fontRef idx="minor">
+            <a:schemeClr val="lt1"/>
+          </a:fontRef>
+        </p:style>
+        <p:txBody>
+          <a:bodyPr rtlCol="0" anchor="ctr" wrap="square" tIns="36576" bIns="36576"/>
+          <a:lstStyle/>
+          <a:p>
+            <a:pPr algn="ctr">
+              <a:spcAft>
+                <a:spcPts val="200"/>
+              </a:spcAft>
+            </a:pPr>
+            <a:r>
+              <a:rPr sz="2000" b="1">
+                <a:solidFill>
+                  <a:srgbClr val="FFFFFF"/>
+                </a:solidFill>
+                <a:latin typeface="IPAGothic"/>
+                <a:eastAsia typeface="IPAGothic"/>
+              </a:rPr>
+              <a:t>3</a:t>
+            </a:r>
+          </a:p>
+        </p:txBody>
+      </p:sp>
+      <p:sp>
+        <p:nvSpPr>
+          <p:cNvPr id="14" name="Rectangle 13"/>
+          <p:cNvSpPr/>
+          <p:nvPr/>
+        </p:nvSpPr>
+        <p:spPr>
+          <a:xfrm>
+            <a:off x="1234440" y="4379976"/>
+            <a:ext cx="10497312" cy="1280160"/>
+          </a:xfrm>
+          <a:prstGeom prst="rect">
+            <a:avLst/>
+          </a:prstGeom>
+          <a:solidFill>
+            <a:srgbClr val="D6E4F0"/>
+          </a:solidFill>
+          <a:ln w="9525">
+            <a:solidFill>
+              <a:srgbClr val="595959"/>
+            </a:solidFill>
+          </a:ln>
+          <a:effectLst/>
+        </p:spPr>
+        <p:style>
+          <a:lnRef idx="1">
+            <a:schemeClr val="accent1"/>
+          </a:lnRef>
+          <a:fillRef idx="3">
+            <a:schemeClr val="accent1"/>
+          </a:fillRef>
+          <a:effectRef idx="2">
+            <a:schemeClr val="accent1"/>
+          </a:effectRef>
+          <a:fontRef idx="minor">
+            <a:schemeClr val="lt1"/>
+          </a:fontRef>
+        </p:style>
+        <p:txBody>
+          <a:bodyPr rtlCol="0" anchor="ctr" wrap="square" tIns="36576" bIns="36576"/>
+          <a:lstStyle/>
+          <a:p>
+            <a:pPr algn="l">
+              <a:spcAft>
+                <a:spcPts val="200"/>
+              </a:spcAft>
+            </a:pPr>
+            <a:r>
+              <a:rPr sz="1300" b="0">
+                <a:solidFill>
+                  <a:srgbClr val="222222"/>
+                </a:solidFill>
+                <a:latin typeface="IPAGothic"/>
+                <a:eastAsia typeface="IPAGothic"/>
+              </a:rPr>
+              <a:t>発言は “評価の材料の一つ”。発言を拾えなかった子・自分からは話さない子は、ノートや振り返りの “記述” で見取る。</a:t>
+            </a:r>
+          </a:p>
+          <a:p>
+            <a:pPr algn="l">
+              <a:spcAft>
+                <a:spcPts val="200"/>
+              </a:spcAft>
+            </a:pPr>
+            <a:r>
+              <a:rPr sz="1300" b="0">
+                <a:solidFill>
+                  <a:srgbClr val="222222"/>
+                </a:solidFill>
+                <a:latin typeface="IPAGothic"/>
+                <a:eastAsia typeface="IPAGothic"/>
+              </a:rPr>
+              <a:t>→ 全員の発言を毎時間拾えなくても、不公平にはならない設計になっている。</a:t>
+            </a:r>
+          </a:p>
+        </p:txBody>
+      </p:sp>
+      <p:sp>
+        <p:nvSpPr>
+          <p:cNvPr id="15" name="Rectangle 14"/>
+          <p:cNvSpPr/>
+          <p:nvPr/>
+        </p:nvSpPr>
+        <p:spPr>
+          <a:xfrm>
+            <a:off x="457200" y="5806440"/>
+            <a:ext cx="11274552" cy="548640"/>
+          </a:xfrm>
+          <a:prstGeom prst="rect">
+            <a:avLst/>
+          </a:prstGeom>
+          <a:solidFill>
+            <a:srgbClr val="C45A11"/>
+          </a:solidFill>
+          <a:ln>
+            <a:noFill/>
+          </a:ln>
+          <a:effectLst/>
+        </p:spPr>
+        <p:style>
+          <a:lnRef idx="1">
+            <a:schemeClr val="accent1"/>
+          </a:lnRef>
+          <a:fillRef idx="3">
+            <a:schemeClr val="accent1"/>
+          </a:fillRef>
+          <a:effectRef idx="2">
+            <a:schemeClr val="accent1"/>
+          </a:effectRef>
+          <a:fontRef idx="minor">
+            <a:schemeClr val="lt1"/>
+          </a:fontRef>
+        </p:style>
+        <p:txBody>
+          <a:bodyPr rtlCol="0" anchor="ctr" wrap="square" tIns="36576" bIns="36576"/>
+          <a:lstStyle/>
+          <a:p>
+            <a:pPr algn="ctr">
+              <a:spcAft>
+                <a:spcPts val="200"/>
+              </a:spcAft>
+            </a:pPr>
+            <a:r>
+              <a:rPr sz="1500" b="1">
+                <a:solidFill>
+                  <a:srgbClr val="FFFFFF"/>
+                </a:solidFill>
+                <a:latin typeface="IPAGothic"/>
+                <a:eastAsia typeface="IPAGothic"/>
+              </a:rPr>
+              <a:t>★「全部を拾う」必要はない。評価場面を絞り、複数の方法を組み合わせる。</a:t>
+            </a:r>
+          </a:p>
+        </p:txBody>
+      </p:sp>
+    </p:spTree>
+  </p:cSld>
+  <p:clrMapOvr>
+    <a:masterClrMapping/>
+  </p:clrMapOvr>
+</p:sld>
+</file>
+
+<file path=ppt/slides/slide24.xml><?xml version="1.0" encoding="utf-8"?>
+<p:sld xmlns:a="http://schemas.openxmlformats.org/drawingml/2006/main" xmlns:p="http://schemas.openxmlformats.org/presentationml/2006/main" xmlns:r="http://schemas.openxmlformats.org/officeDocument/2006/relationships">
+  <p:cSld>
+    <p:spTree>
+      <p:nvGrpSpPr>
+        <p:cNvPr id="1" name=""/>
+        <p:cNvGrpSpPr/>
+        <p:nvPr/>
+      </p:nvGrpSpPr>
+      <p:grpSpPr/>
+      <p:sp>
+        <p:nvSpPr>
+          <p:cNvPr id="2" name="Rectangle 1"/>
+          <p:cNvSpPr/>
+          <p:nvPr/>
+        </p:nvSpPr>
+        <p:spPr>
+          <a:xfrm>
+            <a:off x="0" y="0"/>
+            <a:ext cx="12191695" cy="777240"/>
+          </a:xfrm>
+          <a:prstGeom prst="rect">
+            <a:avLst/>
+          </a:prstGeom>
+          <a:solidFill>
+            <a:srgbClr val="1F3A5F"/>
+          </a:solidFill>
+          <a:ln>
+            <a:noFill/>
+          </a:ln>
+          <a:effectLst/>
+        </p:spPr>
+        <p:style>
+          <a:lnRef idx="1">
+            <a:schemeClr val="accent1"/>
+          </a:lnRef>
+          <a:fillRef idx="3">
+            <a:schemeClr val="accent1"/>
+          </a:fillRef>
+          <a:effectRef idx="2">
+            <a:schemeClr val="accent1"/>
+          </a:effectRef>
+          <a:fontRef idx="minor">
+            <a:schemeClr val="lt1"/>
+          </a:fontRef>
+        </p:style>
+        <p:txBody>
+          <a:bodyPr rtlCol="0" anchor="ctr"/>
+          <a:lstStyle/>
+          <a:p>
+            <a:pPr algn="ctr"/>
+          </a:p>
+        </p:txBody>
+      </p:sp>
+      <p:sp>
+        <p:nvSpPr>
+          <p:cNvPr id="3" name="Rectangle 2"/>
+          <p:cNvSpPr/>
+          <p:nvPr/>
+        </p:nvSpPr>
+        <p:spPr>
+          <a:xfrm>
+            <a:off x="0" y="777240"/>
+            <a:ext cx="12191695" cy="54864"/>
+          </a:xfrm>
+          <a:prstGeom prst="rect">
+            <a:avLst/>
+          </a:prstGeom>
+          <a:solidFill>
+            <a:srgbClr val="C45A11"/>
+          </a:solidFill>
+          <a:ln>
+            <a:noFill/>
+          </a:ln>
+          <a:effectLst/>
+        </p:spPr>
+        <p:style>
+          <a:lnRef idx="1">
+            <a:schemeClr val="accent1"/>
+          </a:lnRef>
+          <a:fillRef idx="3">
+            <a:schemeClr val="accent1"/>
+          </a:fillRef>
+          <a:effectRef idx="2">
+            <a:schemeClr val="accent1"/>
+          </a:effectRef>
+          <a:fontRef idx="minor">
+            <a:schemeClr val="lt1"/>
+          </a:fontRef>
+        </p:style>
+        <p:txBody>
+          <a:bodyPr rtlCol="0" anchor="ctr"/>
+          <a:lstStyle/>
+          <a:p>
+            <a:pPr algn="ctr"/>
+          </a:p>
+        </p:txBody>
+      </p:sp>
+      <p:sp>
+        <p:nvSpPr>
+          <p:cNvPr id="4" name="TextBox 3"/>
+          <p:cNvSpPr txBox="1"/>
+          <p:nvPr/>
+        </p:nvSpPr>
+        <p:spPr>
+          <a:xfrm>
+            <a:off x="365760" y="73152"/>
+            <a:ext cx="10241280" cy="658368"/>
+          </a:xfrm>
+          <a:prstGeom prst="rect">
+            <a:avLst/>
+          </a:prstGeom>
+          <a:noFill/>
+          <a:ln>
+            <a:noFill/>
+          </a:ln>
+        </p:spPr>
+        <p:txBody>
+          <a:bodyPr wrap="square" lIns="73152" rIns="73152" tIns="36576" bIns="36576" anchor="ctr">
+            <a:spAutoFit/>
+          </a:bodyPr>
+          <a:lstStyle/>
+          <a:p>
+            <a:pPr algn="l">
+              <a:spcAft>
+                <a:spcPts val="200"/>
+              </a:spcAft>
+            </a:pPr>
+            <a:r>
+              <a:rPr sz="2100" b="1">
+                <a:solidFill>
+                  <a:srgbClr val="FFFFFF"/>
+                </a:solidFill>
+                <a:latin typeface="IPAGothic"/>
+                <a:eastAsia typeface="IPAGothic"/>
+              </a:rPr>
+              <a:t>Q2 発言を評価対象と“宣言”したら、ウケ狙いの発言を生むのでは?</a:t>
+            </a:r>
+          </a:p>
+        </p:txBody>
+      </p:sp>
+      <p:sp>
+        <p:nvSpPr>
+          <p:cNvPr id="5" name="TextBox 4"/>
+          <p:cNvSpPr txBox="1"/>
+          <p:nvPr/>
+        </p:nvSpPr>
+        <p:spPr>
+          <a:xfrm>
+            <a:off x="10652760" y="73152"/>
+            <a:ext cx="1417320" cy="658368"/>
+          </a:xfrm>
+          <a:prstGeom prst="rect">
+            <a:avLst/>
+          </a:prstGeom>
+          <a:noFill/>
+          <a:ln>
+            <a:noFill/>
+          </a:ln>
+        </p:spPr>
+        <p:txBody>
+          <a:bodyPr wrap="square" lIns="73152" rIns="73152" tIns="36576" bIns="36576" anchor="ctr">
+            <a:spAutoFit/>
+          </a:bodyPr>
+          <a:lstStyle/>
+          <a:p>
+            <a:pPr algn="r">
+              <a:spcAft>
+                <a:spcPts val="200"/>
+              </a:spcAft>
+            </a:pPr>
+            <a:r>
+              <a:rPr sz="1200" b="0">
+                <a:solidFill>
+                  <a:srgbClr val="FFFFFF"/>
+                </a:solidFill>
+                <a:latin typeface="IPAGothic"/>
+                <a:eastAsia typeface="IPAGothic"/>
+              </a:rPr>
+              <a:t>想定問答 2 / 3</a:t>
+            </a:r>
+          </a:p>
+        </p:txBody>
+      </p:sp>
+      <p:sp>
+        <p:nvSpPr>
+          <p:cNvPr id="6" name="Rectangle 5"/>
+          <p:cNvSpPr/>
+          <p:nvPr/>
+        </p:nvSpPr>
+        <p:spPr>
+          <a:xfrm>
+            <a:off x="0" y="6583680"/>
+            <a:ext cx="12191695" cy="274320"/>
+          </a:xfrm>
+          <a:prstGeom prst="rect">
+            <a:avLst/>
+          </a:prstGeom>
+          <a:solidFill>
+            <a:srgbClr val="F2F2F2"/>
+          </a:solidFill>
+          <a:ln>
+            <a:noFill/>
+          </a:ln>
+          <a:effectLst/>
+        </p:spPr>
+        <p:style>
+          <a:lnRef idx="1">
+            <a:schemeClr val="accent1"/>
+          </a:lnRef>
+          <a:fillRef idx="3">
+            <a:schemeClr val="accent1"/>
+          </a:fillRef>
+          <a:effectRef idx="2">
+            <a:schemeClr val="accent1"/>
+          </a:effectRef>
+          <a:fontRef idx="minor">
+            <a:schemeClr val="lt1"/>
+          </a:fontRef>
+        </p:style>
+        <p:txBody>
+          <a:bodyPr rtlCol="0" anchor="ctr"/>
+          <a:lstStyle/>
+          <a:p>
+            <a:pPr algn="ctr"/>
+          </a:p>
+        </p:txBody>
+      </p:sp>
+      <p:sp>
+        <p:nvSpPr>
+          <p:cNvPr id="7" name="TextBox 6"/>
+          <p:cNvSpPr txBox="1"/>
+          <p:nvPr/>
+        </p:nvSpPr>
+        <p:spPr>
+          <a:xfrm>
+            <a:off x="365760" y="6583680"/>
+            <a:ext cx="11430000" cy="274320"/>
+          </a:xfrm>
+          <a:prstGeom prst="rect">
+            <a:avLst/>
+          </a:prstGeom>
+          <a:noFill/>
+          <a:ln>
+            <a:noFill/>
+          </a:ln>
+        </p:spPr>
+        <p:txBody>
+          <a:bodyPr wrap="square" lIns="73152" rIns="73152" tIns="36576" bIns="36576" anchor="ctr">
+            <a:spAutoFit/>
+          </a:bodyPr>
+          <a:lstStyle/>
+          <a:p>
+            <a:pPr algn="l">
+              <a:spcAft>
+                <a:spcPts val="200"/>
+              </a:spcAft>
+            </a:pPr>
+            <a:r>
+              <a:rPr sz="1000" b="0">
+                <a:solidFill>
+                  <a:srgbClr val="595959"/>
+                </a:solidFill>
+                <a:latin typeface="IPAGothic"/>
+                <a:eastAsia typeface="IPAGothic"/>
+              </a:rPr>
+              <a:t>想定問答 ― 「授業中の発言」「教師による行動観察」をめぐって</a:t>
+            </a:r>
+          </a:p>
+        </p:txBody>
+      </p:sp>
+      <p:sp>
+        <p:nvSpPr>
+          <p:cNvPr id="8" name="Rectangle 7"/>
+          <p:cNvSpPr/>
+          <p:nvPr/>
+        </p:nvSpPr>
+        <p:spPr>
+          <a:xfrm>
+            <a:off x="457200" y="960120"/>
+            <a:ext cx="11274552" cy="566928"/>
+          </a:xfrm>
+          <a:prstGeom prst="rect">
+            <a:avLst/>
+          </a:prstGeom>
+          <a:solidFill>
+            <a:srgbClr val="4E7A36"/>
+          </a:solidFill>
+          <a:ln>
+            <a:noFill/>
+          </a:ln>
+          <a:effectLst/>
+        </p:spPr>
+        <p:style>
+          <a:lnRef idx="1">
+            <a:schemeClr val="accent1"/>
+          </a:lnRef>
+          <a:fillRef idx="3">
+            <a:schemeClr val="accent1"/>
+          </a:fillRef>
+          <a:effectRef idx="2">
+            <a:schemeClr val="accent1"/>
+          </a:effectRef>
+          <a:fontRef idx="minor">
+            <a:schemeClr val="lt1"/>
+          </a:fontRef>
+        </p:style>
+        <p:txBody>
+          <a:bodyPr rtlCol="0" anchor="ctr" wrap="square" tIns="36576" bIns="36576"/>
+          <a:lstStyle/>
+          <a:p>
+            <a:pPr algn="ctr">
+              <a:spcAft>
+                <a:spcPts val="200"/>
+              </a:spcAft>
+            </a:pPr>
+            <a:r>
+              <a:rPr sz="1500" b="1">
+                <a:solidFill>
+                  <a:srgbClr val="FFFFFF"/>
+                </a:solidFill>
+                <a:latin typeface="IPAGothic"/>
+                <a:eastAsia typeface="IPAGothic"/>
+              </a:rPr>
+              <a:t>その懸念は正しい ― だから “発言したこと自体” は評価しない設計になっている</a:t>
+            </a:r>
+          </a:p>
+        </p:txBody>
+      </p:sp>
+      <p:sp>
+        <p:nvSpPr>
+          <p:cNvPr id="9" name="Oval 8"/>
+          <p:cNvSpPr/>
+          <p:nvPr/>
+        </p:nvSpPr>
+        <p:spPr>
+          <a:xfrm>
+            <a:off x="457200" y="1783080"/>
+            <a:ext cx="640080" cy="1371600"/>
+          </a:xfrm>
+          <a:prstGeom prst="ellipse">
+            <a:avLst/>
+          </a:prstGeom>
+          <a:solidFill>
+            <a:srgbClr val="1F3A5F"/>
+          </a:solidFill>
+          <a:ln>
+            <a:noFill/>
+          </a:ln>
+          <a:effectLst/>
+        </p:spPr>
+        <p:style>
+          <a:lnRef idx="1">
+            <a:schemeClr val="accent1"/>
+          </a:lnRef>
+          <a:fillRef idx="3">
+            <a:schemeClr val="accent1"/>
+          </a:fillRef>
+          <a:effectRef idx="2">
+            <a:schemeClr val="accent1"/>
+          </a:effectRef>
+          <a:fontRef idx="minor">
+            <a:schemeClr val="lt1"/>
+          </a:fontRef>
+        </p:style>
+        <p:txBody>
+          <a:bodyPr rtlCol="0" anchor="ctr" wrap="square" tIns="36576" bIns="36576"/>
+          <a:lstStyle/>
+          <a:p>
+            <a:pPr algn="ctr">
+              <a:spcAft>
+                <a:spcPts val="200"/>
+              </a:spcAft>
+            </a:pPr>
+            <a:r>
+              <a:rPr sz="2000" b="1">
+                <a:solidFill>
+                  <a:srgbClr val="FFFFFF"/>
+                </a:solidFill>
+                <a:latin typeface="IPAGothic"/>
+                <a:eastAsia typeface="IPAGothic"/>
+              </a:rPr>
+              <a:t>1</a:t>
+            </a:r>
+          </a:p>
+        </p:txBody>
+      </p:sp>
+      <p:sp>
+        <p:nvSpPr>
+          <p:cNvPr id="10" name="Rectangle 9"/>
+          <p:cNvSpPr/>
+          <p:nvPr/>
+        </p:nvSpPr>
+        <p:spPr>
+          <a:xfrm>
+            <a:off x="1234440" y="1783080"/>
+            <a:ext cx="10497312" cy="1371600"/>
+          </a:xfrm>
+          <a:prstGeom prst="rect">
+            <a:avLst/>
+          </a:prstGeom>
+          <a:solidFill>
+            <a:srgbClr val="FBE5D6"/>
+          </a:solidFill>
+          <a:ln w="9525">
+            <a:solidFill>
+              <a:srgbClr val="C45A11"/>
+            </a:solidFill>
+          </a:ln>
+          <a:effectLst/>
+        </p:spPr>
+        <p:style>
+          <a:lnRef idx="1">
+            <a:schemeClr val="accent1"/>
+          </a:lnRef>
+          <a:fillRef idx="3">
+            <a:schemeClr val="accent1"/>
+          </a:fillRef>
+          <a:effectRef idx="2">
+            <a:schemeClr val="accent1"/>
+          </a:effectRef>
+          <a:fontRef idx="minor">
+            <a:schemeClr val="lt1"/>
+          </a:fontRef>
+        </p:style>
+        <p:txBody>
+          <a:bodyPr rtlCol="0" anchor="ctr" wrap="square" tIns="36576" bIns="36576"/>
+          <a:lstStyle/>
+          <a:p>
+            <a:pPr algn="l">
+              <a:spcAft>
+                <a:spcPts val="200"/>
+              </a:spcAft>
+            </a:pPr>
+            <a:r>
+              <a:rPr sz="1300" b="0">
+                <a:solidFill>
+                  <a:srgbClr val="222222"/>
+                </a:solidFill>
+                <a:latin typeface="IPAGothic"/>
+                <a:eastAsia typeface="IPAGothic"/>
+              </a:rPr>
+              <a:t>発言の “回数・積極性” は評価しない【中教審が明確に否定】</a:t>
+            </a:r>
+          </a:p>
+          <a:p>
+            <a:pPr algn="l">
+              <a:spcAft>
+                <a:spcPts val="200"/>
+              </a:spcAft>
+            </a:pPr>
+            <a:r>
+              <a:rPr sz="1300" b="0">
+                <a:solidFill>
+                  <a:srgbClr val="222222"/>
+                </a:solidFill>
+                <a:latin typeface="IPAGothic"/>
+                <a:eastAsia typeface="IPAGothic"/>
+              </a:rPr>
+              <a:t>「単に…積極的な発言を行うなど、性格や行動面の傾向を評価するのではない」。見るのは発言の “中身” に現れる粘り強さ・自己調整。</a:t>
+            </a:r>
+          </a:p>
+          <a:p>
+            <a:pPr algn="l">
+              <a:spcAft>
+                <a:spcPts val="200"/>
+              </a:spcAft>
+            </a:pPr>
+            <a:r>
+              <a:rPr sz="1300" b="0">
+                <a:solidFill>
+                  <a:srgbClr val="222222"/>
+                </a:solidFill>
+                <a:latin typeface="IPAGothic"/>
+                <a:eastAsia typeface="IPAGothic"/>
+              </a:rPr>
+              <a:t>→ “先生にウケるための発言” では評価は上がらない(旧「関心・意欲・態度」の失敗形)。</a:t>
+            </a:r>
+          </a:p>
+        </p:txBody>
+      </p:sp>
+      <p:sp>
+        <p:nvSpPr>
+          <p:cNvPr id="11" name="Oval 10"/>
+          <p:cNvSpPr/>
+          <p:nvPr/>
+        </p:nvSpPr>
+        <p:spPr>
+          <a:xfrm>
+            <a:off x="457200" y="3264408"/>
+            <a:ext cx="640080" cy="1371600"/>
+          </a:xfrm>
+          <a:prstGeom prst="ellipse">
+            <a:avLst/>
+          </a:prstGeom>
+          <a:solidFill>
+            <a:srgbClr val="1F3A5F"/>
+          </a:solidFill>
+          <a:ln>
+            <a:noFill/>
+          </a:ln>
+          <a:effectLst/>
+        </p:spPr>
+        <p:style>
+          <a:lnRef idx="1">
+            <a:schemeClr val="accent1"/>
+          </a:lnRef>
+          <a:fillRef idx="3">
+            <a:schemeClr val="accent1"/>
+          </a:fillRef>
+          <a:effectRef idx="2">
+            <a:schemeClr val="accent1"/>
+          </a:effectRef>
+          <a:fontRef idx="minor">
+            <a:schemeClr val="lt1"/>
+          </a:fontRef>
+        </p:style>
+        <p:txBody>
+          <a:bodyPr rtlCol="0" anchor="ctr" wrap="square" tIns="36576" bIns="36576"/>
+          <a:lstStyle/>
+          <a:p>
+            <a:pPr algn="ctr">
+              <a:spcAft>
+                <a:spcPts val="200"/>
+              </a:spcAft>
+            </a:pPr>
+            <a:r>
+              <a:rPr sz="2000" b="1">
+                <a:solidFill>
+                  <a:srgbClr val="FFFFFF"/>
+                </a:solidFill>
+                <a:latin typeface="IPAGothic"/>
+                <a:eastAsia typeface="IPAGothic"/>
+              </a:rPr>
+              <a:t>2</a:t>
+            </a:r>
+          </a:p>
+        </p:txBody>
+      </p:sp>
+      <p:sp>
+        <p:nvSpPr>
+          <p:cNvPr id="12" name="Rectangle 11"/>
+          <p:cNvSpPr/>
+          <p:nvPr/>
+        </p:nvSpPr>
+        <p:spPr>
+          <a:xfrm>
+            <a:off x="1234440" y="3264408"/>
+            <a:ext cx="10497312" cy="1371600"/>
+          </a:xfrm>
+          <a:prstGeom prst="rect">
+            <a:avLst/>
+          </a:prstGeom>
+          <a:solidFill>
+            <a:srgbClr val="E2EFDA"/>
+          </a:solidFill>
+          <a:ln w="9525">
+            <a:solidFill>
+              <a:srgbClr val="4E7A36"/>
+            </a:solidFill>
+          </a:ln>
+          <a:effectLst/>
+        </p:spPr>
+        <p:style>
+          <a:lnRef idx="1">
+            <a:schemeClr val="accent1"/>
+          </a:lnRef>
+          <a:fillRef idx="3">
+            <a:schemeClr val="accent1"/>
+          </a:fillRef>
+          <a:effectRef idx="2">
+            <a:schemeClr val="accent1"/>
+          </a:effectRef>
+          <a:fontRef idx="minor">
+            <a:schemeClr val="lt1"/>
+          </a:fontRef>
+        </p:style>
+        <p:txBody>
+          <a:bodyPr rtlCol="0" anchor="ctr" wrap="square" tIns="36576" bIns="36576"/>
+          <a:lstStyle/>
+          <a:p>
+            <a:pPr algn="l">
+              <a:spcAft>
+                <a:spcPts val="200"/>
+              </a:spcAft>
+            </a:pPr>
+            <a:r>
+              <a:rPr sz="1300" b="0">
+                <a:solidFill>
+                  <a:srgbClr val="222222"/>
+                </a:solidFill>
+                <a:latin typeface="IPAGothic"/>
+                <a:eastAsia typeface="IPAGothic"/>
+              </a:rPr>
+              <a:t>“賢い子だけ得をする” を防ぐ = 発問の工夫 ＋ 記述の併用</a:t>
+            </a:r>
+          </a:p>
+          <a:p>
+            <a:pPr algn="l">
+              <a:spcAft>
+                <a:spcPts val="200"/>
+              </a:spcAft>
+            </a:pPr>
+            <a:r>
+              <a:rPr sz="1300" b="0">
+                <a:solidFill>
+                  <a:srgbClr val="222222"/>
+                </a:solidFill>
+                <a:latin typeface="IPAGothic"/>
+                <a:eastAsia typeface="IPAGothic"/>
+              </a:rPr>
+              <a:t>自発の挙手を待たず、教師が「全員が自分の学びを振り返る発問」を投げる(例:「最初と比べて考えが変わったところは?」)。</a:t>
+            </a:r>
+          </a:p>
+          <a:p>
+            <a:pPr algn="l">
+              <a:spcAft>
+                <a:spcPts val="200"/>
+              </a:spcAft>
+            </a:pPr>
+            <a:r>
+              <a:rPr sz="1300" b="0">
+                <a:solidFill>
+                  <a:srgbClr val="222222"/>
+                </a:solidFill>
+                <a:latin typeface="IPAGothic"/>
+                <a:eastAsia typeface="IPAGothic"/>
+              </a:rPr>
+              <a:t>→ 発言が苦手な子は、その振り返りを “記述” で残す。発言できる子だけ有利を平らにする。</a:t>
+            </a:r>
+          </a:p>
+        </p:txBody>
+      </p:sp>
+      <p:sp>
+        <p:nvSpPr>
+          <p:cNvPr id="13" name="Oval 12"/>
+          <p:cNvSpPr/>
+          <p:nvPr/>
+        </p:nvSpPr>
+        <p:spPr>
+          <a:xfrm>
+            <a:off x="457200" y="4700016"/>
+            <a:ext cx="640080" cy="1051560"/>
+          </a:xfrm>
+          <a:prstGeom prst="ellipse">
+            <a:avLst/>
+          </a:prstGeom>
+          <a:solidFill>
+            <a:srgbClr val="1F3A5F"/>
+          </a:solidFill>
+          <a:ln>
+            <a:noFill/>
+          </a:ln>
+          <a:effectLst/>
+        </p:spPr>
+        <p:style>
+          <a:lnRef idx="1">
+            <a:schemeClr val="accent1"/>
+          </a:lnRef>
+          <a:fillRef idx="3">
+            <a:schemeClr val="accent1"/>
+          </a:fillRef>
+          <a:effectRef idx="2">
+            <a:schemeClr val="accent1"/>
+          </a:effectRef>
+          <a:fontRef idx="minor">
+            <a:schemeClr val="lt1"/>
+          </a:fontRef>
+        </p:style>
+        <p:txBody>
+          <a:bodyPr rtlCol="0" anchor="ctr" wrap="square" tIns="36576" bIns="36576"/>
+          <a:lstStyle/>
+          <a:p>
+            <a:pPr algn="ctr">
+              <a:spcAft>
+                <a:spcPts val="200"/>
+              </a:spcAft>
+            </a:pPr>
+            <a:r>
+              <a:rPr sz="2000" b="1">
+                <a:solidFill>
+                  <a:srgbClr val="FFFFFF"/>
+                </a:solidFill>
+                <a:latin typeface="IPAGothic"/>
+                <a:eastAsia typeface="IPAGothic"/>
+              </a:rPr>
+              <a:t>3</a:t>
+            </a:r>
+          </a:p>
+        </p:txBody>
+      </p:sp>
+      <p:sp>
+        <p:nvSpPr>
+          <p:cNvPr id="14" name="Rectangle 13"/>
+          <p:cNvSpPr/>
+          <p:nvPr/>
+        </p:nvSpPr>
+        <p:spPr>
+          <a:xfrm>
+            <a:off x="1234440" y="4700016"/>
+            <a:ext cx="10497312" cy="1051560"/>
+          </a:xfrm>
+          <a:prstGeom prst="rect">
+            <a:avLst/>
+          </a:prstGeom>
+          <a:solidFill>
+            <a:srgbClr val="D6E4F0"/>
+          </a:solidFill>
+          <a:ln w="9525">
+            <a:solidFill>
+              <a:srgbClr val="595959"/>
+            </a:solidFill>
+          </a:ln>
+          <a:effectLst/>
+        </p:spPr>
+        <p:style>
+          <a:lnRef idx="1">
+            <a:schemeClr val="accent1"/>
+          </a:lnRef>
+          <a:fillRef idx="3">
+            <a:schemeClr val="accent1"/>
+          </a:fillRef>
+          <a:effectRef idx="2">
+            <a:schemeClr val="accent1"/>
+          </a:effectRef>
+          <a:fontRef idx="minor">
+            <a:schemeClr val="lt1"/>
+          </a:fontRef>
+        </p:style>
+        <p:txBody>
+          <a:bodyPr rtlCol="0" anchor="ctr" wrap="square" tIns="36576" bIns="36576"/>
+          <a:lstStyle/>
+          <a:p>
+            <a:pPr algn="l">
+              <a:spcAft>
+                <a:spcPts val="200"/>
+              </a:spcAft>
+            </a:pPr>
+            <a:r>
+              <a:rPr sz="1300" b="0">
+                <a:solidFill>
+                  <a:srgbClr val="222222"/>
+                </a:solidFill>
+                <a:latin typeface="IPAGothic"/>
+                <a:eastAsia typeface="IPAGothic"/>
+              </a:rPr>
+              <a:t>“教師の期待する振る舞いを子どもが過度に意識する” 問題は国も認識 →</a:t>
+            </a:r>
+          </a:p>
+          <a:p>
+            <a:pPr algn="l">
+              <a:spcAft>
+                <a:spcPts val="200"/>
+              </a:spcAft>
+            </a:pPr>
+            <a:r>
+              <a:rPr sz="1300" b="0">
+                <a:solidFill>
+                  <a:srgbClr val="222222"/>
+                </a:solidFill>
+                <a:latin typeface="IPAGothic"/>
+                <a:eastAsia typeface="IPAGothic"/>
+              </a:rPr>
+              <a:t>2025年方針(態度を評定外=個人内評価へ)の理由そのもの。先生の懸念は国レベルで共有。</a:t>
+            </a:r>
+          </a:p>
+        </p:txBody>
+      </p:sp>
+      <p:sp>
+        <p:nvSpPr>
+          <p:cNvPr id="15" name="Rectangle 14"/>
+          <p:cNvSpPr/>
+          <p:nvPr/>
+        </p:nvSpPr>
+        <p:spPr>
+          <a:xfrm>
+            <a:off x="457200" y="5852160"/>
+            <a:ext cx="11274552" cy="502920"/>
+          </a:xfrm>
+          <a:prstGeom prst="rect">
+            <a:avLst/>
+          </a:prstGeom>
+          <a:solidFill>
+            <a:srgbClr val="C45A11"/>
+          </a:solidFill>
+          <a:ln>
+            <a:noFill/>
+          </a:ln>
+          <a:effectLst/>
+        </p:spPr>
+        <p:style>
+          <a:lnRef idx="1">
+            <a:schemeClr val="accent1"/>
+          </a:lnRef>
+          <a:fillRef idx="3">
+            <a:schemeClr val="accent1"/>
+          </a:fillRef>
+          <a:effectRef idx="2">
+            <a:schemeClr val="accent1"/>
+          </a:effectRef>
+          <a:fontRef idx="minor">
+            <a:schemeClr val="lt1"/>
+          </a:fontRef>
+        </p:style>
+        <p:txBody>
+          <a:bodyPr rtlCol="0" anchor="ctr" wrap="square" tIns="36576" bIns="36576"/>
+          <a:lstStyle/>
+          <a:p>
+            <a:pPr algn="ctr">
+              <a:spcAft>
+                <a:spcPts val="200"/>
+              </a:spcAft>
+            </a:pPr>
+            <a:r>
+              <a:rPr sz="1400" b="1">
+                <a:solidFill>
+                  <a:srgbClr val="FFFFFF"/>
+                </a:solidFill>
+                <a:latin typeface="IPAGothic"/>
+                <a:eastAsia typeface="IPAGothic"/>
+              </a:rPr>
+              <a:t>★ 評価したいのは “演技” ではなく “学びの調整”。だからウケ狙いの演技はむしろ対象から外す。</a:t>
+            </a:r>
+          </a:p>
+        </p:txBody>
+      </p:sp>
+    </p:spTree>
+  </p:cSld>
+  <p:clrMapOvr>
+    <a:masterClrMapping/>
+  </p:clrMapOvr>
+</p:sld>
+</file>
+
+<file path=ppt/slides/slide25.xml><?xml version="1.0" encoding="utf-8"?>
+<p:sld xmlns:a="http://schemas.openxmlformats.org/drawingml/2006/main" xmlns:p="http://schemas.openxmlformats.org/presentationml/2006/main" xmlns:r="http://schemas.openxmlformats.org/officeDocument/2006/relationships">
+  <p:cSld>
+    <p:spTree>
+      <p:nvGrpSpPr>
+        <p:cNvPr id="1" name=""/>
+        <p:cNvGrpSpPr/>
+        <p:nvPr/>
+      </p:nvGrpSpPr>
+      <p:grpSpPr/>
+      <p:sp>
+        <p:nvSpPr>
+          <p:cNvPr id="2" name="Rectangle 1"/>
+          <p:cNvSpPr/>
+          <p:nvPr/>
+        </p:nvSpPr>
+        <p:spPr>
+          <a:xfrm>
+            <a:off x="0" y="0"/>
+            <a:ext cx="12191695" cy="777240"/>
+          </a:xfrm>
+          <a:prstGeom prst="rect">
+            <a:avLst/>
+          </a:prstGeom>
+          <a:solidFill>
+            <a:srgbClr val="1F3A5F"/>
+          </a:solidFill>
+          <a:ln>
+            <a:noFill/>
+          </a:ln>
+          <a:effectLst/>
+        </p:spPr>
+        <p:style>
+          <a:lnRef idx="1">
+            <a:schemeClr val="accent1"/>
+          </a:lnRef>
+          <a:fillRef idx="3">
+            <a:schemeClr val="accent1"/>
+          </a:fillRef>
+          <a:effectRef idx="2">
+            <a:schemeClr val="accent1"/>
+          </a:effectRef>
+          <a:fontRef idx="minor">
+            <a:schemeClr val="lt1"/>
+          </a:fontRef>
+        </p:style>
+        <p:txBody>
+          <a:bodyPr rtlCol="0" anchor="ctr"/>
+          <a:lstStyle/>
+          <a:p>
+            <a:pPr algn="ctr"/>
+          </a:p>
+        </p:txBody>
+      </p:sp>
+      <p:sp>
+        <p:nvSpPr>
+          <p:cNvPr id="3" name="Rectangle 2"/>
+          <p:cNvSpPr/>
+          <p:nvPr/>
+        </p:nvSpPr>
+        <p:spPr>
+          <a:xfrm>
+            <a:off x="0" y="777240"/>
+            <a:ext cx="12191695" cy="54864"/>
+          </a:xfrm>
+          <a:prstGeom prst="rect">
+            <a:avLst/>
+          </a:prstGeom>
+          <a:solidFill>
+            <a:srgbClr val="C45A11"/>
+          </a:solidFill>
+          <a:ln>
+            <a:noFill/>
+          </a:ln>
+          <a:effectLst/>
+        </p:spPr>
+        <p:style>
+          <a:lnRef idx="1">
+            <a:schemeClr val="accent1"/>
+          </a:lnRef>
+          <a:fillRef idx="3">
+            <a:schemeClr val="accent1"/>
+          </a:fillRef>
+          <a:effectRef idx="2">
+            <a:schemeClr val="accent1"/>
+          </a:effectRef>
+          <a:fontRef idx="minor">
+            <a:schemeClr val="lt1"/>
+          </a:fontRef>
+        </p:style>
+        <p:txBody>
+          <a:bodyPr rtlCol="0" anchor="ctr"/>
+          <a:lstStyle/>
+          <a:p>
+            <a:pPr algn="ctr"/>
+          </a:p>
+        </p:txBody>
+      </p:sp>
+      <p:sp>
+        <p:nvSpPr>
+          <p:cNvPr id="4" name="TextBox 3"/>
+          <p:cNvSpPr txBox="1"/>
+          <p:nvPr/>
+        </p:nvSpPr>
+        <p:spPr>
+          <a:xfrm>
+            <a:off x="365760" y="73152"/>
+            <a:ext cx="10241280" cy="658368"/>
+          </a:xfrm>
+          <a:prstGeom prst="rect">
+            <a:avLst/>
+          </a:prstGeom>
+          <a:noFill/>
+          <a:ln>
+            <a:noFill/>
+          </a:ln>
+        </p:spPr>
+        <p:txBody>
+          <a:bodyPr wrap="square" lIns="73152" rIns="73152" tIns="36576" bIns="36576" anchor="ctr">
+            <a:spAutoFit/>
+          </a:bodyPr>
+          <a:lstStyle/>
+          <a:p>
+            <a:pPr algn="l">
+              <a:spcAft>
+                <a:spcPts val="200"/>
+              </a:spcAft>
+            </a:pPr>
+            <a:r>
+              <a:rPr sz="2100" b="1">
+                <a:solidFill>
+                  <a:srgbClr val="FFFFFF"/>
+                </a:solidFill>
+                <a:latin typeface="IPAGothic"/>
+                <a:eastAsia typeface="IPAGothic"/>
+              </a:rPr>
+              <a:t>Q3「教師による行動観察」― 主観が入るのでは?</a:t>
+            </a:r>
+          </a:p>
+        </p:txBody>
+      </p:sp>
+      <p:sp>
+        <p:nvSpPr>
+          <p:cNvPr id="5" name="TextBox 4"/>
+          <p:cNvSpPr txBox="1"/>
+          <p:nvPr/>
+        </p:nvSpPr>
+        <p:spPr>
+          <a:xfrm>
+            <a:off x="10652760" y="73152"/>
+            <a:ext cx="1417320" cy="658368"/>
+          </a:xfrm>
+          <a:prstGeom prst="rect">
+            <a:avLst/>
+          </a:prstGeom>
+          <a:noFill/>
+          <a:ln>
+            <a:noFill/>
+          </a:ln>
+        </p:spPr>
+        <p:txBody>
+          <a:bodyPr wrap="square" lIns="73152" rIns="73152" tIns="36576" bIns="36576" anchor="ctr">
+            <a:spAutoFit/>
+          </a:bodyPr>
+          <a:lstStyle/>
+          <a:p>
+            <a:pPr algn="r">
+              <a:spcAft>
+                <a:spcPts val="200"/>
+              </a:spcAft>
+            </a:pPr>
+            <a:r>
+              <a:rPr sz="1200" b="0">
+                <a:solidFill>
+                  <a:srgbClr val="FFFFFF"/>
+                </a:solidFill>
+                <a:latin typeface="IPAGothic"/>
+                <a:eastAsia typeface="IPAGothic"/>
+              </a:rPr>
+              <a:t>想定問答 3 / 3</a:t>
+            </a:r>
+          </a:p>
+        </p:txBody>
+      </p:sp>
+      <p:sp>
+        <p:nvSpPr>
+          <p:cNvPr id="6" name="Rectangle 5"/>
+          <p:cNvSpPr/>
+          <p:nvPr/>
+        </p:nvSpPr>
+        <p:spPr>
+          <a:xfrm>
+            <a:off x="0" y="6583680"/>
+            <a:ext cx="12191695" cy="274320"/>
+          </a:xfrm>
+          <a:prstGeom prst="rect">
+            <a:avLst/>
+          </a:prstGeom>
+          <a:solidFill>
+            <a:srgbClr val="F2F2F2"/>
+          </a:solidFill>
+          <a:ln>
+            <a:noFill/>
+          </a:ln>
+          <a:effectLst/>
+        </p:spPr>
+        <p:style>
+          <a:lnRef idx="1">
+            <a:schemeClr val="accent1"/>
+          </a:lnRef>
+          <a:fillRef idx="3">
+            <a:schemeClr val="accent1"/>
+          </a:fillRef>
+          <a:effectRef idx="2">
+            <a:schemeClr val="accent1"/>
+          </a:effectRef>
+          <a:fontRef idx="minor">
+            <a:schemeClr val="lt1"/>
+          </a:fontRef>
+        </p:style>
+        <p:txBody>
+          <a:bodyPr rtlCol="0" anchor="ctr"/>
+          <a:lstStyle/>
+          <a:p>
+            <a:pPr algn="ctr"/>
+          </a:p>
+        </p:txBody>
+      </p:sp>
+      <p:sp>
+        <p:nvSpPr>
+          <p:cNvPr id="7" name="TextBox 6"/>
+          <p:cNvSpPr txBox="1"/>
+          <p:nvPr/>
+        </p:nvSpPr>
+        <p:spPr>
+          <a:xfrm>
+            <a:off x="365760" y="6583680"/>
+            <a:ext cx="11430000" cy="274320"/>
+          </a:xfrm>
+          <a:prstGeom prst="rect">
+            <a:avLst/>
+          </a:prstGeom>
+          <a:noFill/>
+          <a:ln>
+            <a:noFill/>
+          </a:ln>
+        </p:spPr>
+        <p:txBody>
+          <a:bodyPr wrap="square" lIns="73152" rIns="73152" tIns="36576" bIns="36576" anchor="ctr">
+            <a:spAutoFit/>
+          </a:bodyPr>
+          <a:lstStyle/>
+          <a:p>
+            <a:pPr algn="l">
+              <a:spcAft>
+                <a:spcPts val="200"/>
+              </a:spcAft>
+            </a:pPr>
+            <a:r>
+              <a:rPr sz="1000" b="0">
+                <a:solidFill>
+                  <a:srgbClr val="595959"/>
+                </a:solidFill>
+                <a:latin typeface="IPAGothic"/>
+                <a:eastAsia typeface="IPAGothic"/>
+              </a:rPr>
+              <a:t>想定問答 ― 「授業中の発言」「教師による行動観察」をめぐって</a:t>
+            </a:r>
+          </a:p>
+        </p:txBody>
+      </p:sp>
+      <p:sp>
+        <p:nvSpPr>
+          <p:cNvPr id="8" name="Rectangle 7"/>
+          <p:cNvSpPr/>
+          <p:nvPr/>
+        </p:nvSpPr>
+        <p:spPr>
+          <a:xfrm>
+            <a:off x="457200" y="960120"/>
+            <a:ext cx="11274552" cy="566928"/>
+          </a:xfrm>
+          <a:prstGeom prst="rect">
+            <a:avLst/>
+          </a:prstGeom>
+          <a:solidFill>
+            <a:srgbClr val="2E5C8A"/>
+          </a:solidFill>
+          <a:ln>
+            <a:noFill/>
+          </a:ln>
+          <a:effectLst/>
+        </p:spPr>
+        <p:style>
+          <a:lnRef idx="1">
+            <a:schemeClr val="accent1"/>
+          </a:lnRef>
+          <a:fillRef idx="3">
+            <a:schemeClr val="accent1"/>
+          </a:fillRef>
+          <a:effectRef idx="2">
+            <a:schemeClr val="accent1"/>
+          </a:effectRef>
+          <a:fontRef idx="minor">
+            <a:schemeClr val="lt1"/>
+          </a:fontRef>
+        </p:style>
+        <p:txBody>
+          <a:bodyPr rtlCol="0" anchor="ctr" wrap="square" tIns="36576" bIns="36576"/>
+          <a:lstStyle/>
+          <a:p>
+            <a:pPr algn="ctr">
+              <a:spcAft>
+                <a:spcPts val="200"/>
+              </a:spcAft>
+            </a:pPr>
+            <a:r>
+              <a:rPr sz="1400" b="1">
+                <a:solidFill>
+                  <a:srgbClr val="FFFFFF"/>
+                </a:solidFill>
+                <a:latin typeface="IPAGothic"/>
+                <a:eastAsia typeface="IPAGothic"/>
+              </a:rPr>
+              <a:t>目指すのは “ゼロ主観(機械的客観)” ではなく、“説明できる専門的判断”(妥当性・信頼性の確保)</a:t>
+            </a:r>
+          </a:p>
+        </p:txBody>
+      </p:sp>
+      <p:sp>
+        <p:nvSpPr>
+          <p:cNvPr id="9" name="Rectangle 8"/>
+          <p:cNvSpPr/>
+          <p:nvPr/>
+        </p:nvSpPr>
+        <p:spPr>
+          <a:xfrm>
+            <a:off x="457200" y="1737360"/>
+            <a:ext cx="11274552" cy="384048"/>
+          </a:xfrm>
+          <a:prstGeom prst="rect">
+            <a:avLst/>
+          </a:prstGeom>
+          <a:solidFill>
+            <a:srgbClr val="1F3A5F"/>
+          </a:solidFill>
+          <a:ln>
+            <a:noFill/>
+          </a:ln>
+          <a:effectLst/>
+        </p:spPr>
+        <p:style>
+          <a:lnRef idx="1">
+            <a:schemeClr val="accent1"/>
+          </a:lnRef>
+          <a:fillRef idx="3">
+            <a:schemeClr val="accent1"/>
+          </a:fillRef>
+          <a:effectRef idx="2">
+            <a:schemeClr val="accent1"/>
+          </a:effectRef>
+          <a:fontRef idx="minor">
+            <a:schemeClr val="lt1"/>
+          </a:fontRef>
+        </p:style>
+        <p:txBody>
+          <a:bodyPr rtlCol="0" anchor="ctr" wrap="square" tIns="36576" bIns="36576"/>
+          <a:lstStyle/>
+          <a:p>
+            <a:pPr algn="l">
+              <a:spcAft>
+                <a:spcPts val="200"/>
+              </a:spcAft>
+            </a:pPr>
+            <a:r>
+              <a:rPr sz="1400" b="1">
+                <a:solidFill>
+                  <a:srgbClr val="FFFFFF"/>
+                </a:solidFill>
+                <a:latin typeface="IPAGothic"/>
+                <a:eastAsia typeface="IPAGothic"/>
+              </a:rPr>
+              <a:t>主観を “統制” する5つの装置(すべて公的資料に基づく)</a:t>
+            </a:r>
+          </a:p>
+        </p:txBody>
+      </p:sp>
+      <p:sp>
+        <p:nvSpPr>
+          <p:cNvPr id="10" name="Rectangle 9"/>
+          <p:cNvSpPr/>
+          <p:nvPr/>
+        </p:nvSpPr>
+        <p:spPr>
+          <a:xfrm>
+            <a:off x="457200" y="2194560"/>
+            <a:ext cx="566928" cy="621792"/>
+          </a:xfrm>
+          <a:prstGeom prst="rect">
+            <a:avLst/>
+          </a:prstGeom>
+          <a:solidFill>
+            <a:srgbClr val="1F3A5F"/>
+          </a:solidFill>
+          <a:ln>
+            <a:noFill/>
+          </a:ln>
+          <a:effectLst/>
+        </p:spPr>
+        <p:style>
+          <a:lnRef idx="1">
+            <a:schemeClr val="accent1"/>
+          </a:lnRef>
+          <a:fillRef idx="3">
+            <a:schemeClr val="accent1"/>
+          </a:fillRef>
+          <a:effectRef idx="2">
+            <a:schemeClr val="accent1"/>
+          </a:effectRef>
+          <a:fontRef idx="minor">
+            <a:schemeClr val="lt1"/>
+          </a:fontRef>
+        </p:style>
+        <p:txBody>
+          <a:bodyPr rtlCol="0" anchor="ctr" wrap="square" tIns="36576" bIns="36576"/>
+          <a:lstStyle/>
+          <a:p>
+            <a:pPr algn="ctr">
+              <a:spcAft>
+                <a:spcPts val="200"/>
+              </a:spcAft>
+            </a:pPr>
+            <a:r>
+              <a:rPr sz="1700" b="1">
+                <a:solidFill>
+                  <a:srgbClr val="FFFFFF"/>
+                </a:solidFill>
+                <a:latin typeface="IPAGothic"/>
+                <a:eastAsia typeface="IPAGothic"/>
+              </a:rPr>
+              <a:t>①</a:t>
+            </a:r>
+          </a:p>
+        </p:txBody>
+      </p:sp>
+      <p:sp>
+        <p:nvSpPr>
+          <p:cNvPr id="11" name="Rectangle 10"/>
+          <p:cNvSpPr/>
+          <p:nvPr/>
+        </p:nvSpPr>
+        <p:spPr>
+          <a:xfrm>
+            <a:off x="1069848" y="2194560"/>
+            <a:ext cx="2788920" cy="621792"/>
+          </a:xfrm>
+          <a:prstGeom prst="rect">
+            <a:avLst/>
+          </a:prstGeom>
+          <a:solidFill>
+            <a:srgbClr val="D6E4F0"/>
+          </a:solidFill>
+          <a:ln w="6350">
+            <a:solidFill>
+              <a:srgbClr val="595959"/>
+            </a:solidFill>
+          </a:ln>
+          <a:effectLst/>
+        </p:spPr>
+        <p:style>
+          <a:lnRef idx="1">
+            <a:schemeClr val="accent1"/>
+          </a:lnRef>
+          <a:fillRef idx="3">
+            <a:schemeClr val="accent1"/>
+          </a:fillRef>
+          <a:effectRef idx="2">
+            <a:schemeClr val="accent1"/>
+          </a:effectRef>
+          <a:fontRef idx="minor">
+            <a:schemeClr val="lt1"/>
+          </a:fontRef>
+        </p:style>
+        <p:txBody>
+          <a:bodyPr rtlCol="0" anchor="ctr" wrap="square" tIns="36576" bIns="36576"/>
+          <a:lstStyle/>
+          <a:p>
+            <a:pPr algn="ctr">
+              <a:spcAft>
+                <a:spcPts val="200"/>
+              </a:spcAft>
+            </a:pPr>
+            <a:r>
+              <a:rPr sz="1250" b="1">
+                <a:solidFill>
+                  <a:srgbClr val="1F3A5F"/>
+                </a:solidFill>
+                <a:latin typeface="IPAGothic"/>
+                <a:eastAsia typeface="IPAGothic"/>
+              </a:rPr>
+              <a:t>目標準拠評価</a:t>
+            </a:r>
+          </a:p>
+        </p:txBody>
+      </p:sp>
+      <p:sp>
+        <p:nvSpPr>
+          <p:cNvPr id="12" name="Rectangle 11"/>
+          <p:cNvSpPr/>
+          <p:nvPr/>
+        </p:nvSpPr>
+        <p:spPr>
+          <a:xfrm>
+            <a:off x="3904487" y="2194560"/>
+            <a:ext cx="7827264" cy="621792"/>
+          </a:xfrm>
+          <a:prstGeom prst="rect">
+            <a:avLst/>
+          </a:prstGeom>
+          <a:solidFill>
+            <a:srgbClr val="FFFFFF"/>
+          </a:solidFill>
+          <a:ln w="6350">
+            <a:solidFill>
+              <a:srgbClr val="595959"/>
+            </a:solidFill>
+          </a:ln>
+          <a:effectLst/>
+        </p:spPr>
+        <p:style>
+          <a:lnRef idx="1">
+            <a:schemeClr val="accent1"/>
+          </a:lnRef>
+          <a:fillRef idx="3">
+            <a:schemeClr val="accent1"/>
+          </a:fillRef>
+          <a:effectRef idx="2">
+            <a:schemeClr val="accent1"/>
+          </a:effectRef>
+          <a:fontRef idx="minor">
+            <a:schemeClr val="lt1"/>
+          </a:fontRef>
+        </p:style>
+        <p:txBody>
+          <a:bodyPr rtlCol="0" anchor="ctr" wrap="square" tIns="36576" bIns="36576"/>
+          <a:lstStyle/>
+          <a:p>
+            <a:pPr algn="l">
+              <a:spcAft>
+                <a:spcPts val="200"/>
+              </a:spcAft>
+            </a:pPr>
+            <a:r>
+              <a:rPr sz="1200" b="0">
+                <a:solidFill>
+                  <a:srgbClr val="222222"/>
+                </a:solidFill>
+                <a:latin typeface="IPAGothic"/>
+                <a:eastAsia typeface="IPAGothic"/>
+              </a:rPr>
+              <a:t>他の子と比べない。事前に決めた “規準” に照らす(=印象での比較・序列化を排除)</a:t>
+            </a:r>
+          </a:p>
+        </p:txBody>
+      </p:sp>
+      <p:sp>
+        <p:nvSpPr>
+          <p:cNvPr id="13" name="Rectangle 12"/>
+          <p:cNvSpPr/>
+          <p:nvPr/>
+        </p:nvSpPr>
+        <p:spPr>
+          <a:xfrm>
+            <a:off x="457200" y="2852928"/>
+            <a:ext cx="566928" cy="621792"/>
+          </a:xfrm>
+          <a:prstGeom prst="rect">
+            <a:avLst/>
+          </a:prstGeom>
+          <a:solidFill>
+            <a:srgbClr val="1F3A5F"/>
+          </a:solidFill>
+          <a:ln>
+            <a:noFill/>
+          </a:ln>
+          <a:effectLst/>
+        </p:spPr>
+        <p:style>
+          <a:lnRef idx="1">
+            <a:schemeClr val="accent1"/>
+          </a:lnRef>
+          <a:fillRef idx="3">
+            <a:schemeClr val="accent1"/>
+          </a:fillRef>
+          <a:effectRef idx="2">
+            <a:schemeClr val="accent1"/>
+          </a:effectRef>
+          <a:fontRef idx="minor">
+            <a:schemeClr val="lt1"/>
+          </a:fontRef>
+        </p:style>
+        <p:txBody>
+          <a:bodyPr rtlCol="0" anchor="ctr" wrap="square" tIns="36576" bIns="36576"/>
+          <a:lstStyle/>
+          <a:p>
+            <a:pPr algn="ctr">
+              <a:spcAft>
+                <a:spcPts val="200"/>
+              </a:spcAft>
+            </a:pPr>
+            <a:r>
+              <a:rPr sz="1700" b="1">
+                <a:solidFill>
+                  <a:srgbClr val="FFFFFF"/>
+                </a:solidFill>
+                <a:latin typeface="IPAGothic"/>
+                <a:eastAsia typeface="IPAGothic"/>
+              </a:rPr>
+              <a:t>②</a:t>
+            </a:r>
+          </a:p>
+        </p:txBody>
+      </p:sp>
+      <p:sp>
+        <p:nvSpPr>
+          <p:cNvPr id="14" name="Rectangle 13"/>
+          <p:cNvSpPr/>
+          <p:nvPr/>
+        </p:nvSpPr>
+        <p:spPr>
+          <a:xfrm>
+            <a:off x="1069848" y="2852928"/>
+            <a:ext cx="2788920" cy="621792"/>
+          </a:xfrm>
+          <a:prstGeom prst="rect">
+            <a:avLst/>
+          </a:prstGeom>
+          <a:solidFill>
+            <a:srgbClr val="F2F2F2"/>
+          </a:solidFill>
+          <a:ln w="6350">
+            <a:solidFill>
+              <a:srgbClr val="595959"/>
+            </a:solidFill>
+          </a:ln>
+          <a:effectLst/>
+        </p:spPr>
+        <p:style>
+          <a:lnRef idx="1">
+            <a:schemeClr val="accent1"/>
+          </a:lnRef>
+          <a:fillRef idx="3">
+            <a:schemeClr val="accent1"/>
+          </a:fillRef>
+          <a:effectRef idx="2">
+            <a:schemeClr val="accent1"/>
+          </a:effectRef>
+          <a:fontRef idx="minor">
+            <a:schemeClr val="lt1"/>
+          </a:fontRef>
+        </p:style>
+        <p:txBody>
+          <a:bodyPr rtlCol="0" anchor="ctr" wrap="square" tIns="36576" bIns="36576"/>
+          <a:lstStyle/>
+          <a:p>
+            <a:pPr algn="ctr">
+              <a:spcAft>
+                <a:spcPts val="200"/>
+              </a:spcAft>
+            </a:pPr>
+            <a:r>
+              <a:rPr sz="1250" b="1">
+                <a:solidFill>
+                  <a:srgbClr val="1F3A5F"/>
+                </a:solidFill>
+                <a:latin typeface="IPAGothic"/>
+                <a:eastAsia typeface="IPAGothic"/>
+              </a:rPr>
+              <a:t>規準の事前具体化</a:t>
+            </a:r>
+          </a:p>
+        </p:txBody>
+      </p:sp>
+      <p:sp>
+        <p:nvSpPr>
+          <p:cNvPr id="15" name="Rectangle 14"/>
+          <p:cNvSpPr/>
+          <p:nvPr/>
+        </p:nvSpPr>
+        <p:spPr>
+          <a:xfrm>
+            <a:off x="3904487" y="2852928"/>
+            <a:ext cx="7827264" cy="621792"/>
+          </a:xfrm>
+          <a:prstGeom prst="rect">
+            <a:avLst/>
+          </a:prstGeom>
+          <a:solidFill>
+            <a:srgbClr val="FFFFFF"/>
+          </a:solidFill>
+          <a:ln w="6350">
+            <a:solidFill>
+              <a:srgbClr val="595959"/>
+            </a:solidFill>
+          </a:ln>
+          <a:effectLst/>
+        </p:spPr>
+        <p:style>
+          <a:lnRef idx="1">
+            <a:schemeClr val="accent1"/>
+          </a:lnRef>
+          <a:fillRef idx="3">
+            <a:schemeClr val="accent1"/>
+          </a:fillRef>
+          <a:effectRef idx="2">
+            <a:schemeClr val="accent1"/>
+          </a:effectRef>
+          <a:fontRef idx="minor">
+            <a:schemeClr val="lt1"/>
+          </a:fontRef>
+        </p:style>
+        <p:txBody>
+          <a:bodyPr rtlCol="0" anchor="ctr" wrap="square" tIns="36576" bIns="36576"/>
+          <a:lstStyle/>
+          <a:p>
+            <a:pPr algn="l">
+              <a:spcAft>
+                <a:spcPts val="200"/>
+              </a:spcAft>
+            </a:pPr>
+            <a:r>
+              <a:rPr sz="1200" b="0">
+                <a:solidFill>
+                  <a:srgbClr val="222222"/>
+                </a:solidFill>
+                <a:latin typeface="IPAGothic"/>
+                <a:eastAsia typeface="IPAGothic"/>
+              </a:rPr>
+              <a:t>「前時のノートを見返す」「式に言葉や図を書き加える」「別の方法を試す」など “観察できる姿” を言語化(=ルーブリック)</a:t>
+            </a:r>
+          </a:p>
+        </p:txBody>
+      </p:sp>
+      <p:sp>
+        <p:nvSpPr>
+          <p:cNvPr id="16" name="Rectangle 15"/>
+          <p:cNvSpPr/>
+          <p:nvPr/>
+        </p:nvSpPr>
+        <p:spPr>
+          <a:xfrm>
+            <a:off x="457200" y="3511296"/>
+            <a:ext cx="566928" cy="621792"/>
+          </a:xfrm>
+          <a:prstGeom prst="rect">
+            <a:avLst/>
+          </a:prstGeom>
+          <a:solidFill>
+            <a:srgbClr val="1F3A5F"/>
+          </a:solidFill>
+          <a:ln>
+            <a:noFill/>
+          </a:ln>
+          <a:effectLst/>
+        </p:spPr>
+        <p:style>
+          <a:lnRef idx="1">
+            <a:schemeClr val="accent1"/>
+          </a:lnRef>
+          <a:fillRef idx="3">
+            <a:schemeClr val="accent1"/>
+          </a:fillRef>
+          <a:effectRef idx="2">
+            <a:schemeClr val="accent1"/>
+          </a:effectRef>
+          <a:fontRef idx="minor">
+            <a:schemeClr val="lt1"/>
+          </a:fontRef>
+        </p:style>
+        <p:txBody>
+          <a:bodyPr rtlCol="0" anchor="ctr" wrap="square" tIns="36576" bIns="36576"/>
+          <a:lstStyle/>
+          <a:p>
+            <a:pPr algn="ctr">
+              <a:spcAft>
+                <a:spcPts val="200"/>
+              </a:spcAft>
+            </a:pPr>
+            <a:r>
+              <a:rPr sz="1700" b="1">
+                <a:solidFill>
+                  <a:srgbClr val="FFFFFF"/>
+                </a:solidFill>
+                <a:latin typeface="IPAGothic"/>
+                <a:eastAsia typeface="IPAGothic"/>
+              </a:rPr>
+              <a:t>③</a:t>
+            </a:r>
+          </a:p>
+        </p:txBody>
+      </p:sp>
+      <p:sp>
+        <p:nvSpPr>
+          <p:cNvPr id="17" name="Rectangle 16"/>
+          <p:cNvSpPr/>
+          <p:nvPr/>
+        </p:nvSpPr>
+        <p:spPr>
+          <a:xfrm>
+            <a:off x="1069848" y="3511296"/>
+            <a:ext cx="2788920" cy="621792"/>
+          </a:xfrm>
+          <a:prstGeom prst="rect">
+            <a:avLst/>
+          </a:prstGeom>
+          <a:solidFill>
+            <a:srgbClr val="D6E4F0"/>
+          </a:solidFill>
+          <a:ln w="6350">
+            <a:solidFill>
+              <a:srgbClr val="595959"/>
+            </a:solidFill>
+          </a:ln>
+          <a:effectLst/>
+        </p:spPr>
+        <p:style>
+          <a:lnRef idx="1">
+            <a:schemeClr val="accent1"/>
+          </a:lnRef>
+          <a:fillRef idx="3">
+            <a:schemeClr val="accent1"/>
+          </a:fillRef>
+          <a:effectRef idx="2">
+            <a:schemeClr val="accent1"/>
+          </a:effectRef>
+          <a:fontRef idx="minor">
+            <a:schemeClr val="lt1"/>
+          </a:fontRef>
+        </p:style>
+        <p:txBody>
+          <a:bodyPr rtlCol="0" anchor="ctr" wrap="square" tIns="36576" bIns="36576"/>
+          <a:lstStyle/>
+          <a:p>
+            <a:pPr algn="ctr">
+              <a:spcAft>
+                <a:spcPts val="200"/>
+              </a:spcAft>
+            </a:pPr>
+            <a:r>
+              <a:rPr sz="1250" b="1">
+                <a:solidFill>
+                  <a:srgbClr val="1F3A5F"/>
+                </a:solidFill>
+                <a:latin typeface="IPAGothic"/>
+                <a:eastAsia typeface="IPAGothic"/>
+              </a:rPr>
+              <a:t>複数方法で確かめる</a:t>
+            </a:r>
+          </a:p>
+        </p:txBody>
+      </p:sp>
+      <p:sp>
+        <p:nvSpPr>
+          <p:cNvPr id="18" name="Rectangle 17"/>
+          <p:cNvSpPr/>
+          <p:nvPr/>
+        </p:nvSpPr>
+        <p:spPr>
+          <a:xfrm>
+            <a:off x="3904487" y="3511296"/>
+            <a:ext cx="7827264" cy="621792"/>
+          </a:xfrm>
+          <a:prstGeom prst="rect">
+            <a:avLst/>
+          </a:prstGeom>
+          <a:solidFill>
+            <a:srgbClr val="FFFFFF"/>
+          </a:solidFill>
+          <a:ln w="6350">
+            <a:solidFill>
+              <a:srgbClr val="595959"/>
+            </a:solidFill>
+          </a:ln>
+          <a:effectLst/>
+        </p:spPr>
+        <p:style>
+          <a:lnRef idx="1">
+            <a:schemeClr val="accent1"/>
+          </a:lnRef>
+          <a:fillRef idx="3">
+            <a:schemeClr val="accent1"/>
+          </a:fillRef>
+          <a:effectRef idx="2">
+            <a:schemeClr val="accent1"/>
+          </a:effectRef>
+          <a:fontRef idx="minor">
+            <a:schemeClr val="lt1"/>
+          </a:fontRef>
+        </p:style>
+        <p:txBody>
+          <a:bodyPr rtlCol="0" anchor="ctr" wrap="square" tIns="36576" bIns="36576"/>
+          <a:lstStyle/>
+          <a:p>
+            <a:pPr algn="l">
+              <a:spcAft>
+                <a:spcPts val="200"/>
+              </a:spcAft>
+            </a:pPr>
+            <a:r>
+              <a:rPr sz="1200" b="0">
+                <a:solidFill>
+                  <a:srgbClr val="222222"/>
+                </a:solidFill>
+                <a:latin typeface="IPAGothic"/>
+                <a:eastAsia typeface="IPAGothic"/>
+              </a:rPr>
+              <a:t>行動観察は “材料の一つ”。記述・自己評価と突き合わせ、単独では決めない</a:t>
+            </a:r>
+          </a:p>
+        </p:txBody>
+      </p:sp>
+      <p:sp>
+        <p:nvSpPr>
+          <p:cNvPr id="19" name="Rectangle 18"/>
+          <p:cNvSpPr/>
+          <p:nvPr/>
+        </p:nvSpPr>
+        <p:spPr>
+          <a:xfrm>
+            <a:off x="457200" y="4169664"/>
+            <a:ext cx="566928" cy="621792"/>
+          </a:xfrm>
+          <a:prstGeom prst="rect">
+            <a:avLst/>
+          </a:prstGeom>
+          <a:solidFill>
+            <a:srgbClr val="1F3A5F"/>
+          </a:solidFill>
+          <a:ln>
+            <a:noFill/>
+          </a:ln>
+          <a:effectLst/>
+        </p:spPr>
+        <p:style>
+          <a:lnRef idx="1">
+            <a:schemeClr val="accent1"/>
+          </a:lnRef>
+          <a:fillRef idx="3">
+            <a:schemeClr val="accent1"/>
+          </a:fillRef>
+          <a:effectRef idx="2">
+            <a:schemeClr val="accent1"/>
+          </a:effectRef>
+          <a:fontRef idx="minor">
+            <a:schemeClr val="lt1"/>
+          </a:fontRef>
+        </p:style>
+        <p:txBody>
+          <a:bodyPr rtlCol="0" anchor="ctr" wrap="square" tIns="36576" bIns="36576"/>
+          <a:lstStyle/>
+          <a:p>
+            <a:pPr algn="ctr">
+              <a:spcAft>
+                <a:spcPts val="200"/>
+              </a:spcAft>
+            </a:pPr>
+            <a:r>
+              <a:rPr sz="1700" b="1">
+                <a:solidFill>
+                  <a:srgbClr val="FFFFFF"/>
+                </a:solidFill>
+                <a:latin typeface="IPAGothic"/>
+                <a:eastAsia typeface="IPAGothic"/>
+              </a:rPr>
+              <a:t>④</a:t>
+            </a:r>
+          </a:p>
+        </p:txBody>
+      </p:sp>
+      <p:sp>
+        <p:nvSpPr>
+          <p:cNvPr id="20" name="Rectangle 19"/>
+          <p:cNvSpPr/>
+          <p:nvPr/>
+        </p:nvSpPr>
+        <p:spPr>
+          <a:xfrm>
+            <a:off x="1069848" y="4169664"/>
+            <a:ext cx="2788920" cy="621792"/>
+          </a:xfrm>
+          <a:prstGeom prst="rect">
+            <a:avLst/>
+          </a:prstGeom>
+          <a:solidFill>
+            <a:srgbClr val="F2F2F2"/>
+          </a:solidFill>
+          <a:ln w="6350">
+            <a:solidFill>
+              <a:srgbClr val="595959"/>
+            </a:solidFill>
+          </a:ln>
+          <a:effectLst/>
+        </p:spPr>
+        <p:style>
+          <a:lnRef idx="1">
+            <a:schemeClr val="accent1"/>
+          </a:lnRef>
+          <a:fillRef idx="3">
+            <a:schemeClr val="accent1"/>
+          </a:fillRef>
+          <a:effectRef idx="2">
+            <a:schemeClr val="accent1"/>
+          </a:effectRef>
+          <a:fontRef idx="minor">
+            <a:schemeClr val="lt1"/>
+          </a:fontRef>
+        </p:style>
+        <p:txBody>
+          <a:bodyPr rtlCol="0" anchor="ctr" wrap="square" tIns="36576" bIns="36576"/>
+          <a:lstStyle/>
+          <a:p>
+            <a:pPr algn="ctr">
+              <a:spcAft>
+                <a:spcPts val="200"/>
+              </a:spcAft>
+            </a:pPr>
+            <a:r>
+              <a:rPr sz="1250" b="1">
+                <a:solidFill>
+                  <a:srgbClr val="1F3A5F"/>
+                </a:solidFill>
+                <a:latin typeface="IPAGothic"/>
+                <a:eastAsia typeface="IPAGothic"/>
+              </a:rPr>
+              <a:t>複数場面・継続的に</a:t>
+            </a:r>
+          </a:p>
+        </p:txBody>
+      </p:sp>
+      <p:sp>
+        <p:nvSpPr>
+          <p:cNvPr id="21" name="Rectangle 20"/>
+          <p:cNvSpPr/>
+          <p:nvPr/>
+        </p:nvSpPr>
+        <p:spPr>
+          <a:xfrm>
+            <a:off x="3904487" y="4169664"/>
+            <a:ext cx="7827264" cy="621792"/>
+          </a:xfrm>
+          <a:prstGeom prst="rect">
+            <a:avLst/>
+          </a:prstGeom>
+          <a:solidFill>
+            <a:srgbClr val="FFFFFF"/>
+          </a:solidFill>
+          <a:ln w="6350">
+            <a:solidFill>
+              <a:srgbClr val="595959"/>
+            </a:solidFill>
+          </a:ln>
+          <a:effectLst/>
+        </p:spPr>
+        <p:style>
+          <a:lnRef idx="1">
+            <a:schemeClr val="accent1"/>
+          </a:lnRef>
+          <a:fillRef idx="3">
+            <a:schemeClr val="accent1"/>
+          </a:fillRef>
+          <a:effectRef idx="2">
+            <a:schemeClr val="accent1"/>
+          </a:effectRef>
+          <a:fontRef idx="minor">
+            <a:schemeClr val="lt1"/>
+          </a:fontRef>
+        </p:style>
+        <p:txBody>
+          <a:bodyPr rtlCol="0" anchor="ctr" wrap="square" tIns="36576" bIns="36576"/>
+          <a:lstStyle/>
+          <a:p>
+            <a:pPr algn="l">
+              <a:spcAft>
+                <a:spcPts val="200"/>
+              </a:spcAft>
+            </a:pPr>
+            <a:r>
+              <a:rPr sz="1200" b="0">
+                <a:solidFill>
+                  <a:srgbClr val="222222"/>
+                </a:solidFill>
+                <a:latin typeface="IPAGothic"/>
+                <a:eastAsia typeface="IPAGothic"/>
+              </a:rPr>
+              <a:t>一場面の印象ではなく、単元を通して繰り返し見取る</a:t>
+            </a:r>
+          </a:p>
+        </p:txBody>
+      </p:sp>
+      <p:sp>
+        <p:nvSpPr>
+          <p:cNvPr id="22" name="Rectangle 21"/>
+          <p:cNvSpPr/>
+          <p:nvPr/>
+        </p:nvSpPr>
+        <p:spPr>
+          <a:xfrm>
+            <a:off x="457200" y="4828032"/>
+            <a:ext cx="566928" cy="621792"/>
+          </a:xfrm>
+          <a:prstGeom prst="rect">
+            <a:avLst/>
+          </a:prstGeom>
+          <a:solidFill>
+            <a:srgbClr val="1F3A5F"/>
+          </a:solidFill>
+          <a:ln>
+            <a:noFill/>
+          </a:ln>
+          <a:effectLst/>
+        </p:spPr>
+        <p:style>
+          <a:lnRef idx="1">
+            <a:schemeClr val="accent1"/>
+          </a:lnRef>
+          <a:fillRef idx="3">
+            <a:schemeClr val="accent1"/>
+          </a:fillRef>
+          <a:effectRef idx="2">
+            <a:schemeClr val="accent1"/>
+          </a:effectRef>
+          <a:fontRef idx="minor">
+            <a:schemeClr val="lt1"/>
+          </a:fontRef>
+        </p:style>
+        <p:txBody>
+          <a:bodyPr rtlCol="0" anchor="ctr" wrap="square" tIns="36576" bIns="36576"/>
+          <a:lstStyle/>
+          <a:p>
+            <a:pPr algn="ctr">
+              <a:spcAft>
+                <a:spcPts val="200"/>
+              </a:spcAft>
+            </a:pPr>
+            <a:r>
+              <a:rPr sz="1700" b="1">
+                <a:solidFill>
+                  <a:srgbClr val="FFFFFF"/>
+                </a:solidFill>
+                <a:latin typeface="IPAGothic"/>
+                <a:eastAsia typeface="IPAGothic"/>
+              </a:rPr>
+              <a:t>⑤</a:t>
+            </a:r>
+          </a:p>
+        </p:txBody>
+      </p:sp>
+      <p:sp>
+        <p:nvSpPr>
+          <p:cNvPr id="23" name="Rectangle 22"/>
+          <p:cNvSpPr/>
+          <p:nvPr/>
+        </p:nvSpPr>
+        <p:spPr>
+          <a:xfrm>
+            <a:off x="1069848" y="4828032"/>
+            <a:ext cx="2788920" cy="621792"/>
+          </a:xfrm>
+          <a:prstGeom prst="rect">
+            <a:avLst/>
+          </a:prstGeom>
+          <a:solidFill>
+            <a:srgbClr val="D6E4F0"/>
+          </a:solidFill>
+          <a:ln w="6350">
+            <a:solidFill>
+              <a:srgbClr val="595959"/>
+            </a:solidFill>
+          </a:ln>
+          <a:effectLst/>
+        </p:spPr>
+        <p:style>
+          <a:lnRef idx="1">
+            <a:schemeClr val="accent1"/>
+          </a:lnRef>
+          <a:fillRef idx="3">
+            <a:schemeClr val="accent1"/>
+          </a:fillRef>
+          <a:effectRef idx="2">
+            <a:schemeClr val="accent1"/>
+          </a:effectRef>
+          <a:fontRef idx="minor">
+            <a:schemeClr val="lt1"/>
+          </a:fontRef>
+        </p:style>
+        <p:txBody>
+          <a:bodyPr rtlCol="0" anchor="ctr" wrap="square" tIns="36576" bIns="36576"/>
+          <a:lstStyle/>
+          <a:p>
+            <a:pPr algn="ctr">
+              <a:spcAft>
+                <a:spcPts val="200"/>
+              </a:spcAft>
+            </a:pPr>
+            <a:r>
+              <a:rPr sz="1250" b="1">
+                <a:solidFill>
+                  <a:srgbClr val="1F3A5F"/>
+                </a:solidFill>
+                <a:latin typeface="IPAGothic"/>
+                <a:eastAsia typeface="IPAGothic"/>
+              </a:rPr>
+              <a:t>組織的モデレーション</a:t>
+            </a:r>
+          </a:p>
+        </p:txBody>
+      </p:sp>
+      <p:sp>
+        <p:nvSpPr>
+          <p:cNvPr id="24" name="Rectangle 23"/>
+          <p:cNvSpPr/>
+          <p:nvPr/>
+        </p:nvSpPr>
+        <p:spPr>
+          <a:xfrm>
+            <a:off x="3904487" y="4828032"/>
+            <a:ext cx="7827264" cy="621792"/>
+          </a:xfrm>
+          <a:prstGeom prst="rect">
+            <a:avLst/>
+          </a:prstGeom>
+          <a:solidFill>
+            <a:srgbClr val="FFFFFF"/>
+          </a:solidFill>
+          <a:ln w="6350">
+            <a:solidFill>
+              <a:srgbClr val="595959"/>
+            </a:solidFill>
+          </a:ln>
+          <a:effectLst/>
+        </p:spPr>
+        <p:style>
+          <a:lnRef idx="1">
+            <a:schemeClr val="accent1"/>
+          </a:lnRef>
+          <a:fillRef idx="3">
+            <a:schemeClr val="accent1"/>
+          </a:fillRef>
+          <a:effectRef idx="2">
+            <a:schemeClr val="accent1"/>
+          </a:effectRef>
+          <a:fontRef idx="minor">
+            <a:schemeClr val="lt1"/>
+          </a:fontRef>
+        </p:style>
+        <p:txBody>
+          <a:bodyPr rtlCol="0" anchor="ctr" wrap="square" tIns="36576" bIns="36576"/>
+          <a:lstStyle/>
+          <a:p>
+            <a:pPr algn="l">
+              <a:spcAft>
+                <a:spcPts val="200"/>
+              </a:spcAft>
+            </a:pPr>
+            <a:r>
+              <a:rPr sz="1200" b="0">
+                <a:solidFill>
+                  <a:srgbClr val="222222"/>
+                </a:solidFill>
+                <a:latin typeface="IPAGothic"/>
+                <a:eastAsia typeface="IPAGothic"/>
+              </a:rPr>
+              <a:t>中教審「学校として組織的・計画的に/教師間で規準・方法を共有し、妥当性・信頼性を高める」</a:t>
+            </a:r>
+          </a:p>
+        </p:txBody>
+      </p:sp>
+      <p:sp>
+        <p:nvSpPr>
+          <p:cNvPr id="25" name="Rectangle 24"/>
+          <p:cNvSpPr/>
+          <p:nvPr/>
+        </p:nvSpPr>
+        <p:spPr>
+          <a:xfrm>
+            <a:off x="457200" y="5897880"/>
+            <a:ext cx="11274552" cy="548640"/>
+          </a:xfrm>
+          <a:prstGeom prst="rect">
+            <a:avLst/>
+          </a:prstGeom>
+          <a:solidFill>
+            <a:srgbClr val="C45A11"/>
+          </a:solidFill>
+          <a:ln>
+            <a:noFill/>
+          </a:ln>
+          <a:effectLst/>
+        </p:spPr>
+        <p:style>
+          <a:lnRef idx="1">
+            <a:schemeClr val="accent1"/>
+          </a:lnRef>
+          <a:fillRef idx="3">
+            <a:schemeClr val="accent1"/>
+          </a:fillRef>
+          <a:effectRef idx="2">
+            <a:schemeClr val="accent1"/>
+          </a:effectRef>
+          <a:fontRef idx="minor">
+            <a:schemeClr val="lt1"/>
+          </a:fontRef>
+        </p:style>
+        <p:txBody>
+          <a:bodyPr rtlCol="0" anchor="ctr" wrap="square" tIns="36576" bIns="36576"/>
+          <a:lstStyle/>
+          <a:p>
+            <a:pPr algn="ctr">
+              <a:spcAft>
+                <a:spcPts val="200"/>
+              </a:spcAft>
+            </a:pPr>
+            <a:r>
+              <a:rPr sz="1350" b="1">
+                <a:solidFill>
+                  <a:srgbClr val="FFFFFF"/>
+                </a:solidFill>
+                <a:latin typeface="IPAGothic"/>
+                <a:eastAsia typeface="IPAGothic"/>
+              </a:rPr>
+              <a:t>★ 主観を “排除” するのではなく、規準と手続きで “統制” する ― 完全な客観ではなく、説明責任で担保する。</a:t>
             </a:r>
           </a:p>
         </p:txBody>
